--- a/docs/llm-api-gateway汇报/AI网关如何在企业中实现大模型自动化编程落地.pptx
+++ b/docs/llm-api-gateway汇报/AI网关如何在企业中实现大模型自动化编程落地.pptx
@@ -1037,16 +1037,76 @@
               </a:lnSpc>
             </a:pPr>
             <a:r>
-              <a:rPr lang="en-US" sz="1050">
+              <a:rPr lang="en-US" sz="1050" dirty="0">
                 <a:solidFill>
                   <a:srgbClr val="0EA5E9"/>
                 </a:solidFill>
                 <a:latin typeface="Microsoft YaHei"/>
                 <a:ea typeface="Microsoft YaHei"/>
               </a:rPr>
-              <a:t>github.com/boonya-hrgk/llm-proxy-tk</a:t>
-            </a:r>
-            <a:endParaRPr/>
+              <a:t>github.com/boonya-</a:t>
+            </a:r>
+            <a:r>
+              <a:rPr lang="en-US" sz="1050" dirty="0" err="1">
+                <a:solidFill>
+                  <a:srgbClr val="0EA5E9"/>
+                </a:solidFill>
+                <a:latin typeface="Microsoft YaHei"/>
+                <a:ea typeface="Microsoft YaHei"/>
+              </a:rPr>
+              <a:t>hrgk</a:t>
+            </a:r>
+            <a:r>
+              <a:rPr lang="en-US" sz="1050" dirty="0">
+                <a:solidFill>
+                  <a:srgbClr val="0EA5E9"/>
+                </a:solidFill>
+                <a:latin typeface="Microsoft YaHei"/>
+                <a:ea typeface="Microsoft YaHei"/>
+              </a:rPr>
+              <a:t>/</a:t>
+            </a:r>
+            <a:r>
+              <a:rPr lang="en-US" sz="1050" dirty="0" err="1">
+                <a:solidFill>
+                  <a:srgbClr val="0EA5E9"/>
+                </a:solidFill>
+                <a:latin typeface="Microsoft YaHei"/>
+                <a:ea typeface="Microsoft YaHei"/>
+              </a:rPr>
+              <a:t>llm</a:t>
+            </a:r>
+            <a:r>
+              <a:rPr lang="en-US" sz="1050" dirty="0">
+                <a:solidFill>
+                  <a:srgbClr val="0EA5E9"/>
+                </a:solidFill>
+                <a:latin typeface="Microsoft YaHei"/>
+                <a:ea typeface="Microsoft YaHei"/>
+              </a:rPr>
+              <a:t>-</a:t>
+            </a:r>
+            <a:r>
+              <a:rPr lang="en-US" altLang="zh-CN" sz="1050" dirty="0" err="1">
+                <a:solidFill>
+                  <a:srgbClr val="0EA5E9"/>
+                </a:solidFill>
+                <a:latin typeface="Microsoft YaHei"/>
+                <a:ea typeface="Microsoft YaHei"/>
+              </a:rPr>
+              <a:t>api</a:t>
+            </a:r>
+            <a:r>
+              <a:rPr lang="en-US" altLang="zh-CN" sz="1050" dirty="0">
+                <a:solidFill>
+                  <a:srgbClr val="0EA5E9"/>
+                </a:solidFill>
+                <a:latin typeface="Microsoft YaHei"/>
+                <a:ea typeface="Microsoft YaHei"/>
+              </a:rPr>
+              <a:t>-gateway</a:t>
+            </a:r>
+            <a:endParaRPr dirty="0"/>
           </a:p>
         </p:txBody>
       </p:sp>
@@ -1098,7 +1158,7 @@
           <a:bodyPr/>
           <a:lstStyle/>
           <a:p>
-            <a:endParaRPr/>
+            <a:endParaRPr dirty="0"/>
           </a:p>
         </p:txBody>
       </p:sp>
@@ -2206,7 +2266,7 @@
         </p:blipFill>
         <p:spPr>
           <a:xfrm>
-            <a:off x="7677150" y="3429000"/>
+            <a:off x="7696200" y="638175"/>
             <a:ext cx="3886200" cy="5600700"/>
           </a:xfrm>
           <a:prstGeom prst="roundRect">
@@ -3688,7 +3748,13 @@
       </p:sp>
       <p:pic>
         <p:nvPicPr>
-          <p:cNvPr id="67" name="图片 66"/>
+          <p:cNvPr id="4" name="图片 3">
+            <a:extLst>
+              <a:ext uri="{FF2B5EF4-FFF2-40B4-BE49-F238E27FC236}">
+                <a16:creationId xmlns:a16="http://schemas.microsoft.com/office/drawing/2014/main" id="{5632F940-D72C-765F-FB6A-D30FF69B3377}"/>
+              </a:ext>
+            </a:extLst>
+          </p:cNvPr>
           <p:cNvPicPr>
             <a:picLocks noChangeAspect="1"/>
           </p:cNvPicPr>
@@ -3696,14 +3762,14 @@
         </p:nvPicPr>
         <p:blipFill>
           <a:blip r:embed="rId2"/>
-          <a:srcRect l="33283" r="33283"/>
+          <a:srcRect l="33705" r="33705"/>
           <a:stretch>
             <a:fillRect/>
           </a:stretch>
         </p:blipFill>
         <p:spPr>
           <a:xfrm>
-            <a:off x="7677150" y="3429000"/>
+            <a:off x="7696200" y="638175"/>
             <a:ext cx="3886200" cy="5600700"/>
           </a:xfrm>
           <a:prstGeom prst="roundRect">
@@ -6756,7 +6822,7 @@
         </p:blipFill>
         <p:spPr>
           <a:xfrm>
-            <a:off x="7677150" y="3429000"/>
+            <a:off x="7600950" y="581025"/>
             <a:ext cx="3886200" cy="5600700"/>
           </a:xfrm>
           <a:prstGeom prst="roundRect">
@@ -8209,7 +8275,7 @@
         </p:blipFill>
         <p:spPr>
           <a:xfrm>
-            <a:off x="6286500" y="2733675"/>
+            <a:off x="6286500" y="1590674"/>
             <a:ext cx="5448300" cy="2276475"/>
           </a:xfrm>
           <a:prstGeom prst="roundRect">
@@ -8266,7 +8332,7 @@
         </p:blipFill>
         <p:spPr>
           <a:xfrm>
-            <a:off x="6286500" y="5267325"/>
+            <a:off x="6286500" y="4133850"/>
             <a:ext cx="5448300" cy="2266950"/>
           </a:xfrm>
           <a:prstGeom prst="roundRect">
@@ -8527,7 +8593,7 @@
               </a:lnSpc>
             </a:pPr>
             <a:r>
-              <a:rPr lang="zh-CN" sz="1125">
+              <a:rPr lang="zh-CN" sz="1125" dirty="0">
                 <a:solidFill>
                   <a:srgbClr val="64748B"/>
                 </a:solidFill>
@@ -8537,7 +8603,7 @@
               <a:t>员工</a:t>
             </a:r>
             <a:r>
-              <a:rPr lang="en-US" sz="1125">
+              <a:rPr lang="en-US" sz="1125" dirty="0">
                 <a:solidFill>
                   <a:srgbClr val="64748B"/>
                 </a:solidFill>
@@ -8547,7 +8613,7 @@
               <a:t> IDE </a:t>
             </a:r>
             <a:r>
-              <a:rPr lang="zh-CN" sz="1125">
+              <a:rPr lang="zh-CN" sz="1125" dirty="0">
                 <a:solidFill>
                   <a:srgbClr val="64748B"/>
                 </a:solidFill>
@@ -8557,7 +8623,7 @@
               <a:t>零改造，</a:t>
             </a:r>
             <a:r>
-              <a:rPr lang="en-US" sz="1125">
+              <a:rPr lang="en-US" sz="1125" dirty="0">
                 <a:solidFill>
                   <a:srgbClr val="64748B"/>
                 </a:solidFill>
@@ -8567,7 +8633,7 @@
               <a:t>CC Switch </a:t>
             </a:r>
             <a:r>
-              <a:rPr lang="zh-CN" sz="1125">
+              <a:rPr lang="zh-CN" sz="1125" dirty="0">
                 <a:solidFill>
                   <a:srgbClr val="64748B"/>
                 </a:solidFill>
@@ -8576,7 +8642,7 @@
               </a:rPr>
               <a:t>一键指向网关</a:t>
             </a:r>
-            <a:endParaRPr/>
+            <a:endParaRPr dirty="0"/>
           </a:p>
         </p:txBody>
       </p:sp>
@@ -9393,305 +9459,36 @@
               </a:lnSpc>
             </a:pPr>
             <a:r>
-              <a:rPr lang="zh-CN" sz="1200" b="1">
+              <a:rPr lang="zh-CN" sz="1200" b="1" dirty="0">
                 <a:solidFill>
                   <a:srgbClr val="1F3A8A"/>
                 </a:solidFill>
                 <a:latin typeface="Microsoft YaHei"/>
                 <a:ea typeface="Microsoft YaHei"/>
               </a:rPr>
-              <a:t>接入示意</a:t>
-            </a:r>
-            <a:endParaRPr/>
-          </a:p>
-        </p:txBody>
-      </p:sp>
-      <p:sp>
-        <p:nvSpPr>
-          <p:cNvPr id="189" name="矩形: 圆角 188"/>
-          <p:cNvSpPr/>
-          <p:nvPr/>
-        </p:nvSpPr>
-        <p:spPr>
-          <a:xfrm>
-            <a:off x="6248400" y="1990725"/>
-            <a:ext cx="5467350" cy="1504950"/>
-          </a:xfrm>
-          <a:prstGeom prst="roundRect">
-            <a:avLst>
-              <a:gd name="adj" fmla="val 5063"/>
-            </a:avLst>
-          </a:prstGeom>
-          <a:solidFill>
-            <a:srgbClr val="0F172A"/>
-          </a:solidFill>
-          <a:ln/>
-        </p:spPr>
-        <p:txBody>
-          <a:bodyPr/>
-          <a:lstStyle/>
-          <a:p>
-            <a:endParaRPr/>
-          </a:p>
-        </p:txBody>
-      </p:sp>
-      <p:sp>
-        <p:nvSpPr>
-          <p:cNvPr id="190" name="文本框 189" descr="{&quot;isTemplate&quot;:true,&quot;type&quot;:&quot;text&quot;}"/>
-          <p:cNvSpPr txBox="1"/>
-          <p:nvPr/>
-        </p:nvSpPr>
-        <p:spPr>
-          <a:xfrm>
-            <a:off x="6419850" y="2162175"/>
-            <a:ext cx="5124450" cy="133350"/>
-          </a:xfrm>
-          <a:prstGeom prst="rect">
-            <a:avLst/>
-          </a:prstGeom>
-        </p:spPr>
-        <p:txBody>
-          <a:bodyPr wrap="none" lIns="0" tIns="0" rIns="0" bIns="0"/>
-          <a:lstStyle/>
-          <a:p>
-            <a:pPr>
-              <a:lnSpc>
-                <a:spcPct val="100000"/>
-              </a:lnSpc>
-            </a:pPr>
-            <a:r>
-              <a:rPr lang="en-US" sz="825">
-                <a:solidFill>
-                  <a:srgbClr val="94A3B8"/>
-                </a:solidFill>
-                <a:latin typeface="monospace"/>
-                <a:ea typeface="monospace"/>
-              </a:rPr>
-              <a:t>// CC Switch Provider Config</a:t>
-            </a:r>
-            <a:endParaRPr/>
-          </a:p>
-        </p:txBody>
-      </p:sp>
-      <p:sp>
-        <p:nvSpPr>
-          <p:cNvPr id="191" name="文本框 190" descr="{&quot;isTemplate&quot;:true,&quot;type&quot;:&quot;text&quot;}"/>
-          <p:cNvSpPr txBox="1"/>
-          <p:nvPr/>
-        </p:nvSpPr>
-        <p:spPr>
-          <a:xfrm>
-            <a:off x="6419850" y="2390775"/>
-            <a:ext cx="5124450" cy="933450"/>
-          </a:xfrm>
-          <a:prstGeom prst="rect">
-            <a:avLst/>
-          </a:prstGeom>
-        </p:spPr>
-        <p:txBody>
-          <a:bodyPr wrap="none" lIns="0" tIns="0" rIns="0" bIns="0"/>
-          <a:lstStyle/>
-          <a:p>
-            <a:pPr>
-              <a:lnSpc>
-                <a:spcPct val="170000"/>
-              </a:lnSpc>
-            </a:pPr>
-            <a:r>
-              <a:rPr lang="en-US" sz="900">
-                <a:solidFill>
-                  <a:srgbClr val="0EA5E9"/>
-                </a:solidFill>
-                <a:latin typeface="monospace"/>
-                <a:ea typeface="monospace"/>
-              </a:rPr>
-              <a:t>name</a:t>
-            </a:r>
-            <a:r>
-              <a:rPr lang="en-US" sz="900">
-                <a:solidFill>
-                  <a:srgbClr val="E2E8F0"/>
-                </a:solidFill>
-                <a:latin typeface="monospace"/>
-                <a:ea typeface="monospace"/>
-              </a:rPr>
-              <a:t>: </a:t>
-            </a:r>
-            <a:r>
-              <a:rPr lang="en-US" sz="900">
-                <a:solidFill>
-                  <a:srgbClr val="10B981"/>
-                </a:solidFill>
-                <a:latin typeface="monospace"/>
-                <a:ea typeface="monospace"/>
-              </a:rPr>
-              <a:t>"</a:t>
-            </a:r>
-            <a:r>
-              <a:rPr lang="zh-CN" sz="900">
-                <a:solidFill>
-                  <a:srgbClr val="10B981"/>
-                </a:solidFill>
-                <a:latin typeface="monospace"/>
-                <a:ea typeface="monospace"/>
-              </a:rPr>
-              <a:t>公司内网网关</a:t>
-            </a:r>
-            <a:r>
-              <a:rPr lang="en-US" sz="900">
-                <a:solidFill>
-                  <a:srgbClr val="10B981"/>
-                </a:solidFill>
-                <a:latin typeface="monospace"/>
-                <a:ea typeface="monospace"/>
-              </a:rPr>
-              <a:t>"</a:t>
-            </a:r>
-            <a:endParaRPr/>
-          </a:p>
-          <a:p>
-            <a:pPr>
-              <a:lnSpc>
-                <a:spcPct val="170000"/>
-              </a:lnSpc>
-            </a:pPr>
-            <a:r>
-              <a:rPr lang="en-US" sz="900">
-                <a:solidFill>
-                  <a:srgbClr val="0EA5E9"/>
-                </a:solidFill>
-                <a:latin typeface="monospace"/>
-                <a:ea typeface="monospace"/>
-              </a:rPr>
-              <a:t>baseURL</a:t>
-            </a:r>
-            <a:r>
-              <a:rPr lang="en-US" sz="900">
-                <a:solidFill>
-                  <a:srgbClr val="E2E8F0"/>
-                </a:solidFill>
-                <a:latin typeface="monospace"/>
-                <a:ea typeface="monospace"/>
-              </a:rPr>
-              <a:t>: </a:t>
-            </a:r>
-            <a:r>
-              <a:rPr lang="en-US" sz="900">
-                <a:solidFill>
-                  <a:srgbClr val="10B981"/>
-                </a:solidFill>
-                <a:latin typeface="monospace"/>
-                <a:ea typeface="monospace"/>
-              </a:rPr>
-              <a:t>"http://gateway.</a:t>
-            </a:r>
-            <a:r>
-              <a:rPr lang="zh-CN" sz="900">
-                <a:solidFill>
-                  <a:srgbClr val="10B981"/>
-                </a:solidFill>
-                <a:latin typeface="monospace"/>
-                <a:ea typeface="monospace"/>
-              </a:rPr>
-              <a:t>内网</a:t>
-            </a:r>
-            <a:r>
-              <a:rPr lang="en-US" sz="900">
-                <a:solidFill>
-                  <a:srgbClr val="10B981"/>
-                </a:solidFill>
-                <a:latin typeface="monospace"/>
-                <a:ea typeface="monospace"/>
-              </a:rPr>
-              <a:t>:9000/v1"</a:t>
-            </a:r>
-            <a:endParaRPr/>
-          </a:p>
-          <a:p>
-            <a:pPr>
-              <a:lnSpc>
-                <a:spcPct val="170000"/>
-              </a:lnSpc>
-            </a:pPr>
-            <a:r>
-              <a:rPr lang="en-US" sz="900">
-                <a:solidFill>
-                  <a:srgbClr val="0EA5E9"/>
-                </a:solidFill>
-                <a:latin typeface="monospace"/>
-                <a:ea typeface="monospace"/>
-              </a:rPr>
-              <a:t>apiKey</a:t>
-            </a:r>
-            <a:r>
-              <a:rPr lang="en-US" sz="900">
-                <a:solidFill>
-                  <a:srgbClr val="E2E8F0"/>
-                </a:solidFill>
-                <a:latin typeface="monospace"/>
-                <a:ea typeface="monospace"/>
-              </a:rPr>
-              <a:t>: </a:t>
-            </a:r>
-            <a:r>
-              <a:rPr lang="en-US" sz="900">
-                <a:solidFill>
-                  <a:srgbClr val="10B981"/>
-                </a:solidFill>
-                <a:latin typeface="monospace"/>
-                <a:ea typeface="monospace"/>
-              </a:rPr>
-              <a:t>"sk-xxx</a:t>
-            </a:r>
-            <a:r>
-              <a:rPr lang="zh-CN" sz="900">
-                <a:solidFill>
-                  <a:srgbClr val="10B981"/>
-                </a:solidFill>
-                <a:latin typeface="monospace"/>
-                <a:ea typeface="monospace"/>
-              </a:rPr>
-              <a:t>（网关发的）</a:t>
-            </a:r>
-            <a:r>
-              <a:rPr lang="en-US" sz="900">
-                <a:solidFill>
-                  <a:srgbClr val="10B981"/>
-                </a:solidFill>
-                <a:latin typeface="monospace"/>
-                <a:ea typeface="monospace"/>
-              </a:rPr>
-              <a:t>"</a:t>
-            </a:r>
-            <a:endParaRPr/>
-          </a:p>
-          <a:p>
-            <a:pPr>
-              <a:lnSpc>
-                <a:spcPct val="170000"/>
-              </a:lnSpc>
-            </a:pPr>
-            <a:r>
-              <a:rPr lang="en-US" sz="900">
-                <a:solidFill>
-                  <a:srgbClr val="0EA5E9"/>
-                </a:solidFill>
-                <a:latin typeface="monospace"/>
-                <a:ea typeface="monospace"/>
-              </a:rPr>
-              <a:t>models</a:t>
-            </a:r>
-            <a:r>
-              <a:rPr lang="en-US" sz="900">
-                <a:solidFill>
-                  <a:srgbClr val="E2E8F0"/>
-                </a:solidFill>
-                <a:latin typeface="monospace"/>
-                <a:ea typeface="monospace"/>
-              </a:rPr>
-              <a:t>: ["deepseek-chat", "qwen3-8b", ...]</a:t>
-            </a:r>
-            <a:endParaRPr/>
+              <a:t>接入</a:t>
+            </a:r>
+            <a:r>
+              <a:rPr lang="en-US" altLang="zh-CN" sz="1200" b="1" dirty="0">
+                <a:solidFill>
+                  <a:srgbClr val="1F3A8A"/>
+                </a:solidFill>
+                <a:latin typeface="Microsoft YaHei"/>
+                <a:ea typeface="Microsoft YaHei"/>
+              </a:rPr>
+              <a:t>JSON</a:t>
+            </a:r>
+            <a:r>
+              <a:rPr lang="zh-CN" altLang="en-US" sz="1200" b="1" dirty="0">
+                <a:solidFill>
+                  <a:srgbClr val="1F3A8A"/>
+                </a:solidFill>
+                <a:latin typeface="Microsoft YaHei"/>
+                <a:ea typeface="Microsoft YaHei"/>
+              </a:rPr>
+              <a:t>配置</a:t>
+            </a:r>
+            <a:endParaRPr dirty="0"/>
           </a:p>
         </p:txBody>
       </p:sp>
@@ -10011,6 +9808,36 @@
           </a:p>
         </p:txBody>
       </p:sp>
+      <p:pic>
+        <p:nvPicPr>
+          <p:cNvPr id="3" name="图片 2">
+            <a:extLst>
+              <a:ext uri="{FF2B5EF4-FFF2-40B4-BE49-F238E27FC236}">
+                <a16:creationId xmlns:a16="http://schemas.microsoft.com/office/drawing/2014/main" id="{FF4026EF-8F3E-85B3-7AAA-B66ED04B9C38}"/>
+              </a:ext>
+            </a:extLst>
+          </p:cNvPr>
+          <p:cNvPicPr>
+            <a:picLocks noChangeAspect="1"/>
+          </p:cNvPicPr>
+          <p:nvPr/>
+        </p:nvPicPr>
+        <p:blipFill>
+          <a:blip r:embed="rId2"/>
+          <a:stretch>
+            <a:fillRect/>
+          </a:stretch>
+        </p:blipFill>
+        <p:spPr>
+          <a:xfrm>
+            <a:off x="6153149" y="1984701"/>
+            <a:ext cx="5003755" cy="1444299"/>
+          </a:xfrm>
+          <a:prstGeom prst="rect">
+            <a:avLst/>
+          </a:prstGeom>
+        </p:spPr>
+      </p:pic>
     </p:spTree>
   </p:cSld>
   <p:clrMapOvr>
@@ -11300,7 +11127,13 @@
       </p:sp>
       <p:pic>
         <p:nvPicPr>
-          <p:cNvPr id="221" name="图片 220"/>
+          <p:cNvPr id="2" name="图片 1">
+            <a:extLst>
+              <a:ext uri="{FF2B5EF4-FFF2-40B4-BE49-F238E27FC236}">
+                <a16:creationId xmlns:a16="http://schemas.microsoft.com/office/drawing/2014/main" id="{2AFA189A-C42E-A1FF-2CCE-158ABAEE1466}"/>
+              </a:ext>
+            </a:extLst>
+          </p:cNvPr>
           <p:cNvPicPr>
             <a:picLocks noChangeAspect="1"/>
           </p:cNvPicPr>
@@ -11308,22 +11141,18 @@
         </p:nvPicPr>
         <p:blipFill>
           <a:blip r:embed="rId2"/>
-          <a:srcRect l="33283" r="33283"/>
           <a:stretch>
             <a:fillRect/>
           </a:stretch>
         </p:blipFill>
         <p:spPr>
           <a:xfrm>
-            <a:off x="7677150" y="3429000"/>
-            <a:ext cx="3886200" cy="5600700"/>
-          </a:xfrm>
-          <a:prstGeom prst="roundRect">
-            <a:avLst>
-              <a:gd name="adj" fmla="val 1961"/>
-            </a:avLst>
-          </a:prstGeom>
-          <a:ln/>
+            <a:off x="7581900" y="638175"/>
+            <a:ext cx="4052886" cy="5584825"/>
+          </a:xfrm>
+          <a:prstGeom prst="rect">
+            <a:avLst/>
+          </a:prstGeom>
         </p:spPr>
       </p:pic>
     </p:spTree>
@@ -17198,26 +17027,56 @@
               </a:lnSpc>
             </a:pPr>
             <a:r>
-              <a:rPr lang="en-US" sz="3000" b="1">
+              <a:rPr lang="en-US" sz="3000" b="1" dirty="0" err="1">
                 <a:solidFill>
                   <a:srgbClr val="1F3A8A"/>
                 </a:solidFill>
                 <a:latin typeface="Microsoft YaHei"/>
                 <a:ea typeface="Microsoft YaHei"/>
               </a:rPr>
-              <a:t>llm-proxy-tk </a:t>
-            </a:r>
-            <a:r>
-              <a:rPr lang="zh-CN" sz="3000" b="1">
+              <a:t>llm</a:t>
+            </a:r>
+            <a:r>
+              <a:rPr lang="en-US" sz="3000" b="1" dirty="0">
                 <a:solidFill>
                   <a:srgbClr val="1F3A8A"/>
                 </a:solidFill>
                 <a:latin typeface="Microsoft YaHei"/>
                 <a:ea typeface="Microsoft YaHei"/>
               </a:rPr>
+              <a:t>-</a:t>
+            </a:r>
+            <a:r>
+              <a:rPr lang="en-US" sz="3000" b="1" dirty="0" err="1">
+                <a:solidFill>
+                  <a:srgbClr val="1F3A8A"/>
+                </a:solidFill>
+                <a:latin typeface="Microsoft YaHei"/>
+                <a:ea typeface="Microsoft YaHei"/>
+              </a:rPr>
+              <a:t>api</a:t>
+            </a:r>
+            <a:r>
+              <a:rPr lang="en-US" sz="3000" b="1" dirty="0">
+                <a:solidFill>
+                  <a:srgbClr val="1F3A8A"/>
+                </a:solidFill>
+                <a:latin typeface="Microsoft YaHei"/>
+                <a:ea typeface="Microsoft YaHei"/>
+              </a:rPr>
+              <a:t>-gateway </a:t>
+            </a:r>
+            <a:r>
+              <a:rPr lang="zh-CN" sz="3000" b="1" dirty="0">
+                <a:solidFill>
+                  <a:srgbClr val="1F3A8A"/>
+                </a:solidFill>
+                <a:latin typeface="Microsoft YaHei"/>
+                <a:ea typeface="Microsoft YaHei"/>
+              </a:rPr>
               <a:t>是什么</a:t>
             </a:r>
-            <a:endParaRPr/>
+            <a:endParaRPr dirty="0"/>
           </a:p>
         </p:txBody>
       </p:sp>
@@ -17248,7 +17107,7 @@
               </a:lnSpc>
             </a:pPr>
             <a:r>
-              <a:rPr lang="zh-CN" sz="1500">
+              <a:rPr lang="zh-CN" sz="1500" dirty="0">
                 <a:solidFill>
                   <a:srgbClr val="475569"/>
                 </a:solidFill>
@@ -17258,27 +17117,47 @@
               <a:t>一个内网部署的轻量大模型网关</a:t>
             </a:r>
             <a:r>
-              <a:rPr lang="en-US" sz="1500">
+              <a:rPr lang="en-US" sz="1500" dirty="0">
                 <a:solidFill>
                   <a:srgbClr val="475569"/>
                 </a:solidFill>
                 <a:latin typeface="Microsoft YaHei"/>
                 <a:ea typeface="Microsoft YaHei"/>
               </a:rPr>
-              <a:t> —— FastAPI + SQLite</a:t>
-            </a:r>
-            <a:r>
-              <a:rPr lang="zh-CN" sz="1500">
+              <a:t> —— </a:t>
+            </a:r>
+            <a:r>
+              <a:rPr lang="en-US" sz="1500" dirty="0" err="1">
                 <a:solidFill>
                   <a:srgbClr val="475569"/>
                 </a:solidFill>
                 <a:latin typeface="Microsoft YaHei"/>
                 <a:ea typeface="Microsoft YaHei"/>
               </a:rPr>
+              <a:t>FastAPI</a:t>
+            </a:r>
+            <a:r>
+              <a:rPr lang="en-US" sz="1500" dirty="0">
+                <a:solidFill>
+                  <a:srgbClr val="475569"/>
+                </a:solidFill>
+                <a:latin typeface="Microsoft YaHei"/>
+                <a:ea typeface="Microsoft YaHei"/>
+              </a:rPr>
+              <a:t> + SQLite</a:t>
+            </a:r>
+            <a:r>
+              <a:rPr lang="zh-CN" sz="1500" dirty="0">
+                <a:solidFill>
+                  <a:srgbClr val="475569"/>
+                </a:solidFill>
+                <a:latin typeface="Microsoft YaHei"/>
+                <a:ea typeface="Microsoft YaHei"/>
+              </a:rPr>
               <a:t>，单文件部署，</a:t>
             </a:r>
             <a:r>
-              <a:rPr lang="en-US" sz="1500">
+              <a:rPr lang="en-US" sz="1500" dirty="0">
                 <a:solidFill>
                   <a:srgbClr val="475569"/>
                 </a:solidFill>
@@ -17288,7 +17167,7 @@
               <a:t>5 </a:t>
             </a:r>
             <a:r>
-              <a:rPr lang="zh-CN" sz="1500">
+              <a:rPr lang="zh-CN" sz="1500" dirty="0">
                 <a:solidFill>
                   <a:srgbClr val="475569"/>
                 </a:solidFill>
@@ -17297,7 +17176,7 @@
               </a:rPr>
               <a:t>分钟跑起来。</a:t>
             </a:r>
-            <a:endParaRPr/>
+            <a:endParaRPr dirty="0"/>
           </a:p>
         </p:txBody>
       </p:sp>
@@ -17928,7 +17807,13 @@
       </p:sp>
       <p:pic>
         <p:nvPicPr>
-          <p:cNvPr id="361" name="图片 360"/>
+          <p:cNvPr id="3" name="图片 2">
+            <a:extLst>
+              <a:ext uri="{FF2B5EF4-FFF2-40B4-BE49-F238E27FC236}">
+                <a16:creationId xmlns:a16="http://schemas.microsoft.com/office/drawing/2014/main" id="{2C1A2F9D-9583-96A1-269B-3F5654875BC1}"/>
+              </a:ext>
+            </a:extLst>
+          </p:cNvPr>
           <p:cNvPicPr>
             <a:picLocks noChangeAspect="1"/>
           </p:cNvPicPr>
@@ -17936,22 +17821,18 @@
         </p:nvPicPr>
         <p:blipFill>
           <a:blip r:embed="rId2"/>
-          <a:srcRect l="31355" r="31355"/>
           <a:stretch>
             <a:fillRect/>
           </a:stretch>
         </p:blipFill>
         <p:spPr>
           <a:xfrm>
-            <a:off x="7200900" y="3429000"/>
-            <a:ext cx="4267200" cy="5410200"/>
-          </a:xfrm>
-          <a:prstGeom prst="roundRect">
-            <a:avLst>
-              <a:gd name="adj" fmla="val 1786"/>
-            </a:avLst>
-          </a:prstGeom>
-          <a:ln/>
+            <a:off x="7343774" y="855133"/>
+            <a:ext cx="3984626" cy="5291668"/>
+          </a:xfrm>
+          <a:prstGeom prst="rect">
+            <a:avLst/>
+          </a:prstGeom>
         </p:spPr>
       </p:pic>
     </p:spTree>
@@ -18168,7 +18049,7 @@
         </p:blipFill>
         <p:spPr>
           <a:xfrm>
-            <a:off x="628650" y="3895725"/>
+            <a:off x="533400" y="1440392"/>
             <a:ext cx="6115050" cy="4676775"/>
           </a:xfrm>
           <a:prstGeom prst="roundRect">
@@ -19513,7 +19394,7 @@
         </p:blipFill>
         <p:spPr>
           <a:xfrm>
-            <a:off x="7924800" y="3429000"/>
+            <a:off x="7924800" y="457200"/>
             <a:ext cx="3771900" cy="5867400"/>
           </a:xfrm>
           <a:prstGeom prst="roundRect">

--- a/docs/llm-api-gateway汇报/AI网关如何在企业中实现大模型自动化编程落地.pptx
+++ b/docs/llm-api-gateway汇报/AI网关如何在企业中实现大模型自动化编程落地.pptx
@@ -5,28 +5,32 @@
     <p:sldMasterId id="2147483648" r:id="rId1"/>
   </p:sldMasterIdLst>
   <p:notesMasterIdLst>
-    <p:notesMasterId r:id="rId21"/>
+    <p:notesMasterId r:id="rId25"/>
   </p:notesMasterIdLst>
   <p:sldIdLst>
     <p:sldId id="256" r:id="rId2"/>
     <p:sldId id="257" r:id="rId3"/>
-    <p:sldId id="258" r:id="rId4"/>
-    <p:sldId id="259" r:id="rId5"/>
-    <p:sldId id="260" r:id="rId6"/>
-    <p:sldId id="261" r:id="rId7"/>
-    <p:sldId id="262" r:id="rId8"/>
-    <p:sldId id="263" r:id="rId9"/>
-    <p:sldId id="264" r:id="rId10"/>
-    <p:sldId id="265" r:id="rId11"/>
-    <p:sldId id="266" r:id="rId12"/>
-    <p:sldId id="267" r:id="rId13"/>
-    <p:sldId id="268" r:id="rId14"/>
-    <p:sldId id="269" r:id="rId15"/>
-    <p:sldId id="270" r:id="rId16"/>
-    <p:sldId id="271" r:id="rId17"/>
-    <p:sldId id="272" r:id="rId18"/>
-    <p:sldId id="273" r:id="rId19"/>
-    <p:sldId id="274" r:id="rId20"/>
+    <p:sldId id="275" r:id="rId4"/>
+    <p:sldId id="258" r:id="rId5"/>
+    <p:sldId id="259" r:id="rId6"/>
+    <p:sldId id="276" r:id="rId7"/>
+    <p:sldId id="260" r:id="rId8"/>
+    <p:sldId id="261" r:id="rId9"/>
+    <p:sldId id="262" r:id="rId10"/>
+    <p:sldId id="263" r:id="rId11"/>
+    <p:sldId id="264" r:id="rId12"/>
+    <p:sldId id="265" r:id="rId13"/>
+    <p:sldId id="266" r:id="rId14"/>
+    <p:sldId id="267" r:id="rId15"/>
+    <p:sldId id="268" r:id="rId16"/>
+    <p:sldId id="269" r:id="rId17"/>
+    <p:sldId id="270" r:id="rId18"/>
+    <p:sldId id="271" r:id="rId19"/>
+    <p:sldId id="272" r:id="rId20"/>
+    <p:sldId id="277" r:id="rId21"/>
+    <p:sldId id="273" r:id="rId22"/>
+    <p:sldId id="274" r:id="rId23"/>
+    <p:sldId id="279" r:id="rId24"/>
   </p:sldIdLst>
   <p:sldSz cx="12192000" cy="6858000"/>
   <p:notesSz cx="6858000" cy="12192000"/>
@@ -567,7 +571,7 @@
   <p:cSld>
     <p:spTree>
       <p:nvGrpSpPr>
-        <p:cNvPr id="1" name="" descr="&lt;Slide&gt;&#10;  &lt;Box style={{&#10;    width: '100%',&#10;    height: '100%',&#10;    backgroundColor: '#FFFFFF',&#10;    padding: 80,&#10;    display: 'flex',&#10;    flexDirection: 'column',&#10;    justifyContent: 'space-between',&#10;  }}&gt;&#10;    &lt;Box style={{ display: 'flex', flexDirection: 'column', gap: 24 }}&gt;&#10;      &lt;Text style={{&#10;        fontSize: 16,&#10;        color: '#0EA5E9',&#10;        fontWeight: 'bold',&#10;        letterSpacing: 2,&#10;      }}&gt;&#10;        企业自建 AI · 内部技术方案汇报&#10;      &lt;/Text&gt;&#10;      &lt;Text style={{&#10;        fontSize: 60,&#10;        fontWeight: 'bold',&#10;        color: '#1F3A8A',&#10;        lineHeight: 1.2,&#10;        maxWidth: 1100,&#10;      }}&gt;&#10;        AI 网关如何在企业中实现&lt;br /&gt;大模型自动化编程落地&#10;      &lt;/Text&gt;&#10;      &lt;Text style={{&#10;        fontSize: 24,&#10;        color: '#475569',&#10;        lineHeight: 1.5,&#10;        marginTop: 24,&#10;      }}&gt;&#10;        统一接入 · 按人授权 · 全量审计 —— llm-proxy-tk&#10;      &lt;/Text&gt;&#10;    &lt;/Box&gt;&#10;&#10;    &lt;Box style={{&#10;      display: 'flex',&#10;      flexDirection: 'row',&#10;      justifyContent: 'space-between',&#10;      alignItems: 'center',&#10;      borderTop: '2px solid #E2E8F0',&#10;      paddingTop: 24,&#10;    }}&gt;&#10;      &lt;Box style={{ display: 'flex', flexDirection: 'column', gap: 6 }}&gt;&#10;        &lt;Text style={{ fontSize: 14, color: '#94A3B8' }}&gt;汇报日期：2026-09-04&lt;/Text&gt;&#10;        &lt;Text style={{ fontSize: 14, color: '#94A3B8' }}&gt;汇报对象：管理层 + 技术团队&lt;/Text&gt;&#10;      &lt;/Box&gt;&#10;      &lt;Text style={{ fontSize: 14, color: '#0EA5E9' }}&gt;&#10;        github.com/boonya-hrgk/llm-proxy-tk&#10;      &lt;/Text&gt;&#10;    &lt;/Box&gt;&#10;  &lt;/Box&gt;&#10;&lt;/Slide&gt;"/>
+        <p:cNvPr id="1" name="" descr="&lt;Slide&gt;&#10;  &lt;Box style={{&#10;    width: '100%',&#10;    height: '100%',&#10;    backgroundColor: '#1F3A8A',&#10;    padding: 80,&#10;    display: 'flex',&#10;    flexDirection: 'column',&#10;    justifyContent: 'center',&#10;    alignItems: 'center',&#10;    gap: 0,&#10;  }}&gt;&#10;    &lt;Text style={{&#10;      fontSize: 16,&#10;      color: '#0EA5E9',&#10;      fontWeight: 'bold',&#10;      letterSpacing: 4,&#10;      textAlign: 'center',&#10;    }}&gt;&#10;      企业自建 AI · 内部技术方案汇报&#10;    &lt;/Text&gt;&#10;&#10;    &lt;Box style={{&#10;      width: 80,&#10;      height: 4,&#10;      backgroundColor: 'rgba(14, 165, 233, 0.6)',&#10;      marginTop: 32,&#10;      marginBottom: 32,&#10;    }} /&gt;&#10;&#10;    &lt;Text style={{&#10;      fontSize: 64,&#10;      fontWeight: 'bold',&#10;      color: '#FFFFFF',&#10;      lineHeight: 1.2,&#10;      textAlign: 'center',&#10;      maxWidth: 1150,&#10;    }}&gt;&#10;      AI 网关如何在企业中实现&lt;br /&gt;大模型自动化编程落地&#10;    &lt;/Text&gt;&#10;&#10;    &lt;Box style={{&#10;      display: 'flex',&#10;      flexDirection: 'row',&#10;      gap: 28,&#10;      marginTop: 40,&#10;      marginBottom: 40,&#10;      alignItems: 'center',&#10;    }}&gt;&#10;      {['统一接入', '按人授权', '全量审计', '多上游路由'].map((w, i) =&gt; (&#10;        &lt;Box key={i} style={{&#10;          display: 'flex',&#10;          flexDirection: 'row',&#10;          alignItems: 'center',&#10;          gap: 28,&#10;        }}&gt;&#10;          &lt;Text style={{&#10;            fontSize: 20,&#10;            color: '#CBD5E1',&#10;            fontWeight: 600,&#10;            letterSpacing: 1,&#10;          }}&gt;&#10;            {w}&#10;          &lt;/Text&gt;&#10;          {i &lt; 3 &amp;&amp; &lt;Text style={{&#10;            fontSize: 20,&#10;            color: 'rgba(14, 165, 233, 0.6)',&#10;          }}&gt;·&lt;/Text&gt;}&#10;        &lt;/Box&gt;&#10;      ))}&#10;    &lt;/Box&gt;&#10;&#10;    &lt;Text style={{&#10;      fontSize: 18,&#10;      color: '#CBD5E1',&#10;      textAlign: 'center',&#10;      marginBottom: 8,&#10;    }}&gt;&#10;      LLM API Gateway（llm-api-gateway）&#10;    &lt;/Text&gt;&#10;&#10;    &lt;Text style={{&#10;      fontSize: 16,&#10;      color: '#0EA5E9',&#10;      textAlign: 'center',&#10;      marginBottom: 8,&#10;      fontWeight: 'bold',&#10;      letterSpacing: 1,&#10;    }}&gt;&#10;      讲述人：彭军林&#10;    &lt;/Text&gt;&#10;&#10;    &lt;Box style={{&#10;      width: '100%',&#10;      borderTop: '1px solid rgba(203, 213, 225, 0.2)',&#10;      marginTop: 48,&#10;      paddingTop: 24,&#10;      display: 'flex',&#10;      flexDirection: 'row',&#10;      justifyContent: 'space-between',&#10;      alignItems: 'center',&#10;    }}&gt;&#10;      &lt;Text style={{ fontSize: 13, color: '#94A3B8' }}&gt;汇报日期：2026-09-04 · 汇报对象：管理层 + 技术团队&lt;/Text&gt;&#10;      &lt;Text style={{ fontSize: 13, color: '#0EA5E9', fontWeight: 'bold' }}&gt;&#10;        github.com/boonya-hrgk/llm-api-gateway&#10;      &lt;/Text&gt;&#10;    &lt;/Box&gt;&#10;  &lt;/Box&gt;&#10;&lt;/Slide&gt;&#10;"/>
         <p:cNvGrpSpPr/>
         <p:nvPr/>
       </p:nvGrpSpPr>
@@ -581,7 +585,7 @@
       </p:grpSpPr>
       <p:sp>
         <p:nvSpPr>
-          <p:cNvPr id="2" name="矩形 1"/>
+          <p:cNvPr id="101" name="封面背景"/>
           <p:cNvSpPr/>
           <p:nvPr/>
         </p:nvSpPr>
@@ -594,7 +598,7 @@
             <a:avLst/>
           </a:prstGeom>
           <a:solidFill>
-            <a:srgbClr val="FFFFFF"/>
+            <a:srgbClr val="1F3A8A"/>
           </a:solidFill>
           <a:ln/>
         </p:spPr>
@@ -608,30 +612,30 @@
       </p:sp>
       <p:sp>
         <p:nvSpPr>
-          <p:cNvPr id="3" name="文本框 2" descr="{&quot;isTemplate&quot;:true,&quot;type&quot;:&quot;text&quot;}"/>
-          <p:cNvSpPr txBox="1"/>
-          <p:nvPr/>
-        </p:nvSpPr>
-        <p:spPr>
-          <a:xfrm>
-            <a:off x="762000" y="762000"/>
-            <a:ext cx="10668000" cy="190500"/>
-          </a:xfrm>
-          <a:prstGeom prst="rect">
-            <a:avLst/>
-          </a:prstGeom>
-        </p:spPr>
-        <p:txBody>
-          <a:bodyPr wrap="none" lIns="0" tIns="0" rIns="0" bIns="0"/>
-          <a:lstStyle/>
-          <a:p>
-            <a:pPr>
-              <a:lnSpc>
-                <a:spcPct val="100000"/>
-              </a:lnSpc>
-            </a:pPr>
-            <a:r>
-              <a:rPr lang="zh-CN" sz="1200" b="1" spc="150">
+          <p:cNvPr id="102" name="标签" descr="{&quot;isTemplate&quot;:true,&quot;type&quot;:&quot;text&quot;}"/>
+          <p:cNvSpPr txBox="1"/>
+          <p:nvPr/>
+        </p:nvSpPr>
+        <p:spPr>
+          <a:xfrm>
+            <a:off x="1016000" y="1066800"/>
+            <a:ext cx="10160000" cy="171450"/>
+          </a:xfrm>
+          <a:prstGeom prst="rect">
+            <a:avLst/>
+          </a:prstGeom>
+        </p:spPr>
+        <p:txBody>
+          <a:bodyPr wrap="none" lIns="0" tIns="0" rIns="0" bIns="0"/>
+          <a:lstStyle/>
+          <a:p>
+            <a:pPr algn="ctr">
+              <a:lnSpc>
+                <a:spcPct val="100000"/>
+              </a:lnSpc>
+            </a:pPr>
+            <a:r>
+              <a:rPr lang="zh-CN" sz="1200" b="1" spc="200">
                 <a:solidFill>
                   <a:srgbClr val="0EA5E9"/>
                 </a:solidFill>
@@ -641,7 +645,7 @@
               <a:t>企业自建</a:t>
             </a:r>
             <a:r>
-              <a:rPr lang="en-US" sz="1200" b="1" spc="150">
+              <a:rPr lang="en-US" sz="1200" b="1" spc="200">
                 <a:solidFill>
                   <a:srgbClr val="0EA5E9"/>
                 </a:solidFill>
@@ -651,7 +655,7 @@
               <a:t> AI · </a:t>
             </a:r>
             <a:r>
-              <a:rPr lang="zh-CN" sz="1200" b="1" spc="150">
+              <a:rPr lang="zh-CN" sz="1200" b="1" spc="200">
                 <a:solidFill>
                   <a:srgbClr val="0EA5E9"/>
                 </a:solidFill>
@@ -666,235 +670,22 @@
       </p:sp>
       <p:sp>
         <p:nvSpPr>
-          <p:cNvPr id="4" name="文本框 3" descr="{&quot;isTemplate&quot;:true,&quot;type&quot;:&quot;text&quot;}"/>
-          <p:cNvSpPr txBox="1"/>
-          <p:nvPr/>
-        </p:nvSpPr>
-        <p:spPr>
-          <a:xfrm>
-            <a:off x="762000" y="1181100"/>
-            <a:ext cx="10477500" cy="1647825"/>
-          </a:xfrm>
-          <a:prstGeom prst="rect">
-            <a:avLst/>
-          </a:prstGeom>
-        </p:spPr>
-        <p:txBody>
-          <a:bodyPr wrap="none" lIns="0" tIns="0" rIns="0" bIns="0"/>
-          <a:lstStyle/>
-          <a:p>
-            <a:pPr>
-              <a:lnSpc>
-                <a:spcPct val="120000"/>
-              </a:lnSpc>
-            </a:pPr>
-            <a:r>
-              <a:rPr lang="en-US" sz="4500" b="1" dirty="0">
-                <a:solidFill>
-                  <a:srgbClr val="1F3A8A"/>
-                </a:solidFill>
-                <a:latin typeface="Microsoft YaHei"/>
-                <a:ea typeface="Microsoft YaHei"/>
-              </a:rPr>
-              <a:t>AI </a:t>
-            </a:r>
-            <a:r>
-              <a:rPr lang="zh-CN" sz="4500" b="1" dirty="0">
-                <a:solidFill>
-                  <a:srgbClr val="1F3A8A"/>
-                </a:solidFill>
-                <a:latin typeface="Microsoft YaHei"/>
-                <a:ea typeface="Microsoft YaHei"/>
-              </a:rPr>
-              <a:t>网关如何在企业中实现</a:t>
-            </a:r>
-            <a:endParaRPr dirty="0"/>
-          </a:p>
-          <a:p>
-            <a:pPr>
-              <a:lnSpc>
-                <a:spcPct val="120000"/>
-              </a:lnSpc>
-            </a:pPr>
-            <a:r>
-              <a:rPr lang="zh-CN" sz="4500" b="1">
-                <a:solidFill>
-                  <a:srgbClr val="1F3A8A"/>
-                </a:solidFill>
-                <a:latin typeface="Microsoft YaHei"/>
-                <a:ea typeface="Microsoft YaHei"/>
-              </a:rPr>
-              <a:t>大模型自动化编程落地</a:t>
-            </a:r>
-            <a:endParaRPr/>
-          </a:p>
-        </p:txBody>
-      </p:sp>
-      <p:sp>
-        <p:nvSpPr>
-          <p:cNvPr id="5" name="文本框 4" descr="{&quot;isTemplate&quot;:true,&quot;type&quot;:&quot;text&quot;}"/>
-          <p:cNvSpPr txBox="1"/>
-          <p:nvPr/>
-        </p:nvSpPr>
-        <p:spPr>
-          <a:xfrm>
-            <a:off x="762000" y="3286125"/>
-            <a:ext cx="10668000" cy="419100"/>
-          </a:xfrm>
-          <a:prstGeom prst="rect">
-            <a:avLst/>
-          </a:prstGeom>
-        </p:spPr>
-        <p:txBody>
-          <a:bodyPr wrap="none" lIns="0" tIns="0" rIns="0" bIns="0"/>
-          <a:lstStyle/>
-          <a:p>
-            <a:pPr>
-              <a:lnSpc>
-                <a:spcPct val="150000"/>
-              </a:lnSpc>
-            </a:pPr>
-            <a:r>
-              <a:rPr lang="zh-CN" sz="1800" dirty="0">
-                <a:solidFill>
-                  <a:srgbClr val="475569"/>
-                </a:solidFill>
-                <a:latin typeface="Microsoft YaHei"/>
-                <a:ea typeface="Microsoft YaHei"/>
-              </a:rPr>
-              <a:t>统一接入</a:t>
-            </a:r>
-            <a:r>
-              <a:rPr lang="en-US" sz="1800" dirty="0">
-                <a:solidFill>
-                  <a:srgbClr val="475569"/>
-                </a:solidFill>
-                <a:latin typeface="Microsoft YaHei"/>
-                <a:ea typeface="Microsoft YaHei"/>
-              </a:rPr>
-              <a:t> · </a:t>
-            </a:r>
-            <a:r>
-              <a:rPr lang="zh-CN" sz="1800" dirty="0">
-                <a:solidFill>
-                  <a:srgbClr val="475569"/>
-                </a:solidFill>
-                <a:latin typeface="Microsoft YaHei"/>
-                <a:ea typeface="Microsoft YaHei"/>
-              </a:rPr>
-              <a:t>按人授权</a:t>
-            </a:r>
-            <a:r>
-              <a:rPr lang="en-US" sz="1800" dirty="0">
-                <a:solidFill>
-                  <a:srgbClr val="475569"/>
-                </a:solidFill>
-                <a:latin typeface="Microsoft YaHei"/>
-                <a:ea typeface="Microsoft YaHei"/>
-              </a:rPr>
-              <a:t> · </a:t>
-            </a:r>
-            <a:r>
-              <a:rPr lang="zh-CN" sz="1800" dirty="0">
-                <a:solidFill>
-                  <a:srgbClr val="475569"/>
-                </a:solidFill>
-                <a:latin typeface="Microsoft YaHei"/>
-                <a:ea typeface="Microsoft YaHei"/>
-              </a:rPr>
-              <a:t>全量审计</a:t>
-            </a:r>
-            <a:r>
-              <a:rPr lang="en-US" sz="1800" dirty="0">
-                <a:solidFill>
-                  <a:srgbClr val="475569"/>
-                </a:solidFill>
-                <a:latin typeface="Microsoft YaHei"/>
-                <a:ea typeface="Microsoft YaHei"/>
-              </a:rPr>
-              <a:t> —— </a:t>
-            </a:r>
-            <a:r>
-              <a:rPr lang="en-US" altLang="zh-CN" dirty="0" err="1">
-                <a:solidFill>
-                  <a:srgbClr val="475569"/>
-                </a:solidFill>
-                <a:latin typeface="Microsoft YaHei"/>
-                <a:ea typeface="Microsoft YaHei"/>
-              </a:rPr>
-              <a:t>llm</a:t>
-            </a:r>
-            <a:r>
-              <a:rPr lang="en-US" altLang="zh-CN" dirty="0">
-                <a:solidFill>
-                  <a:srgbClr val="475569"/>
-                </a:solidFill>
-                <a:latin typeface="Microsoft YaHei"/>
-                <a:ea typeface="Microsoft YaHei"/>
-              </a:rPr>
-              <a:t>-</a:t>
-            </a:r>
-            <a:r>
-              <a:rPr lang="en-US" altLang="zh-CN" dirty="0" err="1">
-                <a:solidFill>
-                  <a:srgbClr val="475569"/>
-                </a:solidFill>
-                <a:latin typeface="Microsoft YaHei"/>
-                <a:ea typeface="Microsoft YaHei"/>
-              </a:rPr>
-              <a:t>api</a:t>
-            </a:r>
-            <a:r>
-              <a:rPr lang="en-US" altLang="zh-CN" dirty="0">
-                <a:solidFill>
-                  <a:srgbClr val="475569"/>
-                </a:solidFill>
-                <a:latin typeface="Microsoft YaHei"/>
-                <a:ea typeface="Microsoft YaHei"/>
-              </a:rPr>
-              <a:t>-gateway</a:t>
-            </a:r>
-            <a:endParaRPr dirty="0"/>
-          </a:p>
-        </p:txBody>
-      </p:sp>
-      <p:sp>
-        <p:nvSpPr>
-          <p:cNvPr id="6" name="任意多边形: 形状 5"/>
+          <p:cNvPr id="103" name="装饰线1"/>
           <p:cNvSpPr/>
           <p:nvPr/>
         </p:nvSpPr>
         <p:spPr>
           <a:xfrm>
-            <a:off x="762000" y="5467350"/>
-            <a:ext cx="10668000" cy="647700"/>
-          </a:xfrm>
-          <a:custGeom>
-            <a:avLst/>
-            <a:gdLst/>
-            <a:ahLst/>
-            <a:cxnLst/>
-            <a:rect l="0" t="0" r="0" b="0"/>
-            <a:pathLst>
-              <a:path w="1120" h="68">
-                <a:moveTo>
-                  <a:pt x="0" y="0"/>
-                </a:moveTo>
-                <a:lnTo>
-                  <a:pt x="1120" y="0"/>
-                </a:lnTo>
-                <a:lnTo>
-                  <a:pt x="1120" y="2"/>
-                </a:lnTo>
-                <a:lnTo>
-                  <a:pt x="0" y="2"/>
-                </a:lnTo>
-                <a:close/>
-              </a:path>
-            </a:pathLst>
-          </a:custGeom>
+            <a:off x="5715000" y="1400175"/>
+            <a:ext cx="762000" cy="38100"/>
+          </a:xfrm>
+          <a:prstGeom prst="rect">
+            <a:avLst/>
+          </a:prstGeom>
           <a:solidFill>
-            <a:srgbClr val="E2E8F0"/>
+            <a:srgbClr val="0EA5E9">
+              <a:alpha val="60000"/>
+            </a:srgbClr>
           </a:solidFill>
           <a:ln/>
         </p:spPr>
@@ -908,30 +699,345 @@
       </p:sp>
       <p:sp>
         <p:nvSpPr>
-          <p:cNvPr id="7" name="文本框 6" descr="{&quot;isTemplate&quot;:true,&quot;type&quot;:&quot;text&quot;}"/>
-          <p:cNvSpPr txBox="1"/>
-          <p:nvPr/>
-        </p:nvSpPr>
-        <p:spPr>
-          <a:xfrm>
-            <a:off x="762000" y="5715000"/>
-            <a:ext cx="1781175" cy="161925"/>
-          </a:xfrm>
-          <a:prstGeom prst="rect">
-            <a:avLst/>
-          </a:prstGeom>
-        </p:spPr>
-        <p:txBody>
-          <a:bodyPr wrap="none" lIns="0" tIns="0" rIns="0" bIns="0"/>
-          <a:lstStyle/>
-          <a:p>
-            <a:pPr>
-              <a:lnSpc>
-                <a:spcPct val="100000"/>
-              </a:lnSpc>
-            </a:pPr>
-            <a:r>
-              <a:rPr lang="zh-CN" sz="1050">
+          <p:cNvPr id="104" name="主标题" descr="{&quot;isTemplate&quot;:true,&quot;type&quot;:&quot;text&quot;}"/>
+          <p:cNvSpPr txBox="1"/>
+          <p:nvPr/>
+        </p:nvSpPr>
+        <p:spPr>
+          <a:xfrm>
+            <a:off x="571500" y="1600200"/>
+            <a:ext cx="11049000" cy="1714500"/>
+          </a:xfrm>
+          <a:prstGeom prst="rect">
+            <a:avLst/>
+          </a:prstGeom>
+        </p:spPr>
+        <p:txBody>
+          <a:bodyPr wrap="none" lIns="0" tIns="0" rIns="0" bIns="0"/>
+          <a:lstStyle/>
+          <a:p>
+            <a:pPr algn="ctr">
+              <a:lnSpc>
+                <a:spcPct val="120000"/>
+              </a:lnSpc>
+            </a:pPr>
+            <a:r>
+              <a:rPr lang="en-US" sz="4800" b="1">
+                <a:solidFill>
+                  <a:srgbClr val="FFFFFF"/>
+                </a:solidFill>
+                <a:latin typeface="Microsoft YaHei"/>
+                <a:ea typeface="Microsoft YaHei"/>
+              </a:rPr>
+              <a:t>AI </a:t>
+            </a:r>
+            <a:r>
+              <a:rPr lang="zh-CN" sz="4800" b="1">
+                <a:solidFill>
+                  <a:srgbClr val="FFFFFF"/>
+                </a:solidFill>
+                <a:latin typeface="Microsoft YaHei"/>
+                <a:ea typeface="Microsoft YaHei"/>
+              </a:rPr>
+              <a:t>网关如何在企业中实现</a:t>
+            </a:r>
+            <a:endParaRPr/>
+          </a:p>
+          <a:p>
+            <a:pPr algn="ctr">
+              <a:lnSpc>
+                <a:spcPct val="120000"/>
+              </a:lnSpc>
+            </a:pPr>
+            <a:r>
+              <a:rPr lang="zh-CN" sz="4800" b="1">
+                <a:solidFill>
+                  <a:srgbClr val="FFFFFF"/>
+                </a:solidFill>
+                <a:latin typeface="Microsoft YaHei"/>
+                <a:ea typeface="Microsoft YaHei"/>
+              </a:rPr>
+              <a:t>大模型自动化编程落地</a:t>
+            </a:r>
+            <a:endParaRPr/>
+          </a:p>
+        </p:txBody>
+      </p:sp>
+      <p:sp>
+        <p:nvSpPr>
+          <p:cNvPr id="105" name="关键词" descr="{&quot;isTemplate&quot;:true,&quot;type&quot;:&quot;text&quot;}"/>
+          <p:cNvSpPr txBox="1"/>
+          <p:nvPr/>
+        </p:nvSpPr>
+        <p:spPr>
+          <a:xfrm>
+            <a:off x="1016000" y="3466875"/>
+            <a:ext cx="10160000" cy="209550"/>
+          </a:xfrm>
+          <a:prstGeom prst="rect">
+            <a:avLst/>
+          </a:prstGeom>
+        </p:spPr>
+        <p:txBody>
+          <a:bodyPr wrap="none" lIns="0" tIns="0" rIns="0" bIns="0"/>
+          <a:lstStyle/>
+          <a:p>
+            <a:pPr algn="ctr">
+              <a:lnSpc>
+                <a:spcPct val="100000"/>
+              </a:lnSpc>
+            </a:pPr>
+            <a:r>
+              <a:rPr lang="zh-CN" sz="1500" spc="50" dirty="0">
+                <a:solidFill>
+                  <a:srgbClr val="CBD5E1"/>
+                </a:solidFill>
+                <a:latin typeface="Microsoft YaHei"/>
+                <a:ea typeface="Microsoft YaHei"/>
+              </a:rPr>
+              <a:t>统一接入</a:t>
+            </a:r>
+            <a:r>
+              <a:rPr lang="zh-CN" sz="1500" spc="50" dirty="0">
+                <a:solidFill>
+                  <a:srgbClr val="0EA5E9">
+                    <a:alpha val="60000"/>
+                  </a:srgbClr>
+                </a:solidFill>
+                <a:latin typeface="Microsoft YaHei"/>
+                <a:ea typeface="Microsoft YaHei"/>
+              </a:rPr>
+              <a:t>   ·   </a:t>
+            </a:r>
+            <a:r>
+              <a:rPr lang="zh-CN" sz="1500" spc="50" dirty="0">
+                <a:solidFill>
+                  <a:srgbClr val="CBD5E1"/>
+                </a:solidFill>
+                <a:latin typeface="Microsoft YaHei"/>
+                <a:ea typeface="Microsoft YaHei"/>
+              </a:rPr>
+              <a:t>按人授权</a:t>
+            </a:r>
+            <a:r>
+              <a:rPr lang="zh-CN" sz="1500" spc="50" dirty="0">
+                <a:solidFill>
+                  <a:srgbClr val="0EA5E9">
+                    <a:alpha val="60000"/>
+                  </a:srgbClr>
+                </a:solidFill>
+                <a:latin typeface="Microsoft YaHei"/>
+                <a:ea typeface="Microsoft YaHei"/>
+              </a:rPr>
+              <a:t>   ·   </a:t>
+            </a:r>
+            <a:r>
+              <a:rPr lang="zh-CN" sz="1500" spc="50" dirty="0">
+                <a:solidFill>
+                  <a:srgbClr val="CBD5E1"/>
+                </a:solidFill>
+                <a:latin typeface="Microsoft YaHei"/>
+                <a:ea typeface="Microsoft YaHei"/>
+              </a:rPr>
+              <a:t>全量审计</a:t>
+            </a:r>
+            <a:r>
+              <a:rPr lang="zh-CN" sz="1500" spc="50" dirty="0">
+                <a:solidFill>
+                  <a:srgbClr val="0EA5E9">
+                    <a:alpha val="60000"/>
+                  </a:srgbClr>
+                </a:solidFill>
+                <a:latin typeface="Microsoft YaHei"/>
+                <a:ea typeface="Microsoft YaHei"/>
+              </a:rPr>
+              <a:t>   ·   </a:t>
+            </a:r>
+            <a:r>
+              <a:rPr lang="zh-CN" sz="1500" spc="50" dirty="0">
+                <a:solidFill>
+                  <a:srgbClr val="CBD5E1"/>
+                </a:solidFill>
+                <a:latin typeface="Microsoft YaHei"/>
+                <a:ea typeface="Microsoft YaHei"/>
+              </a:rPr>
+              <a:t>多上游路由</a:t>
+            </a:r>
+            <a:endParaRPr dirty="0"/>
+          </a:p>
+        </p:txBody>
+      </p:sp>
+      <p:sp>
+        <p:nvSpPr>
+          <p:cNvPr id="106" name="项目名" descr="{&quot;isTemplate&quot;:true,&quot;type&quot;:&quot;text&quot;}"/>
+          <p:cNvSpPr txBox="1"/>
+          <p:nvPr/>
+        </p:nvSpPr>
+        <p:spPr>
+          <a:xfrm>
+            <a:off x="1524000" y="3790950"/>
+            <a:ext cx="9144000" cy="209550"/>
+          </a:xfrm>
+          <a:prstGeom prst="rect">
+            <a:avLst/>
+          </a:prstGeom>
+        </p:spPr>
+        <p:txBody>
+          <a:bodyPr wrap="none" lIns="0" tIns="0" rIns="0" bIns="0"/>
+          <a:lstStyle/>
+          <a:p>
+            <a:pPr algn="ctr">
+              <a:lnSpc>
+                <a:spcPct val="100000"/>
+              </a:lnSpc>
+            </a:pPr>
+            <a:r>
+              <a:rPr lang="en-US" sz="1350">
+                <a:solidFill>
+                  <a:srgbClr val="CBD5E1"/>
+                </a:solidFill>
+                <a:latin typeface="Microsoft YaHei"/>
+                <a:ea typeface="Microsoft YaHei"/>
+              </a:rPr>
+              <a:t>LLM API Gateway</a:t>
+            </a:r>
+            <a:r>
+              <a:rPr lang="zh-CN" sz="1350">
+                <a:solidFill>
+                  <a:srgbClr val="CBD5E1"/>
+                </a:solidFill>
+                <a:latin typeface="Microsoft YaHei"/>
+                <a:ea typeface="Microsoft YaHei"/>
+              </a:rPr>
+              <a:t>（</a:t>
+            </a:r>
+            <a:r>
+              <a:rPr lang="en-US" sz="1350">
+                <a:solidFill>
+                  <a:srgbClr val="CBD5E1"/>
+                </a:solidFill>
+                <a:latin typeface="Microsoft YaHei"/>
+                <a:ea typeface="Microsoft YaHei"/>
+              </a:rPr>
+              <a:t>llm-api-gateway</a:t>
+            </a:r>
+            <a:r>
+              <a:rPr lang="zh-CN" sz="1350">
+                <a:solidFill>
+                  <a:srgbClr val="CBD5E1"/>
+                </a:solidFill>
+                <a:latin typeface="Microsoft YaHei"/>
+                <a:ea typeface="Microsoft YaHei"/>
+              </a:rPr>
+              <a:t>）</a:t>
+            </a:r>
+            <a:endParaRPr/>
+          </a:p>
+        </p:txBody>
+      </p:sp>
+      <p:sp>
+        <p:nvSpPr>
+          <p:cNvPr id="107" name="讲述人" descr="{&quot;isTemplate&quot;:true,&quot;type&quot;:&quot;text&quot;}"/>
+          <p:cNvSpPr txBox="1"/>
+          <p:nvPr/>
+        </p:nvSpPr>
+        <p:spPr>
+          <a:xfrm>
+            <a:off x="2032000" y="4057650"/>
+            <a:ext cx="8128000" cy="209550"/>
+          </a:xfrm>
+          <a:prstGeom prst="rect">
+            <a:avLst/>
+          </a:prstGeom>
+        </p:spPr>
+        <p:txBody>
+          <a:bodyPr wrap="none" lIns="0" tIns="0" rIns="0" bIns="0"/>
+          <a:lstStyle/>
+          <a:p>
+            <a:pPr algn="ctr">
+              <a:lnSpc>
+                <a:spcPct val="100000"/>
+              </a:lnSpc>
+            </a:pPr>
+            <a:r>
+              <a:rPr lang="zh-CN" sz="1200" b="1" spc="50" dirty="0">
+                <a:solidFill>
+                  <a:srgbClr val="0EA5E9"/>
+                </a:solidFill>
+                <a:latin typeface="Microsoft YaHei"/>
+                <a:ea typeface="Microsoft YaHei"/>
+              </a:rPr>
+              <a:t>讲述人：</a:t>
+            </a:r>
+            <a:r>
+              <a:rPr lang="zh-CN" altLang="en-US" sz="1200" b="1" spc="50" dirty="0">
+                <a:solidFill>
+                  <a:srgbClr val="0EA5E9"/>
+                </a:solidFill>
+                <a:latin typeface="Microsoft YaHei"/>
+                <a:ea typeface="Microsoft YaHei"/>
+              </a:rPr>
+              <a:t>架构彭鱼宴</a:t>
+            </a:r>
+            <a:endParaRPr dirty="0"/>
+          </a:p>
+        </p:txBody>
+      </p:sp>
+      <p:sp>
+        <p:nvSpPr>
+          <p:cNvPr id="108" name="分割线"/>
+          <p:cNvSpPr/>
+          <p:nvPr/>
+        </p:nvSpPr>
+        <p:spPr>
+          <a:xfrm>
+            <a:off x="762000" y="4876800"/>
+            <a:ext cx="10668000" cy="12700"/>
+          </a:xfrm>
+          <a:prstGeom prst="rect">
+            <a:avLst/>
+          </a:prstGeom>
+          <a:solidFill>
+            <a:srgbClr val="CBD5E1">
+              <a:alpha val="20000"/>
+            </a:srgbClr>
+          </a:solidFill>
+          <a:ln/>
+        </p:spPr>
+        <p:txBody>
+          <a:bodyPr/>
+          <a:lstStyle/>
+          <a:p>
+            <a:endParaRPr/>
+          </a:p>
+        </p:txBody>
+      </p:sp>
+      <p:sp>
+        <p:nvSpPr>
+          <p:cNvPr id="109" name="脚左" descr="{&quot;isTemplate&quot;:true,&quot;type&quot;:&quot;text&quot;}"/>
+          <p:cNvSpPr txBox="1"/>
+          <p:nvPr/>
+        </p:nvSpPr>
+        <p:spPr>
+          <a:xfrm>
+            <a:off x="762000" y="5143500"/>
+            <a:ext cx="5334000" cy="152400"/>
+          </a:xfrm>
+          <a:prstGeom prst="rect">
+            <a:avLst/>
+          </a:prstGeom>
+        </p:spPr>
+        <p:txBody>
+          <a:bodyPr wrap="none" lIns="0" tIns="0" rIns="0" bIns="0"/>
+          <a:lstStyle/>
+          <a:p>
+            <a:pPr>
+              <a:lnSpc>
+                <a:spcPct val="100000"/>
+              </a:lnSpc>
+            </a:pPr>
+            <a:r>
+              <a:rPr lang="zh-CN" sz="975">
                 <a:solidFill>
                   <a:srgbClr val="94A3B8"/>
                 </a:solidFill>
@@ -941,172 +1047,64 @@
               <a:t>汇报日期：</a:t>
             </a:r>
             <a:r>
-              <a:rPr lang="en-US" sz="1050">
+              <a:rPr lang="en-US" sz="975">
                 <a:solidFill>
                   <a:srgbClr val="94A3B8"/>
                 </a:solidFill>
                 <a:latin typeface="Microsoft YaHei"/>
                 <a:ea typeface="Microsoft YaHei"/>
               </a:rPr>
-              <a:t>2026-09-04</a:t>
-            </a:r>
-            <a:endParaRPr/>
-          </a:p>
-        </p:txBody>
-      </p:sp>
-      <p:sp>
-        <p:nvSpPr>
-          <p:cNvPr id="8" name="文本框 7" descr="{&quot;isTemplate&quot;:true,&quot;type&quot;:&quot;text&quot;}"/>
-          <p:cNvSpPr txBox="1"/>
-          <p:nvPr/>
-        </p:nvSpPr>
-        <p:spPr>
-          <a:xfrm>
-            <a:off x="762000" y="5934075"/>
-            <a:ext cx="1781175" cy="161925"/>
-          </a:xfrm>
-          <a:prstGeom prst="rect">
-            <a:avLst/>
-          </a:prstGeom>
-        </p:spPr>
-        <p:txBody>
-          <a:bodyPr wrap="none" lIns="0" tIns="0" rIns="0" bIns="0"/>
-          <a:lstStyle/>
-          <a:p>
-            <a:pPr>
-              <a:lnSpc>
-                <a:spcPct val="100000"/>
-              </a:lnSpc>
-            </a:pPr>
-            <a:r>
-              <a:rPr lang="zh-CN" sz="1050">
+              <a:t>2026-09-04 · </a:t>
+            </a:r>
+            <a:r>
+              <a:rPr lang="zh-CN" sz="975">
                 <a:solidFill>
                   <a:srgbClr val="94A3B8"/>
                 </a:solidFill>
                 <a:latin typeface="Microsoft YaHei"/>
                 <a:ea typeface="Microsoft YaHei"/>
               </a:rPr>
-              <a:t>汇报对象：管理层</a:t>
-            </a:r>
-            <a:r>
-              <a:rPr lang="en-US" sz="1050">
-                <a:solidFill>
-                  <a:srgbClr val="94A3B8"/>
-                </a:solidFill>
-                <a:latin typeface="Microsoft YaHei"/>
-                <a:ea typeface="Microsoft YaHei"/>
-              </a:rPr>
-              <a:t> + </a:t>
-            </a:r>
-            <a:r>
-              <a:rPr lang="zh-CN" sz="1050">
-                <a:solidFill>
-                  <a:srgbClr val="94A3B8"/>
-                </a:solidFill>
-                <a:latin typeface="Microsoft YaHei"/>
-                <a:ea typeface="Microsoft YaHei"/>
-              </a:rPr>
-              <a:t>技术团队</a:t>
-            </a:r>
-            <a:endParaRPr/>
-          </a:p>
-        </p:txBody>
-      </p:sp>
-      <p:sp>
-        <p:nvSpPr>
-          <p:cNvPr id="9" name="文本框 8" descr="{&quot;isTemplate&quot;:true,&quot;type&quot;:&quot;text&quot;}"/>
-          <p:cNvSpPr txBox="1"/>
-          <p:nvPr/>
-        </p:nvSpPr>
-        <p:spPr>
-          <a:xfrm>
-            <a:off x="8963025" y="5829300"/>
-            <a:ext cx="2466975" cy="161925"/>
-          </a:xfrm>
-          <a:prstGeom prst="rect">
-            <a:avLst/>
-          </a:prstGeom>
-        </p:spPr>
-        <p:txBody>
-          <a:bodyPr wrap="none" lIns="0" tIns="0" rIns="0" bIns="0"/>
-          <a:lstStyle/>
-          <a:p>
-            <a:pPr>
-              <a:lnSpc>
-                <a:spcPct val="100000"/>
-              </a:lnSpc>
-            </a:pPr>
-            <a:r>
-              <a:rPr lang="en-US" sz="1050" dirty="0">
+              <a:t>汇报对象：管理层 + 技术团队</a:t>
+            </a:r>
+            <a:endParaRPr/>
+          </a:p>
+        </p:txBody>
+      </p:sp>
+      <p:sp>
+        <p:nvSpPr>
+          <p:cNvPr id="110" name="脚右" descr="{&quot;isTemplate&quot;:true,&quot;type&quot;:&quot;text&quot;}"/>
+          <p:cNvSpPr txBox="1"/>
+          <p:nvPr/>
+        </p:nvSpPr>
+        <p:spPr>
+          <a:xfrm>
+            <a:off x="6096000" y="5143500"/>
+            <a:ext cx="5334000" cy="152400"/>
+          </a:xfrm>
+          <a:prstGeom prst="rect">
+            <a:avLst/>
+          </a:prstGeom>
+        </p:spPr>
+        <p:txBody>
+          <a:bodyPr wrap="none" lIns="0" tIns="0" rIns="0" bIns="0"/>
+          <a:lstStyle/>
+          <a:p>
+            <a:pPr algn="r">
+              <a:lnSpc>
+                <a:spcPct val="100000"/>
+              </a:lnSpc>
+            </a:pPr>
+            <a:r>
+              <a:rPr lang="en-US" sz="975" b="1">
                 <a:solidFill>
                   <a:srgbClr val="0EA5E9"/>
                 </a:solidFill>
                 <a:latin typeface="Microsoft YaHei"/>
                 <a:ea typeface="Microsoft YaHei"/>
               </a:rPr>
-              <a:t>github.com/boonya-</a:t>
-            </a:r>
-            <a:r>
-              <a:rPr lang="en-US" sz="1050" dirty="0" err="1">
-                <a:solidFill>
-                  <a:srgbClr val="0EA5E9"/>
-                </a:solidFill>
-                <a:latin typeface="Microsoft YaHei"/>
-                <a:ea typeface="Microsoft YaHei"/>
-              </a:rPr>
-              <a:t>hrgk</a:t>
-            </a:r>
-            <a:r>
-              <a:rPr lang="en-US" sz="1050" dirty="0">
-                <a:solidFill>
-                  <a:srgbClr val="0EA5E9"/>
-                </a:solidFill>
-                <a:latin typeface="Microsoft YaHei"/>
-                <a:ea typeface="Microsoft YaHei"/>
-              </a:rPr>
-              <a:t>/</a:t>
-            </a:r>
-            <a:r>
-              <a:rPr lang="en-US" sz="1050" dirty="0" err="1">
-                <a:solidFill>
-                  <a:srgbClr val="0EA5E9"/>
-                </a:solidFill>
-                <a:latin typeface="Microsoft YaHei"/>
-                <a:ea typeface="Microsoft YaHei"/>
-              </a:rPr>
-              <a:t>llm</a:t>
-            </a:r>
-            <a:r>
-              <a:rPr lang="en-US" sz="1050" dirty="0">
-                <a:solidFill>
-                  <a:srgbClr val="0EA5E9"/>
-                </a:solidFill>
-                <a:latin typeface="Microsoft YaHei"/>
-                <a:ea typeface="Microsoft YaHei"/>
-              </a:rPr>
-              <a:t>-</a:t>
-            </a:r>
-            <a:r>
-              <a:rPr lang="en-US" altLang="zh-CN" sz="1050" dirty="0" err="1">
-                <a:solidFill>
-                  <a:srgbClr val="0EA5E9"/>
-                </a:solidFill>
-                <a:latin typeface="Microsoft YaHei"/>
-                <a:ea typeface="Microsoft YaHei"/>
-              </a:rPr>
-              <a:t>api</a:t>
-            </a:r>
-            <a:r>
-              <a:rPr lang="en-US" altLang="zh-CN" sz="1050" dirty="0">
-                <a:solidFill>
-                  <a:srgbClr val="0EA5E9"/>
-                </a:solidFill>
-                <a:latin typeface="Microsoft YaHei"/>
-                <a:ea typeface="Microsoft YaHei"/>
-              </a:rPr>
-              <a:t>-gateway</a:t>
-            </a:r>
-            <a:endParaRPr dirty="0"/>
+              <a:t>github.com/boonya-hrgk/llm-api-gateway</a:t>
+            </a:r>
+            <a:endParaRPr/>
           </a:p>
         </p:txBody>
       </p:sp>
@@ -1119,6 +1117,1819 @@
 </file>
 
 <file path=ppt/slides/slide10.xml><?xml version="1.0" encoding="utf-8"?>
+<p:sld xmlns:a="http://schemas.openxmlformats.org/drawingml/2006/main" xmlns:r="http://schemas.openxmlformats.org/officeDocument/2006/relationships" xmlns:p="http://schemas.openxmlformats.org/presentationml/2006/main">
+  <p:cSld>
+    <p:spTree>
+      <p:nvGrpSpPr>
+        <p:cNvPr id="1" name="" descr="&lt;Slide&gt;&#10;  &lt;Box style={{&#10;    width: '100%',&#10;    height: '100%',&#10;    backgroundColor: '#1F3A8A',&#10;    padding: 80,&#10;    display: 'flex',&#10;    flexDirection: 'column',&#10;    justifyContent: 'center',&#10;    alignItems: 'center',&#10;  }}&gt;&#10;    &lt;Text style={{&#10;      fontSize: 14,&#10;      color: '#0EA5E9',&#10;      letterSpacing: 4,&#10;      marginBottom: 24,&#10;    }}&gt;&#10;      PART 03&#10;    &lt;/Text&gt;&#10;    &lt;Text style={{&#10;      fontSize: 72,&#10;      fontWeight: 'bold',&#10;      color: '#FFFFFF',&#10;      textAlign: 'center',&#10;      marginBottom: 24,&#10;    }}&gt;&#10;      企业 AI 应用场景&#10;    &lt;/Text&gt;&#10;    &lt;Box style={{&#10;      width: 80,&#10;      height: 4,&#10;      backgroundColor: '#0EA5E9',&#10;      marginBottom: 24,&#10;    }} /&gt;&#10;    &lt;Text style={{&#10;      fontSize: 22,&#10;      color: '#CBD5E1',&#10;      textAlign: 'center',&#10;    }}&gt;&#10;      内网-自有大模型 vs 外网-云端大模型&#10;    &lt;/Text&gt;&#10;  &lt;/Box&gt;&#10;&lt;/Slide&gt;"/>
+        <p:cNvGrpSpPr/>
+        <p:nvPr/>
+      </p:nvGrpSpPr>
+      <p:grpSpPr>
+        <a:xfrm>
+          <a:off x="0" y="0"/>
+          <a:ext cx="0" cy="0"/>
+          <a:chOff x="0" y="0"/>
+          <a:chExt cx="0" cy="0"/>
+        </a:xfrm>
+      </p:grpSpPr>
+      <p:sp>
+        <p:nvSpPr>
+          <p:cNvPr id="396" name="矩形 395"/>
+          <p:cNvSpPr/>
+          <p:nvPr/>
+        </p:nvSpPr>
+        <p:spPr>
+          <a:xfrm>
+            <a:off x="0" y="0"/>
+            <a:ext cx="12192000" cy="6858000"/>
+          </a:xfrm>
+          <a:prstGeom prst="rect">
+            <a:avLst/>
+          </a:prstGeom>
+          <a:solidFill>
+            <a:srgbClr val="1F3A8A"/>
+          </a:solidFill>
+          <a:ln/>
+        </p:spPr>
+        <p:txBody>
+          <a:bodyPr/>
+          <a:lstStyle/>
+          <a:p>
+            <a:endParaRPr/>
+          </a:p>
+        </p:txBody>
+      </p:sp>
+      <p:sp>
+        <p:nvSpPr>
+          <p:cNvPr id="397" name="文本框 396" descr="{&quot;isTemplate&quot;:true,&quot;type&quot;:&quot;text&quot;}"/>
+          <p:cNvSpPr txBox="1"/>
+          <p:nvPr/>
+        </p:nvSpPr>
+        <p:spPr>
+          <a:xfrm>
+            <a:off x="5695950" y="2447925"/>
+            <a:ext cx="809625" cy="161925"/>
+          </a:xfrm>
+          <a:prstGeom prst="rect">
+            <a:avLst/>
+          </a:prstGeom>
+        </p:spPr>
+        <p:txBody>
+          <a:bodyPr wrap="none" lIns="0" tIns="0" rIns="0" bIns="0"/>
+          <a:lstStyle/>
+          <a:p>
+            <a:pPr>
+              <a:lnSpc>
+                <a:spcPct val="100000"/>
+              </a:lnSpc>
+            </a:pPr>
+            <a:r>
+              <a:rPr lang="en-US" sz="1050" spc="300">
+                <a:solidFill>
+                  <a:srgbClr val="0EA5E9"/>
+                </a:solidFill>
+                <a:latin typeface="Microsoft YaHei"/>
+                <a:ea typeface="Microsoft YaHei"/>
+              </a:rPr>
+              <a:t>PART 03</a:t>
+            </a:r>
+            <a:endParaRPr/>
+          </a:p>
+        </p:txBody>
+      </p:sp>
+      <p:sp>
+        <p:nvSpPr>
+          <p:cNvPr id="398" name="文本框 397" descr="{&quot;isTemplate&quot;:true,&quot;type&quot;:&quot;text&quot;}"/>
+          <p:cNvSpPr txBox="1"/>
+          <p:nvPr/>
+        </p:nvSpPr>
+        <p:spPr>
+          <a:xfrm>
+            <a:off x="3457575" y="2838450"/>
+            <a:ext cx="5276850" cy="828675"/>
+          </a:xfrm>
+          <a:prstGeom prst="rect">
+            <a:avLst/>
+          </a:prstGeom>
+        </p:spPr>
+        <p:txBody>
+          <a:bodyPr wrap="none" lIns="0" tIns="0" rIns="0" bIns="0"/>
+          <a:lstStyle/>
+          <a:p>
+            <a:pPr algn="ctr">
+              <a:lnSpc>
+                <a:spcPct val="100000"/>
+              </a:lnSpc>
+            </a:pPr>
+            <a:r>
+              <a:rPr lang="zh-CN" sz="5400" b="1">
+                <a:solidFill>
+                  <a:srgbClr val="FFFFFF"/>
+                </a:solidFill>
+                <a:latin typeface="Microsoft YaHei"/>
+                <a:ea typeface="Microsoft YaHei"/>
+              </a:rPr>
+              <a:t>企业</a:t>
+            </a:r>
+            <a:r>
+              <a:rPr lang="en-US" sz="5400" b="1">
+                <a:solidFill>
+                  <a:srgbClr val="FFFFFF"/>
+                </a:solidFill>
+                <a:latin typeface="Microsoft YaHei"/>
+                <a:ea typeface="Microsoft YaHei"/>
+              </a:rPr>
+              <a:t> AI </a:t>
+            </a:r>
+            <a:r>
+              <a:rPr lang="zh-CN" sz="5400" b="1">
+                <a:solidFill>
+                  <a:srgbClr val="FFFFFF"/>
+                </a:solidFill>
+                <a:latin typeface="Microsoft YaHei"/>
+                <a:ea typeface="Microsoft YaHei"/>
+              </a:rPr>
+              <a:t>应用场景</a:t>
+            </a:r>
+            <a:endParaRPr/>
+          </a:p>
+        </p:txBody>
+      </p:sp>
+      <p:sp>
+        <p:nvSpPr>
+          <p:cNvPr id="399" name="矩形 398"/>
+          <p:cNvSpPr/>
+          <p:nvPr/>
+        </p:nvSpPr>
+        <p:spPr>
+          <a:xfrm>
+            <a:off x="5715000" y="3895725"/>
+            <a:ext cx="762000" cy="38100"/>
+          </a:xfrm>
+          <a:prstGeom prst="rect">
+            <a:avLst/>
+          </a:prstGeom>
+          <a:solidFill>
+            <a:srgbClr val="0EA5E9"/>
+          </a:solidFill>
+          <a:ln/>
+        </p:spPr>
+        <p:txBody>
+          <a:bodyPr/>
+          <a:lstStyle/>
+          <a:p>
+            <a:endParaRPr/>
+          </a:p>
+        </p:txBody>
+      </p:sp>
+      <p:sp>
+        <p:nvSpPr>
+          <p:cNvPr id="400" name="文本框 399" descr="{&quot;isTemplate&quot;:true,&quot;type&quot;:&quot;text&quot;}"/>
+          <p:cNvSpPr txBox="1"/>
+          <p:nvPr/>
+        </p:nvSpPr>
+        <p:spPr>
+          <a:xfrm>
+            <a:off x="4371975" y="4162425"/>
+            <a:ext cx="3448050" cy="257175"/>
+          </a:xfrm>
+          <a:prstGeom prst="rect">
+            <a:avLst/>
+          </a:prstGeom>
+        </p:spPr>
+        <p:txBody>
+          <a:bodyPr wrap="none" lIns="0" tIns="0" rIns="0" bIns="0"/>
+          <a:lstStyle/>
+          <a:p>
+            <a:pPr algn="ctr">
+              <a:lnSpc>
+                <a:spcPct val="100000"/>
+              </a:lnSpc>
+            </a:pPr>
+            <a:r>
+              <a:rPr lang="zh-CN" sz="1650">
+                <a:solidFill>
+                  <a:srgbClr val="CBD5E1"/>
+                </a:solidFill>
+                <a:latin typeface="Microsoft YaHei"/>
+                <a:ea typeface="Microsoft YaHei"/>
+              </a:rPr>
+              <a:t>内网</a:t>
+            </a:r>
+            <a:r>
+              <a:rPr lang="en-US" sz="1650">
+                <a:solidFill>
+                  <a:srgbClr val="CBD5E1"/>
+                </a:solidFill>
+                <a:latin typeface="Microsoft YaHei"/>
+                <a:ea typeface="Microsoft YaHei"/>
+              </a:rPr>
+              <a:t>-</a:t>
+            </a:r>
+            <a:r>
+              <a:rPr lang="zh-CN" sz="1650">
+                <a:solidFill>
+                  <a:srgbClr val="CBD5E1"/>
+                </a:solidFill>
+                <a:latin typeface="Microsoft YaHei"/>
+                <a:ea typeface="Microsoft YaHei"/>
+              </a:rPr>
+              <a:t>自有大模型</a:t>
+            </a:r>
+            <a:r>
+              <a:rPr lang="en-US" sz="1650">
+                <a:solidFill>
+                  <a:srgbClr val="CBD5E1"/>
+                </a:solidFill>
+                <a:latin typeface="Microsoft YaHei"/>
+                <a:ea typeface="Microsoft YaHei"/>
+              </a:rPr>
+              <a:t> vs </a:t>
+            </a:r>
+            <a:r>
+              <a:rPr lang="zh-CN" sz="1650">
+                <a:solidFill>
+                  <a:srgbClr val="CBD5E1"/>
+                </a:solidFill>
+                <a:latin typeface="Microsoft YaHei"/>
+                <a:ea typeface="Microsoft YaHei"/>
+              </a:rPr>
+              <a:t>外网</a:t>
+            </a:r>
+            <a:r>
+              <a:rPr lang="en-US" sz="1650">
+                <a:solidFill>
+                  <a:srgbClr val="CBD5E1"/>
+                </a:solidFill>
+                <a:latin typeface="Microsoft YaHei"/>
+                <a:ea typeface="Microsoft YaHei"/>
+              </a:rPr>
+              <a:t>-</a:t>
+            </a:r>
+            <a:r>
+              <a:rPr lang="zh-CN" sz="1650">
+                <a:solidFill>
+                  <a:srgbClr val="CBD5E1"/>
+                </a:solidFill>
+                <a:latin typeface="Microsoft YaHei"/>
+                <a:ea typeface="Microsoft YaHei"/>
+              </a:rPr>
+              <a:t>云端大模型</a:t>
+            </a:r>
+            <a:endParaRPr/>
+          </a:p>
+        </p:txBody>
+      </p:sp>
+    </p:spTree>
+  </p:cSld>
+  <p:clrMapOvr>
+    <a:masterClrMapping/>
+  </p:clrMapOvr>
+</p:sld>
+</file>
+
+<file path=ppt/slides/slide11.xml><?xml version="1.0" encoding="utf-8"?>
+<p:sld xmlns:a="http://schemas.openxmlformats.org/drawingml/2006/main" xmlns:r="http://schemas.openxmlformats.org/officeDocument/2006/relationships" xmlns:p="http://schemas.openxmlformats.org/presentationml/2006/main">
+  <p:cSld>
+    <p:spTree>
+      <p:nvGrpSpPr>
+        <p:cNvPr id="1" name="" descr="&lt;Slide&gt;&#10;  &lt;Box style={{&#10;    width: '100%',&#10;    height: '100%',&#10;    backgroundColor: '#FFFFFF',&#10;    padding: 50,&#10;    display: 'flex',&#10;    flexDirection: 'column',&#10;  }}&gt;&#10;    &lt;Text style={{&#10;      fontSize: 14,&#10;      color: '#0EA5E9',&#10;      letterSpacing: 2,&#10;      marginBottom: 8,&#10;    }}&gt;&#10;      04 场景&#10;    &lt;/Text&gt;&#10;    &lt;Text style={{&#10;      fontSize: 36,&#10;      fontWeight: 'bold',&#10;      color: '#1F3A8A',&#10;      marginBottom: 8,&#10;    }}&gt;&#10;      什么数据放哪里？一张表说清&#10;    &lt;/Text&gt;&#10;    &lt;Text style={{&#10;      fontSize: 14,&#10;      color: '#64748B',&#10;      marginBottom: 24,&#10;    }}&gt;&#10;      决策原则：敏感度决定部署位置，不是能力决定&#10;    &lt;/Text&gt;&#10;&#10;    &lt;Box style={{&#10;      border: '1px solid #E2E8F0',&#10;      borderRadius: 12,&#10;      overflow: 'hidden',&#10;      flex: 1,&#10;    }}&gt;&#10;      &lt;Box style={{&#10;        display: 'flex',&#10;        backgroundColor: '#1F3A8A',&#10;        padding: '14px 20px',&#10;      }}&gt;&#10;        &lt;Text style={{ flex: 1.5, fontSize: 15, fontWeight: 'bold', color: '#FFFFFF' }}&gt;数据类型&lt;/Text&gt;&#10;        &lt;Text style={{ flex: 1, fontSize: 15, fontWeight: 'bold', color: '#FFFFFF' }}&gt;推荐部署&lt;/Text&gt;&#10;        &lt;Text style={{ flex: 2.5, fontSize: 15, fontWeight: 'bold', color: '#FFFFFF' }}&gt;理由&lt;/Text&gt;&#10;      &lt;/Box&gt;&#10;&#10;      {[&#10;        { data: '合同 / 法务 / 财务', place: '内网', color: '#1F3A8A', reason: '强合规、出域即风险' },&#10;        { data: '客户隐私数据', place: '内网', color: '#1F3A8A', reason: '个人信息保护法' },&#10;        { data: '内部代码 / 文档', place: '内网', color: '#1F3A8A', reason: '商业机密' },&#10;        { data: '创意文案 / 翻译', place: '外网', color: '#0EA5E9', reason: '通用能力优先' },&#10;        { data: '公开信息查询', place: '外网', color: '#0EA5E9', reason: '无敏感性' },&#10;        { data: '复杂推理 / 编码', place: '视情况', color: '#F59E0B', reason: '取决于成本与隐私' },&#10;      ].map((row, idx) =&gt; (&#10;        &lt;Box key={idx} style={{&#10;          display: 'flex',&#10;          padding: '12px 20px',&#10;          backgroundColor: idx % 2 === 0 ? '#F8FAFC' : '#FFFFFF',&#10;          alignItems: 'center',&#10;        }}&gt;&#10;          &lt;Text style={{ flex: 1.5, fontSize: 15, color: '#1F3A8A', fontWeight: 'bold' }}&gt;{row.data}&lt;/Text&gt;&#10;          &lt;Box style={{ flex: 1 }}&gt;&#10;            &lt;Box style={{&#10;              display: 'inline-block',&#10;              backgroundColor: row.color,&#10;              padding: '4px 14px',&#10;              borderRadius: 16,&#10;            }}&gt;&#10;              &lt;Text style={{ fontSize: 13, color: '#FFFFFF', fontWeight: 'bold' }}&gt;{row.place}&lt;/Text&gt;&#10;            &lt;/Box&gt;&#10;          &lt;/Box&gt;&#10;          &lt;Text style={{ flex: 2.5, fontSize: 14, color: '#475569' }}&gt;{row.reason}&lt;/Text&gt;&#10;        &lt;/Box&gt;&#10;      ))}&#10;    &lt;/Box&gt;&#10;&#10;    &lt;Text style={{&#10;      fontSize: 20,&#10;      fontWeight: 'bold',&#10;      color: '#0EA5E9',&#10;      textAlign: 'center',&#10;      marginTop: 24,&#10;    }}&gt;&#10;      敏感度决定部署位置，不是能力决定&#10;    &lt;/Text&gt;&#10;  &lt;/Box&gt;&#10;&lt;/Slide&gt;"/>
+        <p:cNvGrpSpPr/>
+        <p:nvPr/>
+      </p:nvGrpSpPr>
+      <p:grpSpPr>
+        <a:xfrm>
+          <a:off x="0" y="0"/>
+          <a:ext cx="0" cy="0"/>
+          <a:chOff x="0" y="0"/>
+          <a:chExt cx="0" cy="0"/>
+        </a:xfrm>
+      </p:grpSpPr>
+      <p:sp>
+        <p:nvSpPr>
+          <p:cNvPr id="402" name="矩形 401"/>
+          <p:cNvSpPr/>
+          <p:nvPr/>
+        </p:nvSpPr>
+        <p:spPr>
+          <a:xfrm>
+            <a:off x="0" y="0"/>
+            <a:ext cx="12192000" cy="6858000"/>
+          </a:xfrm>
+          <a:prstGeom prst="rect">
+            <a:avLst/>
+          </a:prstGeom>
+          <a:solidFill>
+            <a:srgbClr val="FFFFFF"/>
+          </a:solidFill>
+          <a:ln/>
+        </p:spPr>
+        <p:txBody>
+          <a:bodyPr/>
+          <a:lstStyle/>
+          <a:p>
+            <a:endParaRPr/>
+          </a:p>
+        </p:txBody>
+      </p:sp>
+      <p:sp>
+        <p:nvSpPr>
+          <p:cNvPr id="403" name="文本框 402" descr="{&quot;isTemplate&quot;:true,&quot;type&quot;:&quot;text&quot;}"/>
+          <p:cNvSpPr txBox="1"/>
+          <p:nvPr/>
+        </p:nvSpPr>
+        <p:spPr>
+          <a:xfrm>
+            <a:off x="476250" y="476250"/>
+            <a:ext cx="11239500" cy="161925"/>
+          </a:xfrm>
+          <a:prstGeom prst="rect">
+            <a:avLst/>
+          </a:prstGeom>
+        </p:spPr>
+        <p:txBody>
+          <a:bodyPr wrap="none" lIns="0" tIns="0" rIns="0" bIns="0"/>
+          <a:lstStyle/>
+          <a:p>
+            <a:pPr>
+              <a:lnSpc>
+                <a:spcPct val="100000"/>
+              </a:lnSpc>
+            </a:pPr>
+            <a:r>
+              <a:rPr lang="en-US" sz="1050" spc="150">
+                <a:solidFill>
+                  <a:srgbClr val="0EA5E9"/>
+                </a:solidFill>
+                <a:latin typeface="Microsoft YaHei"/>
+                <a:ea typeface="Microsoft YaHei"/>
+              </a:rPr>
+              <a:t>04 </a:t>
+            </a:r>
+            <a:r>
+              <a:rPr lang="zh-CN" sz="1050" spc="150">
+                <a:solidFill>
+                  <a:srgbClr val="0EA5E9"/>
+                </a:solidFill>
+                <a:latin typeface="Microsoft YaHei"/>
+                <a:ea typeface="Microsoft YaHei"/>
+              </a:rPr>
+              <a:t>场景</a:t>
+            </a:r>
+            <a:endParaRPr/>
+          </a:p>
+        </p:txBody>
+      </p:sp>
+      <p:sp>
+        <p:nvSpPr>
+          <p:cNvPr id="404" name="文本框 403" descr="{&quot;isTemplate&quot;:true,&quot;type&quot;:&quot;text&quot;}"/>
+          <p:cNvSpPr txBox="1"/>
+          <p:nvPr/>
+        </p:nvSpPr>
+        <p:spPr>
+          <a:xfrm>
+            <a:off x="476250" y="714375"/>
+            <a:ext cx="11239500" cy="419100"/>
+          </a:xfrm>
+          <a:prstGeom prst="rect">
+            <a:avLst/>
+          </a:prstGeom>
+        </p:spPr>
+        <p:txBody>
+          <a:bodyPr wrap="none" lIns="0" tIns="0" rIns="0" bIns="0"/>
+          <a:lstStyle/>
+          <a:p>
+            <a:pPr>
+              <a:lnSpc>
+                <a:spcPct val="100000"/>
+              </a:lnSpc>
+            </a:pPr>
+            <a:r>
+              <a:rPr lang="zh-CN" sz="2700" b="1">
+                <a:solidFill>
+                  <a:srgbClr val="1F3A8A"/>
+                </a:solidFill>
+                <a:latin typeface="Microsoft YaHei"/>
+                <a:ea typeface="Microsoft YaHei"/>
+              </a:rPr>
+              <a:t>什么数据放哪里？一张表说清</a:t>
+            </a:r>
+            <a:endParaRPr/>
+          </a:p>
+        </p:txBody>
+      </p:sp>
+      <p:sp>
+        <p:nvSpPr>
+          <p:cNvPr id="405" name="文本框 404" descr="{&quot;isTemplate&quot;:true,&quot;type&quot;:&quot;text&quot;}"/>
+          <p:cNvSpPr txBox="1"/>
+          <p:nvPr/>
+        </p:nvSpPr>
+        <p:spPr>
+          <a:xfrm>
+            <a:off x="476250" y="1209675"/>
+            <a:ext cx="11239500" cy="161925"/>
+          </a:xfrm>
+          <a:prstGeom prst="rect">
+            <a:avLst/>
+          </a:prstGeom>
+        </p:spPr>
+        <p:txBody>
+          <a:bodyPr wrap="none" lIns="0" tIns="0" rIns="0" bIns="0"/>
+          <a:lstStyle/>
+          <a:p>
+            <a:pPr>
+              <a:lnSpc>
+                <a:spcPct val="100000"/>
+              </a:lnSpc>
+            </a:pPr>
+            <a:r>
+              <a:rPr lang="zh-CN" sz="1050">
+                <a:solidFill>
+                  <a:srgbClr val="64748B"/>
+                </a:solidFill>
+                <a:latin typeface="Microsoft YaHei"/>
+                <a:ea typeface="Microsoft YaHei"/>
+              </a:rPr>
+              <a:t>决策原则：敏感度决定部署位置，不是能力决定</a:t>
+            </a:r>
+            <a:endParaRPr/>
+          </a:p>
+        </p:txBody>
+      </p:sp>
+      <p:sp>
+        <p:nvSpPr>
+          <p:cNvPr id="406" name="矩形: 圆角 405"/>
+          <p:cNvSpPr/>
+          <p:nvPr/>
+        </p:nvSpPr>
+        <p:spPr>
+          <a:xfrm>
+            <a:off x="476250" y="1600200"/>
+            <a:ext cx="11239500" cy="4324350"/>
+          </a:xfrm>
+          <a:prstGeom prst="roundRect">
+            <a:avLst>
+              <a:gd name="adj" fmla="val 2643"/>
+            </a:avLst>
+          </a:prstGeom>
+          <a:ln w="12700">
+            <a:solidFill>
+              <a:srgbClr val="E2E8F0"/>
+            </a:solidFill>
+            <a:prstDash val="solid"/>
+          </a:ln>
+        </p:spPr>
+        <p:txBody>
+          <a:bodyPr/>
+          <a:lstStyle/>
+          <a:p>
+            <a:endParaRPr/>
+          </a:p>
+        </p:txBody>
+      </p:sp>
+      <p:sp>
+        <p:nvSpPr>
+          <p:cNvPr id="407" name="任意多边形: 形状 406"/>
+          <p:cNvSpPr/>
+          <p:nvPr/>
+        </p:nvSpPr>
+        <p:spPr>
+          <a:xfrm>
+            <a:off x="476250" y="1600200"/>
+            <a:ext cx="11239500" cy="438150"/>
+          </a:xfrm>
+          <a:custGeom>
+            <a:avLst/>
+            <a:gdLst/>
+            <a:ahLst/>
+            <a:cxnLst/>
+            <a:rect l="0" t="0" r="0" b="0"/>
+            <a:pathLst>
+              <a:path w="1180" h="46">
+                <a:moveTo>
+                  <a:pt x="1168" y="0"/>
+                </a:moveTo>
+                <a:cubicBezTo>
+                  <a:pt x="1175" y="0"/>
+                  <a:pt x="1180" y="5"/>
+                  <a:pt x="1180" y="12"/>
+                </a:cubicBezTo>
+                <a:lnTo>
+                  <a:pt x="1180" y="46"/>
+                </a:lnTo>
+                <a:lnTo>
+                  <a:pt x="0" y="46"/>
+                </a:lnTo>
+                <a:lnTo>
+                  <a:pt x="0" y="12"/>
+                </a:lnTo>
+                <a:cubicBezTo>
+                  <a:pt x="0" y="5"/>
+                  <a:pt x="5" y="0"/>
+                  <a:pt x="12" y="0"/>
+                </a:cubicBezTo>
+                <a:lnTo>
+                  <a:pt x="1168" y="0"/>
+                </a:lnTo>
+                <a:close/>
+              </a:path>
+            </a:pathLst>
+          </a:custGeom>
+          <a:solidFill>
+            <a:srgbClr val="1F3A8A"/>
+          </a:solidFill>
+          <a:ln/>
+        </p:spPr>
+        <p:txBody>
+          <a:bodyPr/>
+          <a:lstStyle/>
+          <a:p>
+            <a:endParaRPr/>
+          </a:p>
+        </p:txBody>
+      </p:sp>
+      <p:sp>
+        <p:nvSpPr>
+          <p:cNvPr id="408" name="文本框 407" descr="{&quot;isTemplate&quot;:true,&quot;type&quot;:&quot;text&quot;}"/>
+          <p:cNvSpPr txBox="1"/>
+          <p:nvPr/>
+        </p:nvSpPr>
+        <p:spPr>
+          <a:xfrm>
+            <a:off x="666750" y="1733550"/>
+            <a:ext cx="3257550" cy="171450"/>
+          </a:xfrm>
+          <a:prstGeom prst="rect">
+            <a:avLst/>
+          </a:prstGeom>
+        </p:spPr>
+        <p:txBody>
+          <a:bodyPr wrap="none" lIns="0" tIns="0" rIns="0" bIns="0"/>
+          <a:lstStyle/>
+          <a:p>
+            <a:pPr>
+              <a:lnSpc>
+                <a:spcPct val="100000"/>
+              </a:lnSpc>
+            </a:pPr>
+            <a:r>
+              <a:rPr lang="zh-CN" sz="1125" b="1">
+                <a:solidFill>
+                  <a:srgbClr val="FFFFFF"/>
+                </a:solidFill>
+                <a:latin typeface="Microsoft YaHei"/>
+                <a:ea typeface="Microsoft YaHei"/>
+              </a:rPr>
+              <a:t>数据类型</a:t>
+            </a:r>
+            <a:endParaRPr/>
+          </a:p>
+        </p:txBody>
+      </p:sp>
+      <p:sp>
+        <p:nvSpPr>
+          <p:cNvPr id="409" name="文本框 408" descr="{&quot;isTemplate&quot;:true,&quot;type&quot;:&quot;text&quot;}"/>
+          <p:cNvSpPr txBox="1"/>
+          <p:nvPr/>
+        </p:nvSpPr>
+        <p:spPr>
+          <a:xfrm>
+            <a:off x="3924300" y="1733550"/>
+            <a:ext cx="2171700" cy="171450"/>
+          </a:xfrm>
+          <a:prstGeom prst="rect">
+            <a:avLst/>
+          </a:prstGeom>
+        </p:spPr>
+        <p:txBody>
+          <a:bodyPr wrap="none" lIns="0" tIns="0" rIns="0" bIns="0"/>
+          <a:lstStyle/>
+          <a:p>
+            <a:pPr>
+              <a:lnSpc>
+                <a:spcPct val="100000"/>
+              </a:lnSpc>
+            </a:pPr>
+            <a:r>
+              <a:rPr lang="zh-CN" sz="1125" b="1">
+                <a:solidFill>
+                  <a:srgbClr val="FFFFFF"/>
+                </a:solidFill>
+                <a:latin typeface="Microsoft YaHei"/>
+                <a:ea typeface="Microsoft YaHei"/>
+              </a:rPr>
+              <a:t>推荐部署</a:t>
+            </a:r>
+            <a:endParaRPr/>
+          </a:p>
+        </p:txBody>
+      </p:sp>
+      <p:sp>
+        <p:nvSpPr>
+          <p:cNvPr id="410" name="文本框 409" descr="{&quot;isTemplate&quot;:true,&quot;type&quot;:&quot;text&quot;}"/>
+          <p:cNvSpPr txBox="1"/>
+          <p:nvPr/>
+        </p:nvSpPr>
+        <p:spPr>
+          <a:xfrm>
+            <a:off x="6096000" y="1733550"/>
+            <a:ext cx="5429250" cy="171450"/>
+          </a:xfrm>
+          <a:prstGeom prst="rect">
+            <a:avLst/>
+          </a:prstGeom>
+        </p:spPr>
+        <p:txBody>
+          <a:bodyPr wrap="none" lIns="0" tIns="0" rIns="0" bIns="0"/>
+          <a:lstStyle/>
+          <a:p>
+            <a:pPr>
+              <a:lnSpc>
+                <a:spcPct val="100000"/>
+              </a:lnSpc>
+            </a:pPr>
+            <a:r>
+              <a:rPr lang="zh-CN" sz="1125" b="1">
+                <a:solidFill>
+                  <a:srgbClr val="FFFFFF"/>
+                </a:solidFill>
+                <a:latin typeface="Microsoft YaHei"/>
+                <a:ea typeface="Microsoft YaHei"/>
+              </a:rPr>
+              <a:t>理由</a:t>
+            </a:r>
+            <a:endParaRPr/>
+          </a:p>
+        </p:txBody>
+      </p:sp>
+      <p:sp>
+        <p:nvSpPr>
+          <p:cNvPr id="411" name="矩形 410"/>
+          <p:cNvSpPr/>
+          <p:nvPr/>
+        </p:nvSpPr>
+        <p:spPr>
+          <a:xfrm>
+            <a:off x="476250" y="2038350"/>
+            <a:ext cx="11239500" cy="457200"/>
+          </a:xfrm>
+          <a:prstGeom prst="rect">
+            <a:avLst/>
+          </a:prstGeom>
+          <a:solidFill>
+            <a:srgbClr val="F8FAFC"/>
+          </a:solidFill>
+          <a:ln/>
+        </p:spPr>
+        <p:txBody>
+          <a:bodyPr/>
+          <a:lstStyle/>
+          <a:p>
+            <a:endParaRPr/>
+          </a:p>
+        </p:txBody>
+      </p:sp>
+      <p:sp>
+        <p:nvSpPr>
+          <p:cNvPr id="412" name="文本框 411" descr="{&quot;isTemplate&quot;:true,&quot;type&quot;:&quot;text&quot;}"/>
+          <p:cNvSpPr txBox="1"/>
+          <p:nvPr/>
+        </p:nvSpPr>
+        <p:spPr>
+          <a:xfrm>
+            <a:off x="666750" y="2181225"/>
+            <a:ext cx="3257550" cy="171450"/>
+          </a:xfrm>
+          <a:prstGeom prst="rect">
+            <a:avLst/>
+          </a:prstGeom>
+        </p:spPr>
+        <p:txBody>
+          <a:bodyPr wrap="none" lIns="0" tIns="0" rIns="0" bIns="0"/>
+          <a:lstStyle/>
+          <a:p>
+            <a:pPr>
+              <a:lnSpc>
+                <a:spcPct val="100000"/>
+              </a:lnSpc>
+            </a:pPr>
+            <a:r>
+              <a:rPr lang="zh-CN" sz="1125" b="1">
+                <a:solidFill>
+                  <a:srgbClr val="1F3A8A"/>
+                </a:solidFill>
+                <a:latin typeface="Microsoft YaHei"/>
+                <a:ea typeface="Microsoft YaHei"/>
+              </a:rPr>
+              <a:t>合同</a:t>
+            </a:r>
+            <a:r>
+              <a:rPr lang="en-US" sz="1125" b="1">
+                <a:solidFill>
+                  <a:srgbClr val="1F3A8A"/>
+                </a:solidFill>
+                <a:latin typeface="Microsoft YaHei"/>
+                <a:ea typeface="Microsoft YaHei"/>
+              </a:rPr>
+              <a:t> / </a:t>
+            </a:r>
+            <a:r>
+              <a:rPr lang="zh-CN" sz="1125" b="1">
+                <a:solidFill>
+                  <a:srgbClr val="1F3A8A"/>
+                </a:solidFill>
+                <a:latin typeface="Microsoft YaHei"/>
+                <a:ea typeface="Microsoft YaHei"/>
+              </a:rPr>
+              <a:t>法务</a:t>
+            </a:r>
+            <a:r>
+              <a:rPr lang="en-US" sz="1125" b="1">
+                <a:solidFill>
+                  <a:srgbClr val="1F3A8A"/>
+                </a:solidFill>
+                <a:latin typeface="Microsoft YaHei"/>
+                <a:ea typeface="Microsoft YaHei"/>
+              </a:rPr>
+              <a:t> / </a:t>
+            </a:r>
+            <a:r>
+              <a:rPr lang="zh-CN" sz="1125" b="1">
+                <a:solidFill>
+                  <a:srgbClr val="1F3A8A"/>
+                </a:solidFill>
+                <a:latin typeface="Microsoft YaHei"/>
+                <a:ea typeface="Microsoft YaHei"/>
+              </a:rPr>
+              <a:t>财务</a:t>
+            </a:r>
+            <a:endParaRPr/>
+          </a:p>
+        </p:txBody>
+      </p:sp>
+      <p:sp>
+        <p:nvSpPr>
+          <p:cNvPr id="413" name="矩形: 圆角 412"/>
+          <p:cNvSpPr/>
+          <p:nvPr/>
+        </p:nvSpPr>
+        <p:spPr>
+          <a:xfrm>
+            <a:off x="3924300" y="2152650"/>
+            <a:ext cx="2171700" cy="228600"/>
+          </a:xfrm>
+          <a:prstGeom prst="roundRect">
+            <a:avLst>
+              <a:gd name="adj" fmla="val 66667"/>
+            </a:avLst>
+          </a:prstGeom>
+          <a:solidFill>
+            <a:srgbClr val="1F3A8A"/>
+          </a:solidFill>
+          <a:ln/>
+        </p:spPr>
+        <p:txBody>
+          <a:bodyPr/>
+          <a:lstStyle/>
+          <a:p>
+            <a:endParaRPr/>
+          </a:p>
+        </p:txBody>
+      </p:sp>
+      <p:sp>
+        <p:nvSpPr>
+          <p:cNvPr id="414" name="文本框 413" descr="{&quot;isTemplate&quot;:true,&quot;type&quot;:&quot;text&quot;}"/>
+          <p:cNvSpPr txBox="1"/>
+          <p:nvPr/>
+        </p:nvSpPr>
+        <p:spPr>
+          <a:xfrm>
+            <a:off x="4057650" y="2190750"/>
+            <a:ext cx="1905000" cy="152400"/>
+          </a:xfrm>
+          <a:prstGeom prst="rect">
+            <a:avLst/>
+          </a:prstGeom>
+        </p:spPr>
+        <p:txBody>
+          <a:bodyPr wrap="none" lIns="0" tIns="0" rIns="0" bIns="0"/>
+          <a:lstStyle/>
+          <a:p>
+            <a:pPr>
+              <a:lnSpc>
+                <a:spcPct val="100000"/>
+              </a:lnSpc>
+            </a:pPr>
+            <a:r>
+              <a:rPr lang="zh-CN" sz="975" b="1">
+                <a:solidFill>
+                  <a:srgbClr val="FFFFFF"/>
+                </a:solidFill>
+                <a:latin typeface="Microsoft YaHei"/>
+                <a:ea typeface="Microsoft YaHei"/>
+              </a:rPr>
+              <a:t>内网</a:t>
+            </a:r>
+            <a:endParaRPr/>
+          </a:p>
+        </p:txBody>
+      </p:sp>
+      <p:sp>
+        <p:nvSpPr>
+          <p:cNvPr id="415" name="文本框 414" descr="{&quot;isTemplate&quot;:true,&quot;type&quot;:&quot;text&quot;}"/>
+          <p:cNvSpPr txBox="1"/>
+          <p:nvPr/>
+        </p:nvSpPr>
+        <p:spPr>
+          <a:xfrm>
+            <a:off x="6096000" y="2190750"/>
+            <a:ext cx="5429250" cy="161925"/>
+          </a:xfrm>
+          <a:prstGeom prst="rect">
+            <a:avLst/>
+          </a:prstGeom>
+        </p:spPr>
+        <p:txBody>
+          <a:bodyPr wrap="none" lIns="0" tIns="0" rIns="0" bIns="0"/>
+          <a:lstStyle/>
+          <a:p>
+            <a:pPr>
+              <a:lnSpc>
+                <a:spcPct val="100000"/>
+              </a:lnSpc>
+            </a:pPr>
+            <a:r>
+              <a:rPr lang="zh-CN" sz="1050">
+                <a:solidFill>
+                  <a:srgbClr val="475569"/>
+                </a:solidFill>
+                <a:latin typeface="Microsoft YaHei"/>
+                <a:ea typeface="Microsoft YaHei"/>
+              </a:rPr>
+              <a:t>强合规、出域即风险</a:t>
+            </a:r>
+            <a:endParaRPr/>
+          </a:p>
+        </p:txBody>
+      </p:sp>
+      <p:sp>
+        <p:nvSpPr>
+          <p:cNvPr id="416" name="矩形 415"/>
+          <p:cNvSpPr/>
+          <p:nvPr/>
+        </p:nvSpPr>
+        <p:spPr>
+          <a:xfrm>
+            <a:off x="476250" y="2495550"/>
+            <a:ext cx="11239500" cy="457200"/>
+          </a:xfrm>
+          <a:prstGeom prst="rect">
+            <a:avLst/>
+          </a:prstGeom>
+          <a:solidFill>
+            <a:srgbClr val="FFFFFF"/>
+          </a:solidFill>
+          <a:ln/>
+        </p:spPr>
+        <p:txBody>
+          <a:bodyPr/>
+          <a:lstStyle/>
+          <a:p>
+            <a:endParaRPr/>
+          </a:p>
+        </p:txBody>
+      </p:sp>
+      <p:sp>
+        <p:nvSpPr>
+          <p:cNvPr id="417" name="文本框 416" descr="{&quot;isTemplate&quot;:true,&quot;type&quot;:&quot;text&quot;}"/>
+          <p:cNvSpPr txBox="1"/>
+          <p:nvPr/>
+        </p:nvSpPr>
+        <p:spPr>
+          <a:xfrm>
+            <a:off x="666750" y="2638425"/>
+            <a:ext cx="3257550" cy="171450"/>
+          </a:xfrm>
+          <a:prstGeom prst="rect">
+            <a:avLst/>
+          </a:prstGeom>
+        </p:spPr>
+        <p:txBody>
+          <a:bodyPr wrap="none" lIns="0" tIns="0" rIns="0" bIns="0"/>
+          <a:lstStyle/>
+          <a:p>
+            <a:pPr>
+              <a:lnSpc>
+                <a:spcPct val="100000"/>
+              </a:lnSpc>
+            </a:pPr>
+            <a:r>
+              <a:rPr lang="zh-CN" sz="1125" b="1">
+                <a:solidFill>
+                  <a:srgbClr val="1F3A8A"/>
+                </a:solidFill>
+                <a:latin typeface="Microsoft YaHei"/>
+                <a:ea typeface="Microsoft YaHei"/>
+              </a:rPr>
+              <a:t>客户隐私数据</a:t>
+            </a:r>
+            <a:endParaRPr/>
+          </a:p>
+        </p:txBody>
+      </p:sp>
+      <p:sp>
+        <p:nvSpPr>
+          <p:cNvPr id="418" name="矩形: 圆角 417"/>
+          <p:cNvSpPr/>
+          <p:nvPr/>
+        </p:nvSpPr>
+        <p:spPr>
+          <a:xfrm>
+            <a:off x="3924300" y="2609850"/>
+            <a:ext cx="2171700" cy="228600"/>
+          </a:xfrm>
+          <a:prstGeom prst="roundRect">
+            <a:avLst>
+              <a:gd name="adj" fmla="val 66667"/>
+            </a:avLst>
+          </a:prstGeom>
+          <a:solidFill>
+            <a:srgbClr val="1F3A8A"/>
+          </a:solidFill>
+          <a:ln/>
+        </p:spPr>
+        <p:txBody>
+          <a:bodyPr/>
+          <a:lstStyle/>
+          <a:p>
+            <a:endParaRPr/>
+          </a:p>
+        </p:txBody>
+      </p:sp>
+      <p:sp>
+        <p:nvSpPr>
+          <p:cNvPr id="419" name="文本框 418" descr="{&quot;isTemplate&quot;:true,&quot;type&quot;:&quot;text&quot;}"/>
+          <p:cNvSpPr txBox="1"/>
+          <p:nvPr/>
+        </p:nvSpPr>
+        <p:spPr>
+          <a:xfrm>
+            <a:off x="4057650" y="2647950"/>
+            <a:ext cx="1905000" cy="152400"/>
+          </a:xfrm>
+          <a:prstGeom prst="rect">
+            <a:avLst/>
+          </a:prstGeom>
+        </p:spPr>
+        <p:txBody>
+          <a:bodyPr wrap="none" lIns="0" tIns="0" rIns="0" bIns="0"/>
+          <a:lstStyle/>
+          <a:p>
+            <a:pPr>
+              <a:lnSpc>
+                <a:spcPct val="100000"/>
+              </a:lnSpc>
+            </a:pPr>
+            <a:r>
+              <a:rPr lang="zh-CN" sz="975" b="1">
+                <a:solidFill>
+                  <a:srgbClr val="FFFFFF"/>
+                </a:solidFill>
+                <a:latin typeface="Microsoft YaHei"/>
+                <a:ea typeface="Microsoft YaHei"/>
+              </a:rPr>
+              <a:t>内网</a:t>
+            </a:r>
+            <a:endParaRPr/>
+          </a:p>
+        </p:txBody>
+      </p:sp>
+      <p:sp>
+        <p:nvSpPr>
+          <p:cNvPr id="420" name="文本框 419" descr="{&quot;isTemplate&quot;:true,&quot;type&quot;:&quot;text&quot;}"/>
+          <p:cNvSpPr txBox="1"/>
+          <p:nvPr/>
+        </p:nvSpPr>
+        <p:spPr>
+          <a:xfrm>
+            <a:off x="6096000" y="2647950"/>
+            <a:ext cx="5429250" cy="161925"/>
+          </a:xfrm>
+          <a:prstGeom prst="rect">
+            <a:avLst/>
+          </a:prstGeom>
+        </p:spPr>
+        <p:txBody>
+          <a:bodyPr wrap="none" lIns="0" tIns="0" rIns="0" bIns="0"/>
+          <a:lstStyle/>
+          <a:p>
+            <a:pPr>
+              <a:lnSpc>
+                <a:spcPct val="100000"/>
+              </a:lnSpc>
+            </a:pPr>
+            <a:r>
+              <a:rPr lang="zh-CN" sz="1050">
+                <a:solidFill>
+                  <a:srgbClr val="475569"/>
+                </a:solidFill>
+                <a:latin typeface="Microsoft YaHei"/>
+                <a:ea typeface="Microsoft YaHei"/>
+              </a:rPr>
+              <a:t>个人信息保护法</a:t>
+            </a:r>
+            <a:endParaRPr/>
+          </a:p>
+        </p:txBody>
+      </p:sp>
+      <p:sp>
+        <p:nvSpPr>
+          <p:cNvPr id="421" name="矩形 420"/>
+          <p:cNvSpPr/>
+          <p:nvPr/>
+        </p:nvSpPr>
+        <p:spPr>
+          <a:xfrm>
+            <a:off x="476250" y="2952750"/>
+            <a:ext cx="11239500" cy="457200"/>
+          </a:xfrm>
+          <a:prstGeom prst="rect">
+            <a:avLst/>
+          </a:prstGeom>
+          <a:solidFill>
+            <a:srgbClr val="F8FAFC"/>
+          </a:solidFill>
+          <a:ln/>
+        </p:spPr>
+        <p:txBody>
+          <a:bodyPr/>
+          <a:lstStyle/>
+          <a:p>
+            <a:endParaRPr/>
+          </a:p>
+        </p:txBody>
+      </p:sp>
+      <p:sp>
+        <p:nvSpPr>
+          <p:cNvPr id="422" name="文本框 421" descr="{&quot;isTemplate&quot;:true,&quot;type&quot;:&quot;text&quot;}"/>
+          <p:cNvSpPr txBox="1"/>
+          <p:nvPr/>
+        </p:nvSpPr>
+        <p:spPr>
+          <a:xfrm>
+            <a:off x="666750" y="3095625"/>
+            <a:ext cx="3257550" cy="171450"/>
+          </a:xfrm>
+          <a:prstGeom prst="rect">
+            <a:avLst/>
+          </a:prstGeom>
+        </p:spPr>
+        <p:txBody>
+          <a:bodyPr wrap="none" lIns="0" tIns="0" rIns="0" bIns="0"/>
+          <a:lstStyle/>
+          <a:p>
+            <a:pPr>
+              <a:lnSpc>
+                <a:spcPct val="100000"/>
+              </a:lnSpc>
+            </a:pPr>
+            <a:r>
+              <a:rPr lang="zh-CN" sz="1125" b="1">
+                <a:solidFill>
+                  <a:srgbClr val="1F3A8A"/>
+                </a:solidFill>
+                <a:latin typeface="Microsoft YaHei"/>
+                <a:ea typeface="Microsoft YaHei"/>
+              </a:rPr>
+              <a:t>内部代码</a:t>
+            </a:r>
+            <a:r>
+              <a:rPr lang="en-US" sz="1125" b="1">
+                <a:solidFill>
+                  <a:srgbClr val="1F3A8A"/>
+                </a:solidFill>
+                <a:latin typeface="Microsoft YaHei"/>
+                <a:ea typeface="Microsoft YaHei"/>
+              </a:rPr>
+              <a:t> / </a:t>
+            </a:r>
+            <a:r>
+              <a:rPr lang="zh-CN" sz="1125" b="1">
+                <a:solidFill>
+                  <a:srgbClr val="1F3A8A"/>
+                </a:solidFill>
+                <a:latin typeface="Microsoft YaHei"/>
+                <a:ea typeface="Microsoft YaHei"/>
+              </a:rPr>
+              <a:t>文档</a:t>
+            </a:r>
+            <a:endParaRPr/>
+          </a:p>
+        </p:txBody>
+      </p:sp>
+      <p:sp>
+        <p:nvSpPr>
+          <p:cNvPr id="423" name="矩形: 圆角 422"/>
+          <p:cNvSpPr/>
+          <p:nvPr/>
+        </p:nvSpPr>
+        <p:spPr>
+          <a:xfrm>
+            <a:off x="3924300" y="3067050"/>
+            <a:ext cx="2171700" cy="228600"/>
+          </a:xfrm>
+          <a:prstGeom prst="roundRect">
+            <a:avLst>
+              <a:gd name="adj" fmla="val 66667"/>
+            </a:avLst>
+          </a:prstGeom>
+          <a:solidFill>
+            <a:srgbClr val="1F3A8A"/>
+          </a:solidFill>
+          <a:ln/>
+        </p:spPr>
+        <p:txBody>
+          <a:bodyPr/>
+          <a:lstStyle/>
+          <a:p>
+            <a:endParaRPr/>
+          </a:p>
+        </p:txBody>
+      </p:sp>
+      <p:sp>
+        <p:nvSpPr>
+          <p:cNvPr id="424" name="文本框 423" descr="{&quot;isTemplate&quot;:true,&quot;type&quot;:&quot;text&quot;}"/>
+          <p:cNvSpPr txBox="1"/>
+          <p:nvPr/>
+        </p:nvSpPr>
+        <p:spPr>
+          <a:xfrm>
+            <a:off x="4057650" y="3105150"/>
+            <a:ext cx="1905000" cy="152400"/>
+          </a:xfrm>
+          <a:prstGeom prst="rect">
+            <a:avLst/>
+          </a:prstGeom>
+        </p:spPr>
+        <p:txBody>
+          <a:bodyPr wrap="none" lIns="0" tIns="0" rIns="0" bIns="0"/>
+          <a:lstStyle/>
+          <a:p>
+            <a:pPr>
+              <a:lnSpc>
+                <a:spcPct val="100000"/>
+              </a:lnSpc>
+            </a:pPr>
+            <a:r>
+              <a:rPr lang="zh-CN" sz="975" b="1">
+                <a:solidFill>
+                  <a:srgbClr val="FFFFFF"/>
+                </a:solidFill>
+                <a:latin typeface="Microsoft YaHei"/>
+                <a:ea typeface="Microsoft YaHei"/>
+              </a:rPr>
+              <a:t>内网</a:t>
+            </a:r>
+            <a:endParaRPr/>
+          </a:p>
+        </p:txBody>
+      </p:sp>
+      <p:sp>
+        <p:nvSpPr>
+          <p:cNvPr id="425" name="文本框 424" descr="{&quot;isTemplate&quot;:true,&quot;type&quot;:&quot;text&quot;}"/>
+          <p:cNvSpPr txBox="1"/>
+          <p:nvPr/>
+        </p:nvSpPr>
+        <p:spPr>
+          <a:xfrm>
+            <a:off x="6096000" y="3105150"/>
+            <a:ext cx="5429250" cy="161925"/>
+          </a:xfrm>
+          <a:prstGeom prst="rect">
+            <a:avLst/>
+          </a:prstGeom>
+        </p:spPr>
+        <p:txBody>
+          <a:bodyPr wrap="none" lIns="0" tIns="0" rIns="0" bIns="0"/>
+          <a:lstStyle/>
+          <a:p>
+            <a:pPr>
+              <a:lnSpc>
+                <a:spcPct val="100000"/>
+              </a:lnSpc>
+            </a:pPr>
+            <a:r>
+              <a:rPr lang="zh-CN" sz="1050">
+                <a:solidFill>
+                  <a:srgbClr val="475569"/>
+                </a:solidFill>
+                <a:latin typeface="Microsoft YaHei"/>
+                <a:ea typeface="Microsoft YaHei"/>
+              </a:rPr>
+              <a:t>商业机密</a:t>
+            </a:r>
+            <a:endParaRPr/>
+          </a:p>
+        </p:txBody>
+      </p:sp>
+      <p:sp>
+        <p:nvSpPr>
+          <p:cNvPr id="426" name="矩形 425"/>
+          <p:cNvSpPr/>
+          <p:nvPr/>
+        </p:nvSpPr>
+        <p:spPr>
+          <a:xfrm>
+            <a:off x="476250" y="3409950"/>
+            <a:ext cx="11239500" cy="457200"/>
+          </a:xfrm>
+          <a:prstGeom prst="rect">
+            <a:avLst/>
+          </a:prstGeom>
+          <a:solidFill>
+            <a:srgbClr val="FFFFFF"/>
+          </a:solidFill>
+          <a:ln/>
+        </p:spPr>
+        <p:txBody>
+          <a:bodyPr/>
+          <a:lstStyle/>
+          <a:p>
+            <a:endParaRPr/>
+          </a:p>
+        </p:txBody>
+      </p:sp>
+      <p:sp>
+        <p:nvSpPr>
+          <p:cNvPr id="427" name="文本框 426" descr="{&quot;isTemplate&quot;:true,&quot;type&quot;:&quot;text&quot;}"/>
+          <p:cNvSpPr txBox="1"/>
+          <p:nvPr/>
+        </p:nvSpPr>
+        <p:spPr>
+          <a:xfrm>
+            <a:off x="666750" y="3552825"/>
+            <a:ext cx="3257550" cy="171450"/>
+          </a:xfrm>
+          <a:prstGeom prst="rect">
+            <a:avLst/>
+          </a:prstGeom>
+        </p:spPr>
+        <p:txBody>
+          <a:bodyPr wrap="none" lIns="0" tIns="0" rIns="0" bIns="0"/>
+          <a:lstStyle/>
+          <a:p>
+            <a:pPr>
+              <a:lnSpc>
+                <a:spcPct val="100000"/>
+              </a:lnSpc>
+            </a:pPr>
+            <a:r>
+              <a:rPr lang="zh-CN" sz="1125" b="1">
+                <a:solidFill>
+                  <a:srgbClr val="1F3A8A"/>
+                </a:solidFill>
+                <a:latin typeface="Microsoft YaHei"/>
+                <a:ea typeface="Microsoft YaHei"/>
+              </a:rPr>
+              <a:t>创意文案</a:t>
+            </a:r>
+            <a:r>
+              <a:rPr lang="en-US" sz="1125" b="1">
+                <a:solidFill>
+                  <a:srgbClr val="1F3A8A"/>
+                </a:solidFill>
+                <a:latin typeface="Microsoft YaHei"/>
+                <a:ea typeface="Microsoft YaHei"/>
+              </a:rPr>
+              <a:t> / </a:t>
+            </a:r>
+            <a:r>
+              <a:rPr lang="zh-CN" sz="1125" b="1">
+                <a:solidFill>
+                  <a:srgbClr val="1F3A8A"/>
+                </a:solidFill>
+                <a:latin typeface="Microsoft YaHei"/>
+                <a:ea typeface="Microsoft YaHei"/>
+              </a:rPr>
+              <a:t>翻译</a:t>
+            </a:r>
+            <a:endParaRPr/>
+          </a:p>
+        </p:txBody>
+      </p:sp>
+      <p:sp>
+        <p:nvSpPr>
+          <p:cNvPr id="428" name="矩形: 圆角 427"/>
+          <p:cNvSpPr/>
+          <p:nvPr/>
+        </p:nvSpPr>
+        <p:spPr>
+          <a:xfrm>
+            <a:off x="3924300" y="3524250"/>
+            <a:ext cx="2171700" cy="228600"/>
+          </a:xfrm>
+          <a:prstGeom prst="roundRect">
+            <a:avLst>
+              <a:gd name="adj" fmla="val 66667"/>
+            </a:avLst>
+          </a:prstGeom>
+          <a:solidFill>
+            <a:srgbClr val="0EA5E9"/>
+          </a:solidFill>
+          <a:ln/>
+        </p:spPr>
+        <p:txBody>
+          <a:bodyPr/>
+          <a:lstStyle/>
+          <a:p>
+            <a:endParaRPr/>
+          </a:p>
+        </p:txBody>
+      </p:sp>
+      <p:sp>
+        <p:nvSpPr>
+          <p:cNvPr id="429" name="文本框 428" descr="{&quot;isTemplate&quot;:true,&quot;type&quot;:&quot;text&quot;}"/>
+          <p:cNvSpPr txBox="1"/>
+          <p:nvPr/>
+        </p:nvSpPr>
+        <p:spPr>
+          <a:xfrm>
+            <a:off x="4057650" y="3562350"/>
+            <a:ext cx="1905000" cy="152400"/>
+          </a:xfrm>
+          <a:prstGeom prst="rect">
+            <a:avLst/>
+          </a:prstGeom>
+        </p:spPr>
+        <p:txBody>
+          <a:bodyPr wrap="none" lIns="0" tIns="0" rIns="0" bIns="0"/>
+          <a:lstStyle/>
+          <a:p>
+            <a:pPr>
+              <a:lnSpc>
+                <a:spcPct val="100000"/>
+              </a:lnSpc>
+            </a:pPr>
+            <a:r>
+              <a:rPr lang="zh-CN" sz="975" b="1">
+                <a:solidFill>
+                  <a:srgbClr val="FFFFFF"/>
+                </a:solidFill>
+                <a:latin typeface="Microsoft YaHei"/>
+                <a:ea typeface="Microsoft YaHei"/>
+              </a:rPr>
+              <a:t>外网</a:t>
+            </a:r>
+            <a:endParaRPr/>
+          </a:p>
+        </p:txBody>
+      </p:sp>
+      <p:sp>
+        <p:nvSpPr>
+          <p:cNvPr id="430" name="文本框 429" descr="{&quot;isTemplate&quot;:true,&quot;type&quot;:&quot;text&quot;}"/>
+          <p:cNvSpPr txBox="1"/>
+          <p:nvPr/>
+        </p:nvSpPr>
+        <p:spPr>
+          <a:xfrm>
+            <a:off x="6096000" y="3562350"/>
+            <a:ext cx="5429250" cy="161925"/>
+          </a:xfrm>
+          <a:prstGeom prst="rect">
+            <a:avLst/>
+          </a:prstGeom>
+        </p:spPr>
+        <p:txBody>
+          <a:bodyPr wrap="none" lIns="0" tIns="0" rIns="0" bIns="0"/>
+          <a:lstStyle/>
+          <a:p>
+            <a:pPr>
+              <a:lnSpc>
+                <a:spcPct val="100000"/>
+              </a:lnSpc>
+            </a:pPr>
+            <a:r>
+              <a:rPr lang="zh-CN" sz="1050">
+                <a:solidFill>
+                  <a:srgbClr val="475569"/>
+                </a:solidFill>
+                <a:latin typeface="Microsoft YaHei"/>
+                <a:ea typeface="Microsoft YaHei"/>
+              </a:rPr>
+              <a:t>通用能力优先</a:t>
+            </a:r>
+            <a:endParaRPr/>
+          </a:p>
+        </p:txBody>
+      </p:sp>
+      <p:sp>
+        <p:nvSpPr>
+          <p:cNvPr id="431" name="矩形 430"/>
+          <p:cNvSpPr/>
+          <p:nvPr/>
+        </p:nvSpPr>
+        <p:spPr>
+          <a:xfrm>
+            <a:off x="476250" y="3867150"/>
+            <a:ext cx="11239500" cy="457200"/>
+          </a:xfrm>
+          <a:prstGeom prst="rect">
+            <a:avLst/>
+          </a:prstGeom>
+          <a:solidFill>
+            <a:srgbClr val="F8FAFC"/>
+          </a:solidFill>
+          <a:ln/>
+        </p:spPr>
+        <p:txBody>
+          <a:bodyPr/>
+          <a:lstStyle/>
+          <a:p>
+            <a:endParaRPr/>
+          </a:p>
+        </p:txBody>
+      </p:sp>
+      <p:sp>
+        <p:nvSpPr>
+          <p:cNvPr id="432" name="文本框 431" descr="{&quot;isTemplate&quot;:true,&quot;type&quot;:&quot;text&quot;}"/>
+          <p:cNvSpPr txBox="1"/>
+          <p:nvPr/>
+        </p:nvSpPr>
+        <p:spPr>
+          <a:xfrm>
+            <a:off x="666750" y="4010025"/>
+            <a:ext cx="3257550" cy="171450"/>
+          </a:xfrm>
+          <a:prstGeom prst="rect">
+            <a:avLst/>
+          </a:prstGeom>
+        </p:spPr>
+        <p:txBody>
+          <a:bodyPr wrap="none" lIns="0" tIns="0" rIns="0" bIns="0"/>
+          <a:lstStyle/>
+          <a:p>
+            <a:pPr>
+              <a:lnSpc>
+                <a:spcPct val="100000"/>
+              </a:lnSpc>
+            </a:pPr>
+            <a:r>
+              <a:rPr lang="zh-CN" sz="1125" b="1">
+                <a:solidFill>
+                  <a:srgbClr val="1F3A8A"/>
+                </a:solidFill>
+                <a:latin typeface="Microsoft YaHei"/>
+                <a:ea typeface="Microsoft YaHei"/>
+              </a:rPr>
+              <a:t>公开信息查询</a:t>
+            </a:r>
+            <a:endParaRPr/>
+          </a:p>
+        </p:txBody>
+      </p:sp>
+      <p:sp>
+        <p:nvSpPr>
+          <p:cNvPr id="433" name="矩形: 圆角 432"/>
+          <p:cNvSpPr/>
+          <p:nvPr/>
+        </p:nvSpPr>
+        <p:spPr>
+          <a:xfrm>
+            <a:off x="3924300" y="3981450"/>
+            <a:ext cx="2171700" cy="228600"/>
+          </a:xfrm>
+          <a:prstGeom prst="roundRect">
+            <a:avLst>
+              <a:gd name="adj" fmla="val 66667"/>
+            </a:avLst>
+          </a:prstGeom>
+          <a:solidFill>
+            <a:srgbClr val="0EA5E9"/>
+          </a:solidFill>
+          <a:ln/>
+        </p:spPr>
+        <p:txBody>
+          <a:bodyPr/>
+          <a:lstStyle/>
+          <a:p>
+            <a:endParaRPr/>
+          </a:p>
+        </p:txBody>
+      </p:sp>
+      <p:sp>
+        <p:nvSpPr>
+          <p:cNvPr id="434" name="文本框 433" descr="{&quot;isTemplate&quot;:true,&quot;type&quot;:&quot;text&quot;}"/>
+          <p:cNvSpPr txBox="1"/>
+          <p:nvPr/>
+        </p:nvSpPr>
+        <p:spPr>
+          <a:xfrm>
+            <a:off x="4057650" y="4019550"/>
+            <a:ext cx="1905000" cy="152400"/>
+          </a:xfrm>
+          <a:prstGeom prst="rect">
+            <a:avLst/>
+          </a:prstGeom>
+        </p:spPr>
+        <p:txBody>
+          <a:bodyPr wrap="none" lIns="0" tIns="0" rIns="0" bIns="0"/>
+          <a:lstStyle/>
+          <a:p>
+            <a:pPr>
+              <a:lnSpc>
+                <a:spcPct val="100000"/>
+              </a:lnSpc>
+            </a:pPr>
+            <a:r>
+              <a:rPr lang="zh-CN" sz="975" b="1">
+                <a:solidFill>
+                  <a:srgbClr val="FFFFFF"/>
+                </a:solidFill>
+                <a:latin typeface="Microsoft YaHei"/>
+                <a:ea typeface="Microsoft YaHei"/>
+              </a:rPr>
+              <a:t>外网</a:t>
+            </a:r>
+            <a:endParaRPr/>
+          </a:p>
+        </p:txBody>
+      </p:sp>
+      <p:sp>
+        <p:nvSpPr>
+          <p:cNvPr id="435" name="文本框 434" descr="{&quot;isTemplate&quot;:true,&quot;type&quot;:&quot;text&quot;}"/>
+          <p:cNvSpPr txBox="1"/>
+          <p:nvPr/>
+        </p:nvSpPr>
+        <p:spPr>
+          <a:xfrm>
+            <a:off x="6096000" y="4019550"/>
+            <a:ext cx="5429250" cy="161925"/>
+          </a:xfrm>
+          <a:prstGeom prst="rect">
+            <a:avLst/>
+          </a:prstGeom>
+        </p:spPr>
+        <p:txBody>
+          <a:bodyPr wrap="none" lIns="0" tIns="0" rIns="0" bIns="0"/>
+          <a:lstStyle/>
+          <a:p>
+            <a:pPr>
+              <a:lnSpc>
+                <a:spcPct val="100000"/>
+              </a:lnSpc>
+            </a:pPr>
+            <a:r>
+              <a:rPr lang="zh-CN" sz="1050">
+                <a:solidFill>
+                  <a:srgbClr val="475569"/>
+                </a:solidFill>
+                <a:latin typeface="Microsoft YaHei"/>
+                <a:ea typeface="Microsoft YaHei"/>
+              </a:rPr>
+              <a:t>无敏感性</a:t>
+            </a:r>
+            <a:endParaRPr/>
+          </a:p>
+        </p:txBody>
+      </p:sp>
+      <p:sp>
+        <p:nvSpPr>
+          <p:cNvPr id="436" name="矩形 435"/>
+          <p:cNvSpPr/>
+          <p:nvPr/>
+        </p:nvSpPr>
+        <p:spPr>
+          <a:xfrm>
+            <a:off x="476250" y="4324350"/>
+            <a:ext cx="11239500" cy="457200"/>
+          </a:xfrm>
+          <a:prstGeom prst="rect">
+            <a:avLst/>
+          </a:prstGeom>
+          <a:solidFill>
+            <a:srgbClr val="FFFFFF"/>
+          </a:solidFill>
+          <a:ln/>
+        </p:spPr>
+        <p:txBody>
+          <a:bodyPr/>
+          <a:lstStyle/>
+          <a:p>
+            <a:endParaRPr/>
+          </a:p>
+        </p:txBody>
+      </p:sp>
+      <p:sp>
+        <p:nvSpPr>
+          <p:cNvPr id="437" name="文本框 436" descr="{&quot;isTemplate&quot;:true,&quot;type&quot;:&quot;text&quot;}"/>
+          <p:cNvSpPr txBox="1"/>
+          <p:nvPr/>
+        </p:nvSpPr>
+        <p:spPr>
+          <a:xfrm>
+            <a:off x="666750" y="4467225"/>
+            <a:ext cx="3257550" cy="171450"/>
+          </a:xfrm>
+          <a:prstGeom prst="rect">
+            <a:avLst/>
+          </a:prstGeom>
+        </p:spPr>
+        <p:txBody>
+          <a:bodyPr wrap="none" lIns="0" tIns="0" rIns="0" bIns="0"/>
+          <a:lstStyle/>
+          <a:p>
+            <a:pPr>
+              <a:lnSpc>
+                <a:spcPct val="100000"/>
+              </a:lnSpc>
+            </a:pPr>
+            <a:r>
+              <a:rPr lang="zh-CN" sz="1125" b="1">
+                <a:solidFill>
+                  <a:srgbClr val="1F3A8A"/>
+                </a:solidFill>
+                <a:latin typeface="Microsoft YaHei"/>
+                <a:ea typeface="Microsoft YaHei"/>
+              </a:rPr>
+              <a:t>复杂推理</a:t>
+            </a:r>
+            <a:r>
+              <a:rPr lang="en-US" sz="1125" b="1">
+                <a:solidFill>
+                  <a:srgbClr val="1F3A8A"/>
+                </a:solidFill>
+                <a:latin typeface="Microsoft YaHei"/>
+                <a:ea typeface="Microsoft YaHei"/>
+              </a:rPr>
+              <a:t> / </a:t>
+            </a:r>
+            <a:r>
+              <a:rPr lang="zh-CN" sz="1125" b="1">
+                <a:solidFill>
+                  <a:srgbClr val="1F3A8A"/>
+                </a:solidFill>
+                <a:latin typeface="Microsoft YaHei"/>
+                <a:ea typeface="Microsoft YaHei"/>
+              </a:rPr>
+              <a:t>编码</a:t>
+            </a:r>
+            <a:endParaRPr/>
+          </a:p>
+        </p:txBody>
+      </p:sp>
+      <p:sp>
+        <p:nvSpPr>
+          <p:cNvPr id="438" name="矩形: 圆角 437"/>
+          <p:cNvSpPr/>
+          <p:nvPr/>
+        </p:nvSpPr>
+        <p:spPr>
+          <a:xfrm>
+            <a:off x="3924300" y="4438650"/>
+            <a:ext cx="2171700" cy="228600"/>
+          </a:xfrm>
+          <a:prstGeom prst="roundRect">
+            <a:avLst>
+              <a:gd name="adj" fmla="val 66667"/>
+            </a:avLst>
+          </a:prstGeom>
+          <a:solidFill>
+            <a:srgbClr val="F59E0B"/>
+          </a:solidFill>
+          <a:ln/>
+        </p:spPr>
+        <p:txBody>
+          <a:bodyPr/>
+          <a:lstStyle/>
+          <a:p>
+            <a:endParaRPr/>
+          </a:p>
+        </p:txBody>
+      </p:sp>
+      <p:sp>
+        <p:nvSpPr>
+          <p:cNvPr id="439" name="文本框 438" descr="{&quot;isTemplate&quot;:true,&quot;type&quot;:&quot;text&quot;}"/>
+          <p:cNvSpPr txBox="1"/>
+          <p:nvPr/>
+        </p:nvSpPr>
+        <p:spPr>
+          <a:xfrm>
+            <a:off x="4057650" y="4476750"/>
+            <a:ext cx="1905000" cy="152400"/>
+          </a:xfrm>
+          <a:prstGeom prst="rect">
+            <a:avLst/>
+          </a:prstGeom>
+        </p:spPr>
+        <p:txBody>
+          <a:bodyPr wrap="none" lIns="0" tIns="0" rIns="0" bIns="0"/>
+          <a:lstStyle/>
+          <a:p>
+            <a:pPr>
+              <a:lnSpc>
+                <a:spcPct val="100000"/>
+              </a:lnSpc>
+            </a:pPr>
+            <a:r>
+              <a:rPr lang="zh-CN" sz="975" b="1">
+                <a:solidFill>
+                  <a:srgbClr val="FFFFFF"/>
+                </a:solidFill>
+                <a:latin typeface="Microsoft YaHei"/>
+                <a:ea typeface="Microsoft YaHei"/>
+              </a:rPr>
+              <a:t>视情况</a:t>
+            </a:r>
+            <a:endParaRPr/>
+          </a:p>
+        </p:txBody>
+      </p:sp>
+      <p:sp>
+        <p:nvSpPr>
+          <p:cNvPr id="440" name="文本框 439" descr="{&quot;isTemplate&quot;:true,&quot;type&quot;:&quot;text&quot;}"/>
+          <p:cNvSpPr txBox="1"/>
+          <p:nvPr/>
+        </p:nvSpPr>
+        <p:spPr>
+          <a:xfrm>
+            <a:off x="6096000" y="4476750"/>
+            <a:ext cx="5429250" cy="161925"/>
+          </a:xfrm>
+          <a:prstGeom prst="rect">
+            <a:avLst/>
+          </a:prstGeom>
+        </p:spPr>
+        <p:txBody>
+          <a:bodyPr wrap="none" lIns="0" tIns="0" rIns="0" bIns="0"/>
+          <a:lstStyle/>
+          <a:p>
+            <a:pPr>
+              <a:lnSpc>
+                <a:spcPct val="100000"/>
+              </a:lnSpc>
+            </a:pPr>
+            <a:r>
+              <a:rPr lang="zh-CN" sz="1050">
+                <a:solidFill>
+                  <a:srgbClr val="475569"/>
+                </a:solidFill>
+                <a:latin typeface="Microsoft YaHei"/>
+                <a:ea typeface="Microsoft YaHei"/>
+              </a:rPr>
+              <a:t>取决于成本与隐私</a:t>
+            </a:r>
+            <a:endParaRPr/>
+          </a:p>
+        </p:txBody>
+      </p:sp>
+      <p:sp>
+        <p:nvSpPr>
+          <p:cNvPr id="441" name="文本框 440" descr="{&quot;isTemplate&quot;:true,&quot;type&quot;:&quot;text&quot;}"/>
+          <p:cNvSpPr txBox="1"/>
+          <p:nvPr/>
+        </p:nvSpPr>
+        <p:spPr>
+          <a:xfrm>
+            <a:off x="476250" y="6153150"/>
+            <a:ext cx="11239500" cy="228600"/>
+          </a:xfrm>
+          <a:prstGeom prst="rect">
+            <a:avLst/>
+          </a:prstGeom>
+        </p:spPr>
+        <p:txBody>
+          <a:bodyPr wrap="none" lIns="0" tIns="0" rIns="0" bIns="0"/>
+          <a:lstStyle/>
+          <a:p>
+            <a:pPr algn="ctr">
+              <a:lnSpc>
+                <a:spcPct val="100000"/>
+              </a:lnSpc>
+            </a:pPr>
+            <a:r>
+              <a:rPr lang="zh-CN" sz="1500" b="1">
+                <a:solidFill>
+                  <a:srgbClr val="0EA5E9"/>
+                </a:solidFill>
+                <a:latin typeface="Microsoft YaHei"/>
+                <a:ea typeface="Microsoft YaHei"/>
+              </a:rPr>
+              <a:t>敏感度决定部署位置，不是能力决定</a:t>
+            </a:r>
+            <a:endParaRPr/>
+          </a:p>
+        </p:txBody>
+      </p:sp>
+    </p:spTree>
+  </p:cSld>
+  <p:clrMapOvr>
+    <a:masterClrMapping/>
+  </p:clrMapOvr>
+</p:sld>
+</file>
+
+<file path=ppt/slides/slide12.xml><?xml version="1.0" encoding="utf-8"?>
 <p:sld xmlns:a="http://schemas.openxmlformats.org/drawingml/2006/main" xmlns:r="http://schemas.openxmlformats.org/officeDocument/2006/relationships" xmlns:p="http://schemas.openxmlformats.org/presentationml/2006/main">
   <p:cSld>
     <p:spTree>
@@ -2285,7 +4096,7 @@
 </p:sld>
 </file>
 
-<file path=ppt/slides/slide11.xml><?xml version="1.0" encoding="utf-8"?>
+<file path=ppt/slides/slide13.xml><?xml version="1.0" encoding="utf-8"?>
 <p:sld xmlns:a="http://schemas.openxmlformats.org/drawingml/2006/main" xmlns:r="http://schemas.openxmlformats.org/officeDocument/2006/relationships" xmlns:p="http://schemas.openxmlformats.org/presentationml/2006/main">
   <p:cSld>
     <p:spTree>
@@ -3788,12 +5599,12 @@
 </p:sld>
 </file>
 
-<file path=ppt/slides/slide12.xml><?xml version="1.0" encoding="utf-8"?>
+<file path=ppt/slides/slide14.xml><?xml version="1.0" encoding="utf-8"?>
 <p:sld xmlns:a="http://schemas.openxmlformats.org/drawingml/2006/main" xmlns:r="http://schemas.openxmlformats.org/officeDocument/2006/relationships" xmlns:p="http://schemas.openxmlformats.org/presentationml/2006/main">
   <p:cSld>
     <p:spTree>
       <p:nvGrpSpPr>
-        <p:cNvPr id="1" name="" descr="&lt;Slide&gt;&#10;  &lt;Box style={{&#10;    width: '100%',&#10;    height: '100%',&#10;    backgroundColor: '#1F3A8A',&#10;    padding: 80,&#10;    display: 'flex',&#10;    flexDirection: 'column',&#10;    justifyContent: 'center',&#10;    alignItems: 'center',&#10;  }}&gt;&#10;    &lt;Text style={{&#10;      fontSize: 14,&#10;      color: '#0EA5E9',&#10;      letterSpacing: 4,&#10;      marginBottom: 24,&#10;    }}&gt;&#10;      PART 05&#10;    &lt;/Text&gt;&#10;    &lt;Text style={{&#10;      fontSize: 72,&#10;      fontWeight: 'bold',&#10;      color: '#FFFFFF',&#10;      textAlign: 'center',&#10;      marginBottom: 24,&#10;    }}&gt;&#10;      企业 AI 应用落地&#10;    &lt;/Text&gt;&#10;    &lt;Box style={{&#10;      width: 80,&#10;      height: 4,&#10;      backgroundColor: '#0EA5E9',&#10;      marginBottom: 32,&#10;    }} /&gt;&#10;    &lt;Text style={{&#10;      fontSize: 20,&#10;      color: '#CBD5E1',&#10;      textAlign: 'center',&#10;      marginBottom: 40,&#10;    }}&gt;&#10;      5 个关键抓手，让网关从&quot;装上&quot;到&quot;用顺&quot;&#10;    &lt;/Text&gt;&#10;    &lt;Box style={{&#10;      display: 'flex',&#10;      flexDirection: 'row',&#10;      gap: 12,&#10;    }}&gt;&#10;      {[&#10;        '① 环境部署',&#10;        '② 管理大模型',&#10;        '③ 人员 SK 分配',&#10;        '④ CC Switch 集成',&#10;        '⑤ 用量管控',&#10;      ].map((label, i) =&gt; (&#10;        &lt;Box key={i} style={{&#10;          backgroundColor: 'rgba(14, 165, 233, 0.15)',&#10;          border: '1px solid #0EA5E9',&#10;          padding: '8px 16px',&#10;          borderRadius: 20,&#10;        }}&gt;&#10;          &lt;Text style={{ fontSize: 14, color: '#FFFFFF' }}&gt;{label}&lt;/Text&gt;&#10;        &lt;/Box&gt;&#10;      ))}&#10;    &lt;/Box&gt;&#10;  &lt;/Box&gt;&#10;&lt;/Slide&gt;"/>
+        <p:cNvPr id="1" name="" descr="&lt;Slide&gt;&#10;  &lt;Box style={{&#10;    width: '100%',&#10;    height: '100%',&#10;    backgroundColor: '#1F3A8A',&#10;    padding: 80,&#10;    display: 'flex',&#10;    flexDirection: 'column',&#10;    justifyContent: 'center',&#10;    alignItems: 'center',&#10;  }}&gt;&#10;    &lt;Text style={{&#10;      fontSize: 14,&#10;      color: '#0EA5E9',&#10;      letterSpacing: 4,&#10;      marginBottom: 24,&#10;    }}&gt;&#10;      PART 04&#10;    &lt;/Text&gt;&#10;    &lt;Text style={{&#10;      fontSize: 72,&#10;      fontWeight: 'bold',&#10;      color: '#FFFFFF',&#10;      textAlign: 'center',&#10;      marginBottom: 24,&#10;    }}&gt;&#10;      企业 AI 应用落地&#10;    &lt;/Text&gt;&#10;    &lt;Box style={{&#10;      width: 80,&#10;      height: 4,&#10;      backgroundColor: '#0EA5E9',&#10;      marginBottom: 32,&#10;    }} /&gt;&#10;    &lt;Text style={{&#10;      fontSize: 20,&#10;      color: '#CBD5E1',&#10;      textAlign: 'center',&#10;      marginBottom: 40,&#10;    }}&gt;&#10;      5 个关键抓手，让网关从&quot;装上&quot;到&quot;用顺&quot;&#10;    &lt;/Text&gt;&#10;    &lt;Box style={{&#10;      display: 'flex',&#10;      flexDirection: 'row',&#10;      gap: 12,&#10;    }}&gt;&#10;      {[&#10;        '① 环境部署',&#10;        '② 管理大模型',&#10;        '③ 人员 SK 分配',&#10;        '④ CC Switch 集成',&#10;        '⑤ 用量管控',&#10;      ].map((label, i) =&gt; (&#10;        &lt;Box key={i} style={{&#10;          backgroundColor: 'rgba(14, 165, 233, 0.15)',&#10;          border: '1px solid #0EA5E9',&#10;          padding: '8px 16px',&#10;          borderRadius: 20,&#10;        }}&gt;&#10;          &lt;Text style={{ fontSize: 14, color: '#FFFFFF' }}&gt;{label}&lt;/Text&gt;&#10;        &lt;/Box&gt;&#10;      ))}&#10;    &lt;/Box&gt;&#10;  &lt;/Box&gt;&#10;&lt;/Slide&gt;"/>
         <p:cNvGrpSpPr/>
         <p:nvPr/>
       </p:nvGrpSpPr>
@@ -3864,7 +5675,7 @@
                 <a:latin typeface="Microsoft YaHei"/>
                 <a:ea typeface="Microsoft YaHei"/>
               </a:rPr>
-              <a:t>PART 05</a:t>
+              <a:t>PART 04</a:t>
             </a:r>
             <a:endParaRPr/>
           </a:p>
@@ -4521,7 +6332,7 @@
 </p:sld>
 </file>
 
-<file path=ppt/slides/slide13.xml><?xml version="1.0" encoding="utf-8"?>
+<file path=ppt/slides/slide15.xml><?xml version="1.0" encoding="utf-8"?>
 <p:sld xmlns:a="http://schemas.openxmlformats.org/drawingml/2006/main" xmlns:r="http://schemas.openxmlformats.org/officeDocument/2006/relationships" xmlns:p="http://schemas.openxmlformats.org/presentationml/2006/main">
   <p:cSld>
     <p:spTree>
@@ -5582,7 +7393,7 @@
 </p:sld>
 </file>
 
-<file path=ppt/slides/slide14.xml><?xml version="1.0" encoding="utf-8"?>
+<file path=ppt/slides/slide16.xml><?xml version="1.0" encoding="utf-8"?>
 <p:sld xmlns:a="http://schemas.openxmlformats.org/drawingml/2006/main" xmlns:r="http://schemas.openxmlformats.org/officeDocument/2006/relationships" xmlns:p="http://schemas.openxmlformats.org/presentationml/2006/main">
   <p:cSld>
     <p:spTree>
@@ -6841,7 +8652,7 @@
 </p:sld>
 </file>
 
-<file path=ppt/slides/slide15.xml><?xml version="1.0" encoding="utf-8"?>
+<file path=ppt/slides/slide17.xml><?xml version="1.0" encoding="utf-8"?>
 <p:sld xmlns:a="http://schemas.openxmlformats.org/drawingml/2006/main" xmlns:r="http://schemas.openxmlformats.org/officeDocument/2006/relationships" xmlns:p="http://schemas.openxmlformats.org/presentationml/2006/main">
   <p:cSld>
     <p:spTree>
@@ -8351,7 +10162,7 @@
 </p:sld>
 </file>
 
-<file path=ppt/slides/slide16.xml><?xml version="1.0" encoding="utf-8"?>
+<file path=ppt/slides/slide18.xml><?xml version="1.0" encoding="utf-8"?>
 <p:sld xmlns:a="http://schemas.openxmlformats.org/drawingml/2006/main" xmlns:r="http://schemas.openxmlformats.org/officeDocument/2006/relationships" xmlns:p="http://schemas.openxmlformats.org/presentationml/2006/main">
   <p:cSld>
     <p:spTree>
@@ -9846,7 +11657,7 @@
 </p:sld>
 </file>
 
-<file path=ppt/slides/slide17.xml><?xml version="1.0" encoding="utf-8"?>
+<file path=ppt/slides/slide19.xml><?xml version="1.0" encoding="utf-8"?>
 <p:sld xmlns:a="http://schemas.openxmlformats.org/drawingml/2006/main" xmlns:r="http://schemas.openxmlformats.org/officeDocument/2006/relationships" xmlns:p="http://schemas.openxmlformats.org/presentationml/2006/main">
   <p:cSld>
     <p:spTree>
@@ -11163,7 +12974,1053 @@
 </p:sld>
 </file>
 
-<file path=ppt/slides/slide18.xml><?xml version="1.0" encoding="utf-8"?>
+<file path=ppt/slides/slide2.xml><?xml version="1.0" encoding="utf-8"?>
+<p:sld xmlns:a="http://schemas.openxmlformats.org/drawingml/2006/main" xmlns:r="http://schemas.openxmlformats.org/officeDocument/2006/relationships" xmlns:p="http://schemas.openxmlformats.org/presentationml/2006/main">
+  <p:cSld>
+    <p:spTree>
+      <p:nvGrpSpPr>
+        <p:cNvPr id="1" name="" descr="&lt;Slide&gt;&#10;  &lt;Box style={{&#10;    width: '100%',&#10;    height: '100%',&#10;    backgroundColor: '#FFFFFF',&#10;    padding: 50,&#10;    display: 'flex',&#10;    flexDirection: 'column',&#10;  }}&gt;&#10;    &lt;Text style={{&#10;      fontSize: 32,&#10;      fontWeight: 'bold',&#10;      color: '#1F3A8A',&#10;      marginBottom: 4,&#10;    }}&gt;&#10;      目录&#10;    &lt;/Text&gt;&#10;    &lt;Text style={{&#10;      fontSize: 14,&#10;      color: '#94A3B8',&#10;      marginBottom: 24,&#10;      letterSpacing: 2,&#10;    }}&gt;&#10;      CONTENTS&#10;    &lt;/Text&gt;&#10;&#10;    &lt;Box style={{&#10;      display: 'flex',&#10;      flexDirection: 'column',&#10;      gap: 12,&#10;    }}&gt;&#10;      {[&#10;        { num: '01', title: '背景：为什么需要&quot;总闸门&quot;', desc: '企业用大模型的三个扎心现状' },&#10;        { num: '02', title: '定位：自用网关，不卖算力', desc: '明确边界与项目价值定位' },&#10;        { num: '03', title: '项目与架构：llm-proxy-tk 一览', desc: '是什么、长什么样、能干什么' },&#10;        { num: '04', title: '企业 AI 应用场景', desc: '内网-自有大模型 vs 外网-云端大模型' },&#10;        { num: '05', title: '企业 AI 应用落地', desc: '5 个关键抓手，让网关从&quot;装上&quot;到&quot;用顺&quot;' },&#10;        { num: '06', title: '边界与展望', desc: '诚实的边界 = 可信的产品' },&#10;      ].map((item, idx) =&gt; (&#10;        &lt;Box key={idx} style={{&#10;          display: 'flex',&#10;          flexDirection: 'row',&#10;          alignItems: 'center',&#10;          padding: '8px 16px',&#10;          backgroundColor: '#F8FAFC',&#10;          borderRadius: 8,&#10;        }}&gt;&#10;          &lt;Text style={{&#10;            fontSize: 24,&#10;            fontWeight: 'bold',&#10;            color: '#0EA5E9',&#10;            width: 70,&#10;          }}&gt;&#10;            {item.num}&#10;          &lt;/Text&gt;&#10;          &lt;Box style={{ flex: 1 }}&gt;&#10;            &lt;Text style={{&#10;              fontSize: 19,&#10;              fontWeight: 'bold',&#10;              color: '#1F3A8A',&#10;              marginBottom: 2,&#10;            }}&gt;&#10;              {item.title}&#10;            &lt;/Text&gt;&#10;            &lt;Text style={{ fontSize: 13, color: '#64748B' }}&gt;&#10;              {item.desc}&#10;            &lt;/Text&gt;&#10;          &lt;/Box&gt;&#10;        &lt;/Box&gt;&#10;      ))}&#10;    &lt;/Box&gt;&#10;  &lt;/Box&gt;&#10;&lt;/Slide&gt;"/>
+        <p:cNvGrpSpPr/>
+        <p:nvPr/>
+      </p:nvGrpSpPr>
+      <p:grpSpPr>
+        <a:xfrm>
+          <a:off x="0" y="0"/>
+          <a:ext cx="0" cy="0"/>
+          <a:chOff x="0" y="0"/>
+          <a:chExt cx="0" cy="0"/>
+        </a:xfrm>
+      </p:grpSpPr>
+      <p:sp>
+        <p:nvSpPr>
+          <p:cNvPr id="264" name="矩形 263"/>
+          <p:cNvSpPr/>
+          <p:nvPr/>
+        </p:nvSpPr>
+        <p:spPr>
+          <a:xfrm>
+            <a:off x="0" y="0"/>
+            <a:ext cx="12192000" cy="6858000"/>
+          </a:xfrm>
+          <a:prstGeom prst="rect">
+            <a:avLst/>
+          </a:prstGeom>
+          <a:solidFill>
+            <a:srgbClr val="FFFFFF"/>
+          </a:solidFill>
+          <a:ln/>
+        </p:spPr>
+        <p:txBody>
+          <a:bodyPr/>
+          <a:lstStyle/>
+          <a:p>
+            <a:endParaRPr/>
+          </a:p>
+        </p:txBody>
+      </p:sp>
+      <p:sp>
+        <p:nvSpPr>
+          <p:cNvPr id="265" name="文本框 264" descr="{&quot;isTemplate&quot;:true,&quot;type&quot;:&quot;text&quot;}"/>
+          <p:cNvSpPr txBox="1"/>
+          <p:nvPr/>
+        </p:nvSpPr>
+        <p:spPr>
+          <a:xfrm>
+            <a:off x="476250" y="476250"/>
+            <a:ext cx="11239500" cy="371475"/>
+          </a:xfrm>
+          <a:prstGeom prst="rect">
+            <a:avLst/>
+          </a:prstGeom>
+        </p:spPr>
+        <p:txBody>
+          <a:bodyPr wrap="none" lIns="0" tIns="0" rIns="0" bIns="0"/>
+          <a:lstStyle/>
+          <a:p>
+            <a:pPr>
+              <a:lnSpc>
+                <a:spcPct val="100000"/>
+              </a:lnSpc>
+            </a:pPr>
+            <a:r>
+              <a:rPr lang="zh-CN" sz="2400" b="1">
+                <a:solidFill>
+                  <a:srgbClr val="1F3A8A"/>
+                </a:solidFill>
+                <a:latin typeface="Microsoft YaHei"/>
+                <a:ea typeface="Microsoft YaHei"/>
+              </a:rPr>
+              <a:t>目录</a:t>
+            </a:r>
+            <a:endParaRPr/>
+          </a:p>
+        </p:txBody>
+      </p:sp>
+      <p:sp>
+        <p:nvSpPr>
+          <p:cNvPr id="266" name="文本框 265" descr="{&quot;isTemplate&quot;:true,&quot;type&quot;:&quot;text&quot;}"/>
+          <p:cNvSpPr txBox="1"/>
+          <p:nvPr/>
+        </p:nvSpPr>
+        <p:spPr>
+          <a:xfrm>
+            <a:off x="476250" y="885825"/>
+            <a:ext cx="11239500" cy="161925"/>
+          </a:xfrm>
+          <a:prstGeom prst="rect">
+            <a:avLst/>
+          </a:prstGeom>
+        </p:spPr>
+        <p:txBody>
+          <a:bodyPr wrap="none" lIns="0" tIns="0" rIns="0" bIns="0"/>
+          <a:lstStyle/>
+          <a:p>
+            <a:pPr>
+              <a:lnSpc>
+                <a:spcPct val="100000"/>
+              </a:lnSpc>
+            </a:pPr>
+            <a:r>
+              <a:rPr lang="en-US" sz="1050" spc="150">
+                <a:solidFill>
+                  <a:srgbClr val="94A3B8"/>
+                </a:solidFill>
+                <a:latin typeface="Microsoft YaHei"/>
+                <a:ea typeface="Microsoft YaHei"/>
+              </a:rPr>
+              <a:t>CONTENTS</a:t>
+            </a:r>
+            <a:endParaRPr/>
+          </a:p>
+        </p:txBody>
+      </p:sp>
+      <p:sp>
+        <p:nvSpPr>
+          <p:cNvPr id="267" name="矩形: 圆角 266"/>
+          <p:cNvSpPr/>
+          <p:nvPr/>
+        </p:nvSpPr>
+        <p:spPr>
+          <a:xfrm>
+            <a:off x="476250" y="1276350"/>
+            <a:ext cx="11239500" cy="542925"/>
+          </a:xfrm>
+          <a:prstGeom prst="roundRect">
+            <a:avLst>
+              <a:gd name="adj" fmla="val 14035"/>
+            </a:avLst>
+          </a:prstGeom>
+          <a:solidFill>
+            <a:srgbClr val="F8FAFC"/>
+          </a:solidFill>
+          <a:ln/>
+        </p:spPr>
+        <p:txBody>
+          <a:bodyPr/>
+          <a:lstStyle/>
+          <a:p>
+            <a:endParaRPr/>
+          </a:p>
+        </p:txBody>
+      </p:sp>
+      <p:sp>
+        <p:nvSpPr>
+          <p:cNvPr id="268" name="文本框 267" descr="{&quot;isTemplate&quot;:true,&quot;type&quot;:&quot;text&quot;}"/>
+          <p:cNvSpPr txBox="1"/>
+          <p:nvPr/>
+        </p:nvSpPr>
+        <p:spPr>
+          <a:xfrm>
+            <a:off x="628650" y="1409700"/>
+            <a:ext cx="666750" cy="276225"/>
+          </a:xfrm>
+          <a:prstGeom prst="rect">
+            <a:avLst/>
+          </a:prstGeom>
+        </p:spPr>
+        <p:txBody>
+          <a:bodyPr wrap="none" lIns="0" tIns="0" rIns="0" bIns="0"/>
+          <a:lstStyle/>
+          <a:p>
+            <a:pPr>
+              <a:lnSpc>
+                <a:spcPct val="100000"/>
+              </a:lnSpc>
+            </a:pPr>
+            <a:r>
+              <a:rPr lang="en-US" sz="1800" b="1">
+                <a:solidFill>
+                  <a:srgbClr val="0EA5E9"/>
+                </a:solidFill>
+                <a:latin typeface="Microsoft YaHei"/>
+                <a:ea typeface="Microsoft YaHei"/>
+              </a:rPr>
+              <a:t>01</a:t>
+            </a:r>
+            <a:endParaRPr/>
+          </a:p>
+        </p:txBody>
+      </p:sp>
+      <p:sp>
+        <p:nvSpPr>
+          <p:cNvPr id="269" name="文本框 268" descr="{&quot;isTemplate&quot;:true,&quot;type&quot;:&quot;text&quot;}"/>
+          <p:cNvSpPr txBox="1"/>
+          <p:nvPr/>
+        </p:nvSpPr>
+        <p:spPr>
+          <a:xfrm>
+            <a:off x="1295400" y="1352550"/>
+            <a:ext cx="10267950" cy="219075"/>
+          </a:xfrm>
+          <a:prstGeom prst="rect">
+            <a:avLst/>
+          </a:prstGeom>
+        </p:spPr>
+        <p:txBody>
+          <a:bodyPr wrap="none" lIns="0" tIns="0" rIns="0" bIns="0"/>
+          <a:lstStyle/>
+          <a:p>
+            <a:pPr>
+              <a:lnSpc>
+                <a:spcPct val="100000"/>
+              </a:lnSpc>
+            </a:pPr>
+            <a:r>
+              <a:rPr lang="zh-CN" sz="1425" b="1">
+                <a:solidFill>
+                  <a:srgbClr val="1F3A8A"/>
+                </a:solidFill>
+                <a:latin typeface="Microsoft YaHei"/>
+                <a:ea typeface="Microsoft YaHei"/>
+              </a:rPr>
+              <a:t>背景与定位</a:t>
+            </a:r>
+            <a:endParaRPr/>
+          </a:p>
+        </p:txBody>
+      </p:sp>
+      <p:sp>
+        <p:nvSpPr>
+          <p:cNvPr id="270" name="文本框 269" descr="{&quot;isTemplate&quot;:true,&quot;type&quot;:&quot;text&quot;}"/>
+          <p:cNvSpPr txBox="1"/>
+          <p:nvPr/>
+        </p:nvSpPr>
+        <p:spPr>
+          <a:xfrm>
+            <a:off x="1295400" y="1590675"/>
+            <a:ext cx="10267950" cy="152400"/>
+          </a:xfrm>
+          <a:prstGeom prst="rect">
+            <a:avLst/>
+          </a:prstGeom>
+        </p:spPr>
+        <p:txBody>
+          <a:bodyPr wrap="none" lIns="0" tIns="0" rIns="0" bIns="0"/>
+          <a:lstStyle/>
+          <a:p>
+            <a:pPr>
+              <a:lnSpc>
+                <a:spcPct val="100000"/>
+              </a:lnSpc>
+            </a:pPr>
+            <a:r>
+              <a:rPr lang="zh-CN" sz="975">
+                <a:solidFill>
+                  <a:srgbClr val="64748B"/>
+                </a:solidFill>
+                <a:latin typeface="Microsoft YaHei"/>
+                <a:ea typeface="Microsoft YaHei"/>
+              </a:rPr>
+              <a:t>三个"裸奔"现状 · 自用网关，不卖算力</a:t>
+            </a:r>
+            <a:endParaRPr/>
+          </a:p>
+        </p:txBody>
+      </p:sp>
+      <p:sp>
+        <p:nvSpPr>
+          <p:cNvPr id="271" name="矩形: 圆角 270"/>
+          <p:cNvSpPr/>
+          <p:nvPr/>
+        </p:nvSpPr>
+        <p:spPr>
+          <a:xfrm>
+            <a:off x="476250" y="1933575"/>
+            <a:ext cx="11239500" cy="542925"/>
+          </a:xfrm>
+          <a:prstGeom prst="roundRect">
+            <a:avLst>
+              <a:gd name="adj" fmla="val 14035"/>
+            </a:avLst>
+          </a:prstGeom>
+          <a:solidFill>
+            <a:srgbClr val="F8FAFC"/>
+          </a:solidFill>
+          <a:ln/>
+        </p:spPr>
+        <p:txBody>
+          <a:bodyPr/>
+          <a:lstStyle/>
+          <a:p>
+            <a:endParaRPr/>
+          </a:p>
+        </p:txBody>
+      </p:sp>
+      <p:sp>
+        <p:nvSpPr>
+          <p:cNvPr id="272" name="文本框 271" descr="{&quot;isTemplate&quot;:true,&quot;type&quot;:&quot;text&quot;}"/>
+          <p:cNvSpPr txBox="1"/>
+          <p:nvPr/>
+        </p:nvSpPr>
+        <p:spPr>
+          <a:xfrm>
+            <a:off x="628650" y="2066925"/>
+            <a:ext cx="666750" cy="276225"/>
+          </a:xfrm>
+          <a:prstGeom prst="rect">
+            <a:avLst/>
+          </a:prstGeom>
+        </p:spPr>
+        <p:txBody>
+          <a:bodyPr wrap="none" lIns="0" tIns="0" rIns="0" bIns="0"/>
+          <a:lstStyle/>
+          <a:p>
+            <a:pPr>
+              <a:lnSpc>
+                <a:spcPct val="100000"/>
+              </a:lnSpc>
+            </a:pPr>
+            <a:r>
+              <a:rPr lang="en-US" sz="1800" b="1">
+                <a:solidFill>
+                  <a:srgbClr val="0EA5E9"/>
+                </a:solidFill>
+                <a:latin typeface="Microsoft YaHei"/>
+                <a:ea typeface="Microsoft YaHei"/>
+              </a:rPr>
+              <a:t>02</a:t>
+            </a:r>
+            <a:endParaRPr/>
+          </a:p>
+        </p:txBody>
+      </p:sp>
+      <p:sp>
+        <p:nvSpPr>
+          <p:cNvPr id="273" name="文本框 272" descr="{&quot;isTemplate&quot;:true,&quot;type&quot;:&quot;text&quot;}"/>
+          <p:cNvSpPr txBox="1"/>
+          <p:nvPr/>
+        </p:nvSpPr>
+        <p:spPr>
+          <a:xfrm>
+            <a:off x="1295400" y="2009775"/>
+            <a:ext cx="10267950" cy="219075"/>
+          </a:xfrm>
+          <a:prstGeom prst="rect">
+            <a:avLst/>
+          </a:prstGeom>
+        </p:spPr>
+        <p:txBody>
+          <a:bodyPr wrap="none" lIns="0" tIns="0" rIns="0" bIns="0"/>
+          <a:lstStyle/>
+          <a:p>
+            <a:pPr>
+              <a:lnSpc>
+                <a:spcPct val="100000"/>
+              </a:lnSpc>
+            </a:pPr>
+            <a:r>
+              <a:rPr lang="zh-CN" sz="1425" b="1" dirty="0">
+                <a:solidFill>
+                  <a:srgbClr val="1F3A8A"/>
+                </a:solidFill>
+                <a:latin typeface="Microsoft YaHei"/>
+                <a:ea typeface="Microsoft YaHei"/>
+              </a:rPr>
+              <a:t>项目与</a:t>
+            </a:r>
+            <a:r>
+              <a:rPr lang="zh-CN" altLang="en-US" sz="1425" b="1" dirty="0">
+                <a:solidFill>
+                  <a:srgbClr val="1F3A8A"/>
+                </a:solidFill>
+                <a:latin typeface="Microsoft YaHei"/>
+                <a:ea typeface="Microsoft YaHei"/>
+              </a:rPr>
+              <a:t>架构</a:t>
+            </a:r>
+            <a:endParaRPr dirty="0"/>
+          </a:p>
+        </p:txBody>
+      </p:sp>
+      <p:sp>
+        <p:nvSpPr>
+          <p:cNvPr id="274" name="文本框 273" descr="{&quot;isTemplate&quot;:true,&quot;type&quot;:&quot;text&quot;}"/>
+          <p:cNvSpPr txBox="1"/>
+          <p:nvPr/>
+        </p:nvSpPr>
+        <p:spPr>
+          <a:xfrm>
+            <a:off x="1295400" y="2247900"/>
+            <a:ext cx="10267950" cy="152400"/>
+          </a:xfrm>
+          <a:prstGeom prst="rect">
+            <a:avLst/>
+          </a:prstGeom>
+        </p:spPr>
+        <p:txBody>
+          <a:bodyPr wrap="none" lIns="0" tIns="0" rIns="0" bIns="0"/>
+          <a:lstStyle/>
+          <a:p>
+            <a:pPr>
+              <a:lnSpc>
+                <a:spcPct val="100000"/>
+              </a:lnSpc>
+            </a:pPr>
+            <a:r>
+              <a:rPr lang="zh-CN" sz="975">
+                <a:solidFill>
+                  <a:srgbClr val="64748B"/>
+                </a:solidFill>
+                <a:latin typeface="Microsoft YaHei"/>
+                <a:ea typeface="Microsoft YaHei"/>
+              </a:rPr>
+              <a:t>是什么 · 长什么样 · 能干什么</a:t>
+            </a:r>
+            <a:endParaRPr/>
+          </a:p>
+        </p:txBody>
+      </p:sp>
+      <p:sp>
+        <p:nvSpPr>
+          <p:cNvPr id="275" name="矩形: 圆角 274"/>
+          <p:cNvSpPr/>
+          <p:nvPr/>
+        </p:nvSpPr>
+        <p:spPr>
+          <a:xfrm>
+            <a:off x="476250" y="2590800"/>
+            <a:ext cx="11239500" cy="542925"/>
+          </a:xfrm>
+          <a:prstGeom prst="roundRect">
+            <a:avLst>
+              <a:gd name="adj" fmla="val 14035"/>
+            </a:avLst>
+          </a:prstGeom>
+          <a:solidFill>
+            <a:srgbClr val="F8FAFC"/>
+          </a:solidFill>
+          <a:ln/>
+        </p:spPr>
+        <p:txBody>
+          <a:bodyPr/>
+          <a:lstStyle/>
+          <a:p>
+            <a:endParaRPr/>
+          </a:p>
+        </p:txBody>
+      </p:sp>
+      <p:sp>
+        <p:nvSpPr>
+          <p:cNvPr id="276" name="文本框 275" descr="{&quot;isTemplate&quot;:true,&quot;type&quot;:&quot;text&quot;}"/>
+          <p:cNvSpPr txBox="1"/>
+          <p:nvPr/>
+        </p:nvSpPr>
+        <p:spPr>
+          <a:xfrm>
+            <a:off x="628650" y="2724150"/>
+            <a:ext cx="666750" cy="276225"/>
+          </a:xfrm>
+          <a:prstGeom prst="rect">
+            <a:avLst/>
+          </a:prstGeom>
+        </p:spPr>
+        <p:txBody>
+          <a:bodyPr wrap="none" lIns="0" tIns="0" rIns="0" bIns="0"/>
+          <a:lstStyle/>
+          <a:p>
+            <a:pPr>
+              <a:lnSpc>
+                <a:spcPct val="100000"/>
+              </a:lnSpc>
+            </a:pPr>
+            <a:r>
+              <a:rPr lang="en-US" sz="1800" b="1">
+                <a:solidFill>
+                  <a:srgbClr val="0EA5E9"/>
+                </a:solidFill>
+                <a:latin typeface="Microsoft YaHei"/>
+                <a:ea typeface="Microsoft YaHei"/>
+              </a:rPr>
+              <a:t>03</a:t>
+            </a:r>
+            <a:endParaRPr/>
+          </a:p>
+        </p:txBody>
+      </p:sp>
+      <p:sp>
+        <p:nvSpPr>
+          <p:cNvPr id="277" name="文本框 276" descr="{&quot;isTemplate&quot;:true,&quot;type&quot;:&quot;text&quot;}"/>
+          <p:cNvSpPr txBox="1"/>
+          <p:nvPr/>
+        </p:nvSpPr>
+        <p:spPr>
+          <a:xfrm>
+            <a:off x="1295400" y="2667000"/>
+            <a:ext cx="10267950" cy="219075"/>
+          </a:xfrm>
+          <a:prstGeom prst="rect">
+            <a:avLst/>
+          </a:prstGeom>
+        </p:spPr>
+        <p:txBody>
+          <a:bodyPr wrap="none" lIns="0" tIns="0" rIns="0" bIns="0"/>
+          <a:lstStyle/>
+          <a:p>
+            <a:pPr>
+              <a:lnSpc>
+                <a:spcPct val="100000"/>
+              </a:lnSpc>
+            </a:pPr>
+            <a:r>
+              <a:rPr lang="zh-CN" sz="1425" b="1">
+                <a:solidFill>
+                  <a:srgbClr val="1F3A8A"/>
+                </a:solidFill>
+                <a:latin typeface="Microsoft YaHei"/>
+                <a:ea typeface="Microsoft YaHei"/>
+              </a:rPr>
+              <a:t>企业 AI 应用场景</a:t>
+            </a:r>
+            <a:endParaRPr/>
+          </a:p>
+        </p:txBody>
+      </p:sp>
+      <p:sp>
+        <p:nvSpPr>
+          <p:cNvPr id="278" name="文本框 277" descr="{&quot;isTemplate&quot;:true,&quot;type&quot;:&quot;text&quot;}"/>
+          <p:cNvSpPr txBox="1"/>
+          <p:nvPr/>
+        </p:nvSpPr>
+        <p:spPr>
+          <a:xfrm>
+            <a:off x="1295400" y="2905125"/>
+            <a:ext cx="10267950" cy="152400"/>
+          </a:xfrm>
+          <a:prstGeom prst="rect">
+            <a:avLst/>
+          </a:prstGeom>
+        </p:spPr>
+        <p:txBody>
+          <a:bodyPr wrap="none" lIns="0" tIns="0" rIns="0" bIns="0"/>
+          <a:lstStyle/>
+          <a:p>
+            <a:pPr>
+              <a:lnSpc>
+                <a:spcPct val="100000"/>
+              </a:lnSpc>
+            </a:pPr>
+            <a:r>
+              <a:rPr lang="zh-CN" sz="975">
+                <a:solidFill>
+                  <a:srgbClr val="64748B"/>
+                </a:solidFill>
+                <a:latin typeface="Microsoft YaHei"/>
+                <a:ea typeface="Microsoft YaHei"/>
+              </a:rPr>
+              <a:t>内网-自有大模型 vs 外网-云端大模型</a:t>
+            </a:r>
+            <a:endParaRPr/>
+          </a:p>
+        </p:txBody>
+      </p:sp>
+      <p:sp>
+        <p:nvSpPr>
+          <p:cNvPr id="279" name="矩形: 圆角 278"/>
+          <p:cNvSpPr/>
+          <p:nvPr/>
+        </p:nvSpPr>
+        <p:spPr>
+          <a:xfrm>
+            <a:off x="476250" y="3248025"/>
+            <a:ext cx="11239500" cy="542925"/>
+          </a:xfrm>
+          <a:prstGeom prst="roundRect">
+            <a:avLst>
+              <a:gd name="adj" fmla="val 14035"/>
+            </a:avLst>
+          </a:prstGeom>
+          <a:solidFill>
+            <a:srgbClr val="F8FAFC"/>
+          </a:solidFill>
+          <a:ln/>
+        </p:spPr>
+        <p:txBody>
+          <a:bodyPr/>
+          <a:lstStyle/>
+          <a:p>
+            <a:endParaRPr/>
+          </a:p>
+        </p:txBody>
+      </p:sp>
+      <p:sp>
+        <p:nvSpPr>
+          <p:cNvPr id="280" name="文本框 279" descr="{&quot;isTemplate&quot;:true,&quot;type&quot;:&quot;text&quot;}"/>
+          <p:cNvSpPr txBox="1"/>
+          <p:nvPr/>
+        </p:nvSpPr>
+        <p:spPr>
+          <a:xfrm>
+            <a:off x="628650" y="3381375"/>
+            <a:ext cx="666750" cy="276225"/>
+          </a:xfrm>
+          <a:prstGeom prst="rect">
+            <a:avLst/>
+          </a:prstGeom>
+        </p:spPr>
+        <p:txBody>
+          <a:bodyPr wrap="none" lIns="0" tIns="0" rIns="0" bIns="0"/>
+          <a:lstStyle/>
+          <a:p>
+            <a:pPr>
+              <a:lnSpc>
+                <a:spcPct val="100000"/>
+              </a:lnSpc>
+            </a:pPr>
+            <a:r>
+              <a:rPr lang="en-US" sz="1800" b="1">
+                <a:solidFill>
+                  <a:srgbClr val="0EA5E9"/>
+                </a:solidFill>
+                <a:latin typeface="Microsoft YaHei"/>
+                <a:ea typeface="Microsoft YaHei"/>
+              </a:rPr>
+              <a:t>04</a:t>
+            </a:r>
+            <a:endParaRPr/>
+          </a:p>
+        </p:txBody>
+      </p:sp>
+      <p:sp>
+        <p:nvSpPr>
+          <p:cNvPr id="281" name="文本框 280" descr="{&quot;isTemplate&quot;:true,&quot;type&quot;:&quot;text&quot;}"/>
+          <p:cNvSpPr txBox="1"/>
+          <p:nvPr/>
+        </p:nvSpPr>
+        <p:spPr>
+          <a:xfrm>
+            <a:off x="1295400" y="3324225"/>
+            <a:ext cx="10267950" cy="219075"/>
+          </a:xfrm>
+          <a:prstGeom prst="rect">
+            <a:avLst/>
+          </a:prstGeom>
+        </p:spPr>
+        <p:txBody>
+          <a:bodyPr wrap="none" lIns="0" tIns="0" rIns="0" bIns="0"/>
+          <a:lstStyle/>
+          <a:p>
+            <a:pPr>
+              <a:lnSpc>
+                <a:spcPct val="100000"/>
+              </a:lnSpc>
+            </a:pPr>
+            <a:r>
+              <a:rPr lang="zh-CN" sz="1425" b="1">
+                <a:solidFill>
+                  <a:srgbClr val="1F3A8A"/>
+                </a:solidFill>
+                <a:latin typeface="Microsoft YaHei"/>
+                <a:ea typeface="Microsoft YaHei"/>
+              </a:rPr>
+              <a:t>企业 AI 应用落地</a:t>
+            </a:r>
+            <a:endParaRPr/>
+          </a:p>
+        </p:txBody>
+      </p:sp>
+      <p:sp>
+        <p:nvSpPr>
+          <p:cNvPr id="282" name="文本框 281" descr="{&quot;isTemplate&quot;:true,&quot;type&quot;:&quot;text&quot;}"/>
+          <p:cNvSpPr txBox="1"/>
+          <p:nvPr/>
+        </p:nvSpPr>
+        <p:spPr>
+          <a:xfrm>
+            <a:off x="1295400" y="3562350"/>
+            <a:ext cx="10267950" cy="152400"/>
+          </a:xfrm>
+          <a:prstGeom prst="rect">
+            <a:avLst/>
+          </a:prstGeom>
+        </p:spPr>
+        <p:txBody>
+          <a:bodyPr wrap="none" lIns="0" tIns="0" rIns="0" bIns="0"/>
+          <a:lstStyle/>
+          <a:p>
+            <a:pPr>
+              <a:lnSpc>
+                <a:spcPct val="100000"/>
+              </a:lnSpc>
+            </a:pPr>
+            <a:r>
+              <a:rPr lang="zh-CN" sz="975">
+                <a:solidFill>
+                  <a:srgbClr val="64748B"/>
+                </a:solidFill>
+                <a:latin typeface="Microsoft YaHei"/>
+                <a:ea typeface="Microsoft YaHei"/>
+              </a:rPr>
+              <a:t>5 个关键抓手，让网关从"装上"到"用顺"</a:t>
+            </a:r>
+            <a:endParaRPr/>
+          </a:p>
+        </p:txBody>
+      </p:sp>
+      <p:sp>
+        <p:nvSpPr>
+          <p:cNvPr id="283" name="矩形: 圆角 282"/>
+          <p:cNvSpPr/>
+          <p:nvPr/>
+        </p:nvSpPr>
+        <p:spPr>
+          <a:xfrm>
+            <a:off x="476250" y="3905250"/>
+            <a:ext cx="11239500" cy="542925"/>
+          </a:xfrm>
+          <a:prstGeom prst="roundRect">
+            <a:avLst>
+              <a:gd name="adj" fmla="val 14035"/>
+            </a:avLst>
+          </a:prstGeom>
+          <a:solidFill>
+            <a:srgbClr val="F8FAFC"/>
+          </a:solidFill>
+          <a:ln/>
+        </p:spPr>
+        <p:txBody>
+          <a:bodyPr/>
+          <a:lstStyle/>
+          <a:p>
+            <a:endParaRPr/>
+          </a:p>
+        </p:txBody>
+      </p:sp>
+      <p:sp>
+        <p:nvSpPr>
+          <p:cNvPr id="284" name="文本框 283" descr="{&quot;isTemplate&quot;:true,&quot;type&quot;:&quot;text&quot;}"/>
+          <p:cNvSpPr txBox="1"/>
+          <p:nvPr/>
+        </p:nvSpPr>
+        <p:spPr>
+          <a:xfrm>
+            <a:off x="628650" y="4038600"/>
+            <a:ext cx="666750" cy="276225"/>
+          </a:xfrm>
+          <a:prstGeom prst="rect">
+            <a:avLst/>
+          </a:prstGeom>
+        </p:spPr>
+        <p:txBody>
+          <a:bodyPr wrap="none" lIns="0" tIns="0" rIns="0" bIns="0"/>
+          <a:lstStyle/>
+          <a:p>
+            <a:pPr>
+              <a:lnSpc>
+                <a:spcPct val="100000"/>
+              </a:lnSpc>
+            </a:pPr>
+            <a:r>
+              <a:rPr lang="en-US" sz="1800" b="1">
+                <a:solidFill>
+                  <a:srgbClr val="0EA5E9"/>
+                </a:solidFill>
+                <a:latin typeface="Microsoft YaHei"/>
+                <a:ea typeface="Microsoft YaHei"/>
+              </a:rPr>
+              <a:t>05</a:t>
+            </a:r>
+            <a:endParaRPr/>
+          </a:p>
+        </p:txBody>
+      </p:sp>
+      <p:sp>
+        <p:nvSpPr>
+          <p:cNvPr id="285" name="文本框 284" descr="{&quot;isTemplate&quot;:true,&quot;type&quot;:&quot;text&quot;}"/>
+          <p:cNvSpPr txBox="1"/>
+          <p:nvPr/>
+        </p:nvSpPr>
+        <p:spPr>
+          <a:xfrm>
+            <a:off x="1295400" y="3981450"/>
+            <a:ext cx="10267950" cy="219075"/>
+          </a:xfrm>
+          <a:prstGeom prst="rect">
+            <a:avLst/>
+          </a:prstGeom>
+        </p:spPr>
+        <p:txBody>
+          <a:bodyPr wrap="none" lIns="0" tIns="0" rIns="0" bIns="0"/>
+          <a:lstStyle/>
+          <a:p>
+            <a:pPr>
+              <a:lnSpc>
+                <a:spcPct val="100000"/>
+              </a:lnSpc>
+            </a:pPr>
+            <a:r>
+              <a:rPr lang="zh-CN" sz="1425" b="1">
+                <a:solidFill>
+                  <a:srgbClr val="1F3A8A"/>
+                </a:solidFill>
+                <a:latin typeface="Microsoft YaHei"/>
+                <a:ea typeface="Microsoft YaHei"/>
+              </a:rPr>
+              <a:t>边界与展望</a:t>
+            </a:r>
+            <a:endParaRPr/>
+          </a:p>
+        </p:txBody>
+      </p:sp>
+      <p:sp>
+        <p:nvSpPr>
+          <p:cNvPr id="286" name="文本框 285" descr="{&quot;isTemplate&quot;:true,&quot;type&quot;:&quot;text&quot;}"/>
+          <p:cNvSpPr txBox="1"/>
+          <p:nvPr/>
+        </p:nvSpPr>
+        <p:spPr>
+          <a:xfrm>
+            <a:off x="1295400" y="4219575"/>
+            <a:ext cx="10267950" cy="152400"/>
+          </a:xfrm>
+          <a:prstGeom prst="rect">
+            <a:avLst/>
+          </a:prstGeom>
+        </p:spPr>
+        <p:txBody>
+          <a:bodyPr wrap="none" lIns="0" tIns="0" rIns="0" bIns="0"/>
+          <a:lstStyle/>
+          <a:p>
+            <a:pPr>
+              <a:lnSpc>
+                <a:spcPct val="100000"/>
+              </a:lnSpc>
+            </a:pPr>
+            <a:r>
+              <a:rPr lang="zh-CN" sz="975">
+                <a:solidFill>
+                  <a:srgbClr val="64748B"/>
+                </a:solidFill>
+                <a:latin typeface="Microsoft YaHei"/>
+                <a:ea typeface="Microsoft YaHei"/>
+              </a:rPr>
+              <a:t>诚实的边界 = 可信的产品</a:t>
+            </a:r>
+            <a:endParaRPr/>
+          </a:p>
+        </p:txBody>
+      </p:sp>
+    </p:spTree>
+  </p:cSld>
+  <p:clrMapOvr>
+    <a:masterClrMapping/>
+  </p:clrMapOvr>
+</p:sld>
+</file>
+
+<file path=ppt/slides/slide20.xml><?xml version="1.0" encoding="utf-8"?>
+<p:sld xmlns:a="http://schemas.openxmlformats.org/drawingml/2006/main" xmlns:r="http://schemas.openxmlformats.org/officeDocument/2006/relationships" xmlns:p="http://schemas.openxmlformats.org/presentationml/2006/main">
+  <p:cSld>
+    <p:spTree>
+      <p:nvGrpSpPr>
+        <p:cNvPr id="1" name="" descr="&lt;Slide&gt;&#10;  &lt;Box style={{&#10;    width: '100%',&#10;    height: '100%',&#10;    backgroundColor: '#1F3A8A',&#10;    padding: 80,&#10;    display: 'flex',&#10;    flexDirection: 'column',&#10;    justifyContent: 'center',&#10;    alignItems: 'center',&#10;  }}&gt;&#10;    &lt;Text style={{&#10;      fontSize: 14,&#10;      color: '#0EA5E9',&#10;      letterSpacing: 4,&#10;      marginBottom: 24,&#10;    }}&gt;&#10;      PART 05&#10;    &lt;/Text&gt;&#10;    &lt;Text style={{&#10;      fontSize: 72,&#10;      fontWeight: 'bold',&#10;      color: '#FFFFFF',&#10;      textAlign: 'center',&#10;      marginBottom: 24,&#10;    }}&gt;&#10;      边界与展望&#10;    &lt;/Text&gt;&#10;    &lt;Box style={{&#10;      width: 80,&#10;      height: 4,&#10;      backgroundColor: '#0EA5E9',&#10;      marginBottom: 24,&#10;    }} /&gt;&#10;    &lt;Text style={{&#10;      fontSize: 22,&#10;      color: '#CBD5E1',&#10;      textAlign: 'center',&#10;    }}&gt;&#10;      诚实的边界 = 可信的产品&#10;    &lt;/Text&gt;&#10;  &lt;/Box&gt;&#10;&lt;/Slide&gt;&#10;"/>
+        <p:cNvGrpSpPr/>
+        <p:nvPr/>
+      </p:nvGrpSpPr>
+      <p:grpSpPr>
+        <a:xfrm>
+          <a:off x="0" y="0"/>
+          <a:ext cx="0" cy="0"/>
+          <a:chOff x="0" y="0"/>
+          <a:chExt cx="0" cy="0"/>
+        </a:xfrm>
+      </p:grpSpPr>
+      <p:sp>
+        <p:nvSpPr>
+          <p:cNvPr id="9200" name="矩形 9199"/>
+          <p:cNvSpPr/>
+          <p:nvPr/>
+        </p:nvSpPr>
+        <p:spPr>
+          <a:xfrm>
+            <a:off x="0" y="0"/>
+            <a:ext cx="12192000" cy="6858000"/>
+          </a:xfrm>
+          <a:prstGeom prst="rect">
+            <a:avLst/>
+          </a:prstGeom>
+          <a:solidFill>
+            <a:srgbClr val="1F3A8A"/>
+          </a:solidFill>
+          <a:ln/>
+        </p:spPr>
+        <p:txBody>
+          <a:bodyPr/>
+          <a:lstStyle/>
+          <a:p>
+            <a:endParaRPr/>
+          </a:p>
+        </p:txBody>
+      </p:sp>
+      <p:sp>
+        <p:nvSpPr>
+          <p:cNvPr id="9201" name="文本框 9200" descr="{&quot;isTemplate&quot;:true,&quot;type&quot;:&quot;text&quot;}"/>
+          <p:cNvSpPr txBox="1"/>
+          <p:nvPr/>
+        </p:nvSpPr>
+        <p:spPr>
+          <a:xfrm>
+            <a:off x="5695950" y="2447925"/>
+            <a:ext cx="809625" cy="161925"/>
+          </a:xfrm>
+          <a:prstGeom prst="rect">
+            <a:avLst/>
+          </a:prstGeom>
+        </p:spPr>
+        <p:txBody>
+          <a:bodyPr wrap="none" lIns="0" tIns="0" rIns="0" bIns="0"/>
+          <a:lstStyle/>
+          <a:p>
+            <a:pPr>
+              <a:lnSpc>
+                <a:spcPct val="100000"/>
+              </a:lnSpc>
+            </a:pPr>
+            <a:r>
+              <a:rPr lang="en-US" sz="1050" spc="300">
+                <a:solidFill>
+                  <a:srgbClr val="0EA5E9"/>
+                </a:solidFill>
+                <a:latin typeface="Microsoft YaHei"/>
+                <a:ea typeface="Microsoft YaHei"/>
+              </a:rPr>
+              <a:t>PART 05</a:t>
+            </a:r>
+            <a:endParaRPr/>
+          </a:p>
+        </p:txBody>
+      </p:sp>
+      <p:sp>
+        <p:nvSpPr>
+          <p:cNvPr id="9202" name="文本框 9201" descr="{&quot;isTemplate&quot;:true,&quot;type&quot;:&quot;text&quot;}"/>
+          <p:cNvSpPr txBox="1"/>
+          <p:nvPr/>
+        </p:nvSpPr>
+        <p:spPr>
+          <a:xfrm>
+            <a:off x="3457575" y="2838450"/>
+            <a:ext cx="5276850" cy="828675"/>
+          </a:xfrm>
+          <a:prstGeom prst="rect">
+            <a:avLst/>
+          </a:prstGeom>
+        </p:spPr>
+        <p:txBody>
+          <a:bodyPr wrap="none" lIns="0" tIns="0" rIns="0" bIns="0"/>
+          <a:lstStyle/>
+          <a:p>
+            <a:pPr algn="ctr">
+              <a:lnSpc>
+                <a:spcPct val="100000"/>
+              </a:lnSpc>
+            </a:pPr>
+            <a:r>
+              <a:rPr lang="zh-CN" sz="5400" b="1">
+                <a:solidFill>
+                  <a:srgbClr val="FFFFFF"/>
+                </a:solidFill>
+                <a:latin typeface="Microsoft YaHei"/>
+                <a:ea typeface="Microsoft YaHei"/>
+              </a:rPr>
+              <a:t>边界与展望</a:t>
+            </a:r>
+            <a:endParaRPr/>
+          </a:p>
+        </p:txBody>
+      </p:sp>
+      <p:sp>
+        <p:nvSpPr>
+          <p:cNvPr id="9203" name="矩形 9202"/>
+          <p:cNvSpPr/>
+          <p:nvPr/>
+        </p:nvSpPr>
+        <p:spPr>
+          <a:xfrm>
+            <a:off x="5715000" y="3895725"/>
+            <a:ext cx="762000" cy="38100"/>
+          </a:xfrm>
+          <a:prstGeom prst="rect">
+            <a:avLst/>
+          </a:prstGeom>
+          <a:solidFill>
+            <a:srgbClr val="0EA5E9"/>
+          </a:solidFill>
+          <a:ln/>
+        </p:spPr>
+        <p:txBody>
+          <a:bodyPr/>
+          <a:lstStyle/>
+          <a:p>
+            <a:endParaRPr/>
+          </a:p>
+        </p:txBody>
+      </p:sp>
+      <p:sp>
+        <p:nvSpPr>
+          <p:cNvPr id="9204" name="文本框 9203" descr="{&quot;isTemplate&quot;:true,&quot;type&quot;:&quot;text&quot;}"/>
+          <p:cNvSpPr txBox="1"/>
+          <p:nvPr/>
+        </p:nvSpPr>
+        <p:spPr>
+          <a:xfrm>
+            <a:off x="3596000" y="4162425"/>
+            <a:ext cx="5000000" cy="257175"/>
+          </a:xfrm>
+          <a:prstGeom prst="rect">
+            <a:avLst/>
+          </a:prstGeom>
+        </p:spPr>
+        <p:txBody>
+          <a:bodyPr wrap="none" lIns="0" tIns="0" rIns="0" bIns="0"/>
+          <a:lstStyle/>
+          <a:p>
+            <a:pPr algn="ctr">
+              <a:lnSpc>
+                <a:spcPct val="100000"/>
+              </a:lnSpc>
+            </a:pPr>
+            <a:r>
+              <a:rPr lang="zh-CN" sz="1650">
+                <a:solidFill>
+                  <a:srgbClr val="CBD5E1"/>
+                </a:solidFill>
+                <a:latin typeface="Microsoft YaHei"/>
+                <a:ea typeface="Microsoft YaHei"/>
+              </a:rPr>
+              <a:t>诚实的边界 = 可信的产品</a:t>
+            </a:r>
+            <a:endParaRPr/>
+          </a:p>
+        </p:txBody>
+      </p:sp>
+    </p:spTree>
+  </p:cSld>
+  <p:clrMapOvr>
+    <a:masterClrMapping/>
+  </p:clrMapOvr>
+</p:sld>
+</file>
+
+<file path=ppt/slides/slide21.xml><?xml version="1.0" encoding="utf-8"?>
 <p:sld xmlns:a="http://schemas.openxmlformats.org/drawingml/2006/main" xmlns:r="http://schemas.openxmlformats.org/officeDocument/2006/relationships" xmlns:p="http://schemas.openxmlformats.org/presentationml/2006/main">
   <p:cSld>
     <p:spTree>
@@ -12358,7 +15215,7 @@
 </p:sld>
 </file>
 
-<file path=ppt/slides/slide19.xml><?xml version="1.0" encoding="utf-8"?>
+<file path=ppt/slides/slide22.xml><?xml version="1.0" encoding="utf-8"?>
 <p:sld xmlns:a="http://schemas.openxmlformats.org/drawingml/2006/main" xmlns:r="http://schemas.openxmlformats.org/officeDocument/2006/relationships" xmlns:p="http://schemas.openxmlformats.org/presentationml/2006/main">
   <p:cSld>
     <p:spTree>
@@ -12465,7 +15322,7 @@
               </a:lnSpc>
             </a:pPr>
             <a:r>
-              <a:rPr lang="zh-CN" sz="4200" b="1">
+              <a:rPr lang="zh-CN" sz="4500" b="1">
                 <a:solidFill>
                   <a:srgbClr val="FFFFFF"/>
                 </a:solidFill>
@@ -12483,7 +15340,7 @@
               </a:lnSpc>
             </a:pPr>
             <a:r>
-              <a:rPr lang="zh-CN" sz="4200" b="1">
+              <a:rPr lang="zh-CN" sz="4500" b="1">
                 <a:solidFill>
                   <a:srgbClr val="FFFFFF"/>
                 </a:solidFill>
@@ -12493,7 +15350,7 @@
               <a:t>公司的</a:t>
             </a:r>
             <a:r>
-              <a:rPr lang="en-US" sz="4200" b="1">
+              <a:rPr lang="en-US" sz="4500" b="1">
                 <a:solidFill>
                   <a:srgbClr val="FFFFFF"/>
                 </a:solidFill>
@@ -12503,7 +15360,7 @@
               <a:t>"</a:t>
             </a:r>
             <a:r>
-              <a:rPr lang="zh-CN" sz="4200" b="1">
+              <a:rPr lang="zh-CN" sz="4500" b="1">
                 <a:solidFill>
                   <a:srgbClr val="FFFFFF"/>
                 </a:solidFill>
@@ -12513,7 +15370,7 @@
               <a:t>自来水</a:t>
             </a:r>
             <a:r>
-              <a:rPr lang="en-US" sz="4200" b="1">
+              <a:rPr lang="en-US" sz="4500" b="1">
                 <a:solidFill>
                   <a:srgbClr val="FFFFFF"/>
                 </a:solidFill>
@@ -13184,12 +16041,12 @@
 </p:sld>
 </file>
 
-<file path=ppt/slides/slide2.xml><?xml version="1.0" encoding="utf-8"?>
+<file path=ppt/slides/slide23.xml><?xml version="1.0" encoding="utf-8"?>
 <p:sld xmlns:a="http://schemas.openxmlformats.org/drawingml/2006/main" xmlns:r="http://schemas.openxmlformats.org/officeDocument/2006/relationships" xmlns:p="http://schemas.openxmlformats.org/presentationml/2006/main">
   <p:cSld>
     <p:spTree>
       <p:nvGrpSpPr>
-        <p:cNvPr id="1" name="" descr="&lt;Slide&gt;&#10;  &lt;Box style={{&#10;    width: '100%',&#10;    height: '100%',&#10;    backgroundColor: '#FFFFFF',&#10;    padding: 50,&#10;    display: 'flex',&#10;    flexDirection: 'column',&#10;  }}&gt;&#10;    &lt;Text style={{&#10;      fontSize: 32,&#10;      fontWeight: 'bold',&#10;      color: '#1F3A8A',&#10;      marginBottom: 4,&#10;    }}&gt;&#10;      目录&#10;    &lt;/Text&gt;&#10;    &lt;Text style={{&#10;      fontSize: 14,&#10;      color: '#94A3B8',&#10;      marginBottom: 24,&#10;      letterSpacing: 2,&#10;    }}&gt;&#10;      CONTENTS&#10;    &lt;/Text&gt;&#10;&#10;    &lt;Box style={{&#10;      display: 'flex',&#10;      flexDirection: 'column',&#10;      gap: 12,&#10;    }}&gt;&#10;      {[&#10;        { num: '01', title: '背景：为什么需要&quot;总闸门&quot;', desc: '企业用大模型的三个扎心现状' },&#10;        { num: '02', title: '定位：自用网关，不卖算力', desc: '明确边界与项目价值定位' },&#10;        { num: '03', title: '项目与架构：llm-proxy-tk 一览', desc: '是什么、长什么样、能干什么' },&#10;        { num: '04', title: '企业 AI 应用场景', desc: '内网-自有大模型 vs 外网-云端大模型' },&#10;        { num: '05', title: '企业 AI 应用落地', desc: '5 个关键抓手，让网关从&quot;装上&quot;到&quot;用顺&quot;' },&#10;        { num: '06', title: '边界与展望', desc: '诚实的边界 = 可信的产品' },&#10;      ].map((item, idx) =&gt; (&#10;        &lt;Box key={idx} style={{&#10;          display: 'flex',&#10;          flexDirection: 'row',&#10;          alignItems: 'center',&#10;          padding: '8px 16px',&#10;          backgroundColor: '#F8FAFC',&#10;          borderRadius: 8,&#10;        }}&gt;&#10;          &lt;Text style={{&#10;            fontSize: 24,&#10;            fontWeight: 'bold',&#10;            color: '#0EA5E9',&#10;            width: 70,&#10;          }}&gt;&#10;            {item.num}&#10;          &lt;/Text&gt;&#10;          &lt;Box style={{ flex: 1 }}&gt;&#10;            &lt;Text style={{&#10;              fontSize: 19,&#10;              fontWeight: 'bold',&#10;              color: '#1F3A8A',&#10;              marginBottom: 2,&#10;            }}&gt;&#10;              {item.title}&#10;            &lt;/Text&gt;&#10;            &lt;Text style={{ fontSize: 13, color: '#64748B' }}&gt;&#10;              {item.desc}&#10;            &lt;/Text&gt;&#10;          &lt;/Box&gt;&#10;        &lt;/Box&gt;&#10;      ))}&#10;    &lt;/Box&gt;&#10;  &lt;/Box&gt;&#10;&lt;/Slide&gt;"/>
+        <p:cNvPr id="1" name="" descr="&lt;Slide&gt;&#10;  &lt;Box style={{&#10;    width: '100%',&#10;    height: '100%',&#10;    backgroundColor: '#1F3A8A',&#10;    padding: 80,&#10;    display: 'flex',&#10;    flexDirection: 'column',&#10;    justifyContent: 'center',&#10;    alignItems: 'center',&#10;    gap: 0,&#10;  }}&gt;&#10;    &lt;Box style={{&#10;      width: 80,&#10;      height: 4,&#10;      backgroundColor: 'rgba(14, 165, 233, 0.6)',&#10;      marginBottom: 36,&#10;    }} /&gt;&#10;&#10;    &lt;Text style={{&#10;      fontSize: 120,&#10;      fontWeight: 900,&#10;      color: '#FFFFFF',&#10;      letterSpacing: 4,&#10;      textAlign: 'center',&#10;    }}&gt;&#10;      THANK YOU&#10;    &lt;/Text&gt;&#10;&#10;    &lt;Box style={{&#10;      width: 80,&#10;      height: 4,&#10;      backgroundColor: 'rgba(14, 165, 233, 0.6)',&#10;      marginTop: 36,&#10;      marginBottom: 36,&#10;    }} /&gt;&#10;&#10;    &lt;Text style={{&#10;      fontSize: 28,&#10;      color: '#CBD5E1',&#10;      textAlign: 'center',&#10;      lineHeight: 1.6,&#10;      marginBottom: 12,&#10;    }}&gt;&#10;      交流 · 反馈 · 落地&#10;    &lt;/Text&gt;&#10;&#10;    &lt;Text style={{&#10;      fontSize: 18,&#10;      color: 'rgba(14, 165, 233, 0.9)',&#10;      textAlign: 'center',&#10;      fontWeight: 'bold',&#10;      letterSpacing: 2,&#10;      marginBottom: 8,&#10;    }}&gt;&#10;      AI 网关如何在企业中实现大模型自动化编程落地&#10;    &lt;/Text&gt;&#10;&#10;    &lt;Box style={{&#10;      width: '100%',&#10;      borderTop: '1px solid rgba(203, 213, 225, 0.2)',&#10;      marginTop: 56,&#10;      paddingTop: 24,&#10;      display: 'flex',&#10;      flexDirection: 'row',&#10;      justifyContent: 'space-between',&#10;      alignItems: 'center',&#10;    }}&gt;&#10;      &lt;Text style={{ fontSize: 13, color: '#94A3B8' }}&gt;LLM API Gateway · 汇报日期：2026-09-04&lt;/Text&gt;&#10;      &lt;Text style={{ fontSize: 13, color: '#0EA5E9', fontWeight: 'bold' }}&gt;&#10;        github.com/boonya-hrgk/llm-api-gateway&#10;      &lt;/Text&gt;&#10;    &lt;/Box&gt;&#10;  &lt;/Box&gt;&#10;&lt;/Slide&gt;&#10;"/>
         <p:cNvGrpSpPr/>
         <p:nvPr/>
       </p:nvGrpSpPr>
@@ -13203,7 +16060,7 @@
       </p:grpSpPr>
       <p:sp>
         <p:nvSpPr>
-          <p:cNvPr id="264" name="矩形 263"/>
+          <p:cNvPr id="501" name="TY背景"/>
           <p:cNvSpPr/>
           <p:nvPr/>
         </p:nvSpPr>
@@ -13216,7 +16073,7 @@
             <a:avLst/>
           </a:prstGeom>
           <a:solidFill>
-            <a:srgbClr val="FFFFFF"/>
+            <a:srgbClr val="1F3A8A"/>
           </a:solidFill>
           <a:ln/>
         </p:spPr>
@@ -13230,98 +16087,22 @@
       </p:sp>
       <p:sp>
         <p:nvSpPr>
-          <p:cNvPr id="265" name="文本框 264" descr="{&quot;isTemplate&quot;:true,&quot;type&quot;:&quot;text&quot;}"/>
-          <p:cNvSpPr txBox="1"/>
-          <p:nvPr/>
-        </p:nvSpPr>
-        <p:spPr>
-          <a:xfrm>
-            <a:off x="476250" y="476250"/>
-            <a:ext cx="11239500" cy="371475"/>
-          </a:xfrm>
-          <a:prstGeom prst="rect">
-            <a:avLst/>
-          </a:prstGeom>
-        </p:spPr>
-        <p:txBody>
-          <a:bodyPr wrap="none" lIns="0" tIns="0" rIns="0" bIns="0"/>
-          <a:lstStyle/>
-          <a:p>
-            <a:pPr>
-              <a:lnSpc>
-                <a:spcPct val="100000"/>
-              </a:lnSpc>
-            </a:pPr>
-            <a:r>
-              <a:rPr lang="zh-CN" sz="2400" b="1">
-                <a:solidFill>
-                  <a:srgbClr val="1F3A8A"/>
-                </a:solidFill>
-                <a:latin typeface="Microsoft YaHei"/>
-                <a:ea typeface="Microsoft YaHei"/>
-              </a:rPr>
-              <a:t>目录</a:t>
-            </a:r>
-            <a:endParaRPr/>
-          </a:p>
-        </p:txBody>
-      </p:sp>
-      <p:sp>
-        <p:nvSpPr>
-          <p:cNvPr id="266" name="文本框 265" descr="{&quot;isTemplate&quot;:true,&quot;type&quot;:&quot;text&quot;}"/>
-          <p:cNvSpPr txBox="1"/>
-          <p:nvPr/>
-        </p:nvSpPr>
-        <p:spPr>
-          <a:xfrm>
-            <a:off x="476250" y="885825"/>
-            <a:ext cx="11239500" cy="161925"/>
-          </a:xfrm>
-          <a:prstGeom prst="rect">
-            <a:avLst/>
-          </a:prstGeom>
-        </p:spPr>
-        <p:txBody>
-          <a:bodyPr wrap="none" lIns="0" tIns="0" rIns="0" bIns="0"/>
-          <a:lstStyle/>
-          <a:p>
-            <a:pPr>
-              <a:lnSpc>
-                <a:spcPct val="100000"/>
-              </a:lnSpc>
-            </a:pPr>
-            <a:r>
-              <a:rPr lang="en-US" sz="1050" spc="150">
-                <a:solidFill>
-                  <a:srgbClr val="94A3B8"/>
-                </a:solidFill>
-                <a:latin typeface="Microsoft YaHei"/>
-                <a:ea typeface="Microsoft YaHei"/>
-              </a:rPr>
-              <a:t>CONTENTS</a:t>
-            </a:r>
-            <a:endParaRPr/>
-          </a:p>
-        </p:txBody>
-      </p:sp>
-      <p:sp>
-        <p:nvSpPr>
-          <p:cNvPr id="267" name="矩形: 圆角 266"/>
+          <p:cNvPr id="502" name="TY装饰上"/>
           <p:cNvSpPr/>
           <p:nvPr/>
         </p:nvSpPr>
         <p:spPr>
           <a:xfrm>
-            <a:off x="476250" y="1276350"/>
-            <a:ext cx="11239500" cy="542925"/>
-          </a:xfrm>
-          <a:prstGeom prst="roundRect">
-            <a:avLst>
-              <a:gd name="adj" fmla="val 14035"/>
-            </a:avLst>
+            <a:off x="5715000" y="2180025"/>
+            <a:ext cx="762000" cy="38100"/>
+          </a:xfrm>
+          <a:prstGeom prst="rect">
+            <a:avLst/>
           </a:prstGeom>
           <a:solidFill>
-            <a:srgbClr val="F8FAFC"/>
+            <a:srgbClr val="0EA5E9">
+              <a:alpha val="60000"/>
+            </a:srgbClr>
           </a:solidFill>
           <a:ln/>
         </p:spPr>
@@ -13335,166 +16116,60 @@
       </p:sp>
       <p:sp>
         <p:nvSpPr>
-          <p:cNvPr id="268" name="文本框 267" descr="{&quot;isTemplate&quot;:true,&quot;type&quot;:&quot;text&quot;}"/>
-          <p:cNvSpPr txBox="1"/>
-          <p:nvPr/>
-        </p:nvSpPr>
-        <p:spPr>
-          <a:xfrm>
-            <a:off x="628650" y="1409700"/>
-            <a:ext cx="666750" cy="276225"/>
-          </a:xfrm>
-          <a:prstGeom prst="rect">
-            <a:avLst/>
-          </a:prstGeom>
-        </p:spPr>
-        <p:txBody>
-          <a:bodyPr wrap="none" lIns="0" tIns="0" rIns="0" bIns="0"/>
-          <a:lstStyle/>
-          <a:p>
-            <a:pPr>
-              <a:lnSpc>
-                <a:spcPct val="100000"/>
-              </a:lnSpc>
-            </a:pPr>
-            <a:r>
-              <a:rPr lang="en-US" sz="1800" b="1">
-                <a:solidFill>
-                  <a:srgbClr val="0EA5E9"/>
-                </a:solidFill>
-                <a:latin typeface="Microsoft YaHei"/>
-                <a:ea typeface="Microsoft YaHei"/>
-              </a:rPr>
-              <a:t>01</a:t>
-            </a:r>
-            <a:endParaRPr/>
-          </a:p>
-        </p:txBody>
-      </p:sp>
-      <p:sp>
-        <p:nvSpPr>
-          <p:cNvPr id="269" name="文本框 268" descr="{&quot;isTemplate&quot;:true,&quot;type&quot;:&quot;text&quot;}"/>
-          <p:cNvSpPr txBox="1"/>
-          <p:nvPr/>
-        </p:nvSpPr>
-        <p:spPr>
-          <a:xfrm>
-            <a:off x="1295400" y="1352550"/>
-            <a:ext cx="10267950" cy="219075"/>
-          </a:xfrm>
-          <a:prstGeom prst="rect">
-            <a:avLst/>
-          </a:prstGeom>
-        </p:spPr>
-        <p:txBody>
-          <a:bodyPr wrap="none" lIns="0" tIns="0" rIns="0" bIns="0"/>
-          <a:lstStyle/>
-          <a:p>
-            <a:pPr>
-              <a:lnSpc>
-                <a:spcPct val="100000"/>
-              </a:lnSpc>
-            </a:pPr>
-            <a:r>
-              <a:rPr lang="zh-CN" sz="1425" b="1">
-                <a:solidFill>
-                  <a:srgbClr val="1F3A8A"/>
-                </a:solidFill>
-                <a:latin typeface="Microsoft YaHei"/>
-                <a:ea typeface="Microsoft YaHei"/>
-              </a:rPr>
-              <a:t>背景：为什么需要</a:t>
-            </a:r>
-            <a:r>
-              <a:rPr lang="en-US" sz="1425" b="1">
-                <a:solidFill>
-                  <a:srgbClr val="1F3A8A"/>
-                </a:solidFill>
-                <a:latin typeface="Microsoft YaHei"/>
-                <a:ea typeface="Microsoft YaHei"/>
-              </a:rPr>
-              <a:t>"</a:t>
-            </a:r>
-            <a:r>
-              <a:rPr lang="zh-CN" sz="1425" b="1">
-                <a:solidFill>
-                  <a:srgbClr val="1F3A8A"/>
-                </a:solidFill>
-                <a:latin typeface="Microsoft YaHei"/>
-                <a:ea typeface="Microsoft YaHei"/>
-              </a:rPr>
-              <a:t>总闸门</a:t>
-            </a:r>
-            <a:r>
-              <a:rPr lang="en-US" sz="1425" b="1">
-                <a:solidFill>
-                  <a:srgbClr val="1F3A8A"/>
-                </a:solidFill>
-                <a:latin typeface="Microsoft YaHei"/>
-                <a:ea typeface="Microsoft YaHei"/>
-              </a:rPr>
-              <a:t>"</a:t>
-            </a:r>
-            <a:endParaRPr/>
-          </a:p>
-        </p:txBody>
-      </p:sp>
-      <p:sp>
-        <p:nvSpPr>
-          <p:cNvPr id="270" name="文本框 269" descr="{&quot;isTemplate&quot;:true,&quot;type&quot;:&quot;text&quot;}"/>
-          <p:cNvSpPr txBox="1"/>
-          <p:nvPr/>
-        </p:nvSpPr>
-        <p:spPr>
-          <a:xfrm>
-            <a:off x="1295400" y="1590675"/>
-            <a:ext cx="10267950" cy="152400"/>
-          </a:xfrm>
-          <a:prstGeom prst="rect">
-            <a:avLst/>
-          </a:prstGeom>
-        </p:spPr>
-        <p:txBody>
-          <a:bodyPr wrap="none" lIns="0" tIns="0" rIns="0" bIns="0"/>
-          <a:lstStyle/>
-          <a:p>
-            <a:pPr>
-              <a:lnSpc>
-                <a:spcPct val="100000"/>
-              </a:lnSpc>
-            </a:pPr>
-            <a:r>
-              <a:rPr lang="zh-CN" sz="975">
-                <a:solidFill>
-                  <a:srgbClr val="64748B"/>
-                </a:solidFill>
-                <a:latin typeface="Microsoft YaHei"/>
-                <a:ea typeface="Microsoft YaHei"/>
-              </a:rPr>
-              <a:t>企业用大模型的三个扎心现状</a:t>
-            </a:r>
-            <a:endParaRPr/>
-          </a:p>
-        </p:txBody>
-      </p:sp>
-      <p:sp>
-        <p:nvSpPr>
-          <p:cNvPr id="271" name="矩形: 圆角 270"/>
+          <p:cNvPr id="503" name="THANKYOU大字" descr="{&quot;isTemplate&quot;:true,&quot;type&quot;:&quot;text&quot;}"/>
+          <p:cNvSpPr txBox="1"/>
+          <p:nvPr/>
+        </p:nvSpPr>
+        <p:spPr>
+          <a:xfrm>
+            <a:off x="762000" y="2342100"/>
+            <a:ext cx="10668000" cy="1219200"/>
+          </a:xfrm>
+          <a:prstGeom prst="rect">
+            <a:avLst/>
+          </a:prstGeom>
+        </p:spPr>
+        <p:txBody>
+          <a:bodyPr wrap="none" lIns="0" tIns="0" rIns="0" bIns="0"/>
+          <a:lstStyle/>
+          <a:p>
+            <a:pPr algn="ctr">
+              <a:lnSpc>
+                <a:spcPct val="100000"/>
+              </a:lnSpc>
+            </a:pPr>
+            <a:r>
+              <a:rPr lang="en-US" sz="9000" b="1" spc="200">
+                <a:solidFill>
+                  <a:srgbClr val="FFFFFF"/>
+                </a:solidFill>
+                <a:latin typeface="Microsoft YaHei"/>
+                <a:ea typeface="Microsoft YaHei"/>
+              </a:rPr>
+              <a:t>THANK YOU</a:t>
+            </a:r>
+            <a:endParaRPr/>
+          </a:p>
+        </p:txBody>
+      </p:sp>
+      <p:sp>
+        <p:nvSpPr>
+          <p:cNvPr id="504" name="TY装饰下"/>
           <p:cNvSpPr/>
           <p:nvPr/>
         </p:nvSpPr>
         <p:spPr>
           <a:xfrm>
-            <a:off x="476250" y="1933575"/>
-            <a:ext cx="11239500" cy="542925"/>
-          </a:xfrm>
-          <a:prstGeom prst="roundRect">
-            <a:avLst>
-              <a:gd name="adj" fmla="val 14035"/>
-            </a:avLst>
+            <a:off x="5715000" y="3673575"/>
+            <a:ext cx="762000" cy="38100"/>
+          </a:xfrm>
+          <a:prstGeom prst="rect">
+            <a:avLst/>
           </a:prstGeom>
           <a:solidFill>
-            <a:srgbClr val="F8FAFC"/>
+            <a:srgbClr val="0EA5E9">
+              <a:alpha val="60000"/>
+            </a:srgbClr>
           </a:solidFill>
           <a:ln/>
         </p:spPr>
@@ -13508,136 +16183,98 @@
       </p:sp>
       <p:sp>
         <p:nvSpPr>
-          <p:cNvPr id="272" name="文本框 271" descr="{&quot;isTemplate&quot;:true,&quot;type&quot;:&quot;text&quot;}"/>
-          <p:cNvSpPr txBox="1"/>
-          <p:nvPr/>
-        </p:nvSpPr>
-        <p:spPr>
-          <a:xfrm>
-            <a:off x="628650" y="2066925"/>
-            <a:ext cx="666750" cy="276225"/>
-          </a:xfrm>
-          <a:prstGeom prst="rect">
-            <a:avLst/>
-          </a:prstGeom>
-        </p:spPr>
-        <p:txBody>
-          <a:bodyPr wrap="none" lIns="0" tIns="0" rIns="0" bIns="0"/>
-          <a:lstStyle/>
-          <a:p>
-            <a:pPr>
-              <a:lnSpc>
-                <a:spcPct val="100000"/>
-              </a:lnSpc>
-            </a:pPr>
-            <a:r>
-              <a:rPr lang="en-US" sz="1800" b="1">
+          <p:cNvPr id="505" name="副语" descr="{&quot;isTemplate&quot;:true,&quot;type&quot;:&quot;text&quot;}"/>
+          <p:cNvSpPr txBox="1"/>
+          <p:nvPr/>
+        </p:nvSpPr>
+        <p:spPr>
+          <a:xfrm>
+            <a:off x="1524000" y="3810000"/>
+            <a:ext cx="9144000" cy="304800"/>
+          </a:xfrm>
+          <a:prstGeom prst="rect">
+            <a:avLst/>
+          </a:prstGeom>
+        </p:spPr>
+        <p:txBody>
+          <a:bodyPr wrap="none" lIns="0" tIns="0" rIns="0" bIns="0"/>
+          <a:lstStyle/>
+          <a:p>
+            <a:pPr algn="ctr">
+              <a:lnSpc>
+                <a:spcPct val="160000"/>
+              </a:lnSpc>
+            </a:pPr>
+            <a:r>
+              <a:rPr lang="zh-CN" sz="2100">
+                <a:solidFill>
+                  <a:srgbClr val="CBD5E1"/>
+                </a:solidFill>
+                <a:latin typeface="Microsoft YaHei"/>
+                <a:ea typeface="Microsoft YaHei"/>
+              </a:rPr>
+              <a:t>交流 · 反馈 · 落地</a:t>
+            </a:r>
+            <a:endParaRPr/>
+          </a:p>
+        </p:txBody>
+      </p:sp>
+      <p:sp>
+        <p:nvSpPr>
+          <p:cNvPr id="506" name="副主题" descr="{&quot;isTemplate&quot;:true,&quot;type&quot;:&quot;text&quot;}"/>
+          <p:cNvSpPr txBox="1"/>
+          <p:nvPr/>
+        </p:nvSpPr>
+        <p:spPr>
+          <a:xfrm>
+            <a:off x="1524000" y="4210050"/>
+            <a:ext cx="9144000" cy="209550"/>
+          </a:xfrm>
+          <a:prstGeom prst="rect">
+            <a:avLst/>
+          </a:prstGeom>
+        </p:spPr>
+        <p:txBody>
+          <a:bodyPr wrap="none" lIns="0" tIns="0" rIns="0" bIns="0"/>
+          <a:lstStyle/>
+          <a:p>
+            <a:pPr algn="ctr">
+              <a:lnSpc>
+                <a:spcPct val="100000"/>
+              </a:lnSpc>
+            </a:pPr>
+            <a:r>
+              <a:rPr lang="zh-CN" sz="1350" b="1" spc="150">
                 <a:solidFill>
                   <a:srgbClr val="0EA5E9"/>
                 </a:solidFill>
                 <a:latin typeface="Microsoft YaHei"/>
                 <a:ea typeface="Microsoft YaHei"/>
               </a:rPr>
-              <a:t>02</a:t>
-            </a:r>
-            <a:endParaRPr/>
-          </a:p>
-        </p:txBody>
-      </p:sp>
-      <p:sp>
-        <p:nvSpPr>
-          <p:cNvPr id="273" name="文本框 272" descr="{&quot;isTemplate&quot;:true,&quot;type&quot;:&quot;text&quot;}"/>
-          <p:cNvSpPr txBox="1"/>
-          <p:nvPr/>
-        </p:nvSpPr>
-        <p:spPr>
-          <a:xfrm>
-            <a:off x="1295400" y="2009775"/>
-            <a:ext cx="10267950" cy="219075"/>
-          </a:xfrm>
-          <a:prstGeom prst="rect">
-            <a:avLst/>
-          </a:prstGeom>
-        </p:spPr>
-        <p:txBody>
-          <a:bodyPr wrap="none" lIns="0" tIns="0" rIns="0" bIns="0"/>
-          <a:lstStyle/>
-          <a:p>
-            <a:pPr>
-              <a:lnSpc>
-                <a:spcPct val="100000"/>
-              </a:lnSpc>
-            </a:pPr>
-            <a:r>
-              <a:rPr lang="zh-CN" sz="1425" b="1">
-                <a:solidFill>
-                  <a:srgbClr val="1F3A8A"/>
-                </a:solidFill>
-                <a:latin typeface="Microsoft YaHei"/>
-                <a:ea typeface="Microsoft YaHei"/>
-              </a:rPr>
-              <a:t>定位：自用网关，不卖算力</a:t>
-            </a:r>
-            <a:endParaRPr/>
-          </a:p>
-        </p:txBody>
-      </p:sp>
-      <p:sp>
-        <p:nvSpPr>
-          <p:cNvPr id="274" name="文本框 273" descr="{&quot;isTemplate&quot;:true,&quot;type&quot;:&quot;text&quot;}"/>
-          <p:cNvSpPr txBox="1"/>
-          <p:nvPr/>
-        </p:nvSpPr>
-        <p:spPr>
-          <a:xfrm>
-            <a:off x="1295400" y="2247900"/>
-            <a:ext cx="10267950" cy="152400"/>
-          </a:xfrm>
-          <a:prstGeom prst="rect">
-            <a:avLst/>
-          </a:prstGeom>
-        </p:spPr>
-        <p:txBody>
-          <a:bodyPr wrap="none" lIns="0" tIns="0" rIns="0" bIns="0"/>
-          <a:lstStyle/>
-          <a:p>
-            <a:pPr>
-              <a:lnSpc>
-                <a:spcPct val="100000"/>
-              </a:lnSpc>
-            </a:pPr>
-            <a:r>
-              <a:rPr lang="zh-CN" sz="975">
-                <a:solidFill>
-                  <a:srgbClr val="64748B"/>
-                </a:solidFill>
-                <a:latin typeface="Microsoft YaHei"/>
-                <a:ea typeface="Microsoft YaHei"/>
-              </a:rPr>
-              <a:t>明确边界与项目价值定位</a:t>
-            </a:r>
-            <a:endParaRPr/>
-          </a:p>
-        </p:txBody>
-      </p:sp>
-      <p:sp>
-        <p:nvSpPr>
-          <p:cNvPr id="275" name="矩形: 圆角 274"/>
+              <a:t>AI 网关如何在企业中实现大模型自动化编程落地</a:t>
+            </a:r>
+            <a:endParaRPr/>
+          </a:p>
+        </p:txBody>
+      </p:sp>
+      <p:sp>
+        <p:nvSpPr>
+          <p:cNvPr id="507" name="TY分割线"/>
           <p:cNvSpPr/>
           <p:nvPr/>
         </p:nvSpPr>
         <p:spPr>
           <a:xfrm>
-            <a:off x="476250" y="2590800"/>
-            <a:ext cx="11239500" cy="542925"/>
-          </a:xfrm>
-          <a:prstGeom prst="roundRect">
-            <a:avLst>
-              <a:gd name="adj" fmla="val 14035"/>
-            </a:avLst>
+            <a:off x="762000" y="4876800"/>
+            <a:ext cx="10668000" cy="12700"/>
+          </a:xfrm>
+          <a:prstGeom prst="rect">
+            <a:avLst/>
           </a:prstGeom>
           <a:solidFill>
-            <a:srgbClr val="F8FAFC"/>
+            <a:srgbClr val="CBD5E1">
+              <a:alpha val="20000"/>
+            </a:srgbClr>
           </a:solidFill>
           <a:ln/>
         </p:spPr>
@@ -13651,792 +16288,95 @@
       </p:sp>
       <p:sp>
         <p:nvSpPr>
-          <p:cNvPr id="276" name="文本框 275" descr="{&quot;isTemplate&quot;:true,&quot;type&quot;:&quot;text&quot;}"/>
-          <p:cNvSpPr txBox="1"/>
-          <p:nvPr/>
-        </p:nvSpPr>
-        <p:spPr>
-          <a:xfrm>
-            <a:off x="628650" y="2724150"/>
-            <a:ext cx="666750" cy="276225"/>
-          </a:xfrm>
-          <a:prstGeom prst="rect">
-            <a:avLst/>
-          </a:prstGeom>
-        </p:spPr>
-        <p:txBody>
-          <a:bodyPr wrap="none" lIns="0" tIns="0" rIns="0" bIns="0"/>
-          <a:lstStyle/>
-          <a:p>
-            <a:pPr>
-              <a:lnSpc>
-                <a:spcPct val="100000"/>
-              </a:lnSpc>
-            </a:pPr>
-            <a:r>
-              <a:rPr lang="en-US" sz="1800" b="1">
+          <p:cNvPr id="508" name="TY脚左" descr="{&quot;isTemplate&quot;:true,&quot;type&quot;:&quot;text&quot;}"/>
+          <p:cNvSpPr txBox="1"/>
+          <p:nvPr/>
+        </p:nvSpPr>
+        <p:spPr>
+          <a:xfrm>
+            <a:off x="762000" y="5143500"/>
+            <a:ext cx="5334000" cy="152400"/>
+          </a:xfrm>
+          <a:prstGeom prst="rect">
+            <a:avLst/>
+          </a:prstGeom>
+        </p:spPr>
+        <p:txBody>
+          <a:bodyPr wrap="none" lIns="0" tIns="0" rIns="0" bIns="0"/>
+          <a:lstStyle/>
+          <a:p>
+            <a:pPr>
+              <a:lnSpc>
+                <a:spcPct val="100000"/>
+              </a:lnSpc>
+            </a:pPr>
+            <a:r>
+              <a:rPr lang="en-US" sz="975">
+                <a:solidFill>
+                  <a:srgbClr val="94A3B8"/>
+                </a:solidFill>
+                <a:latin typeface="Microsoft YaHei"/>
+                <a:ea typeface="Microsoft YaHei"/>
+              </a:rPr>
+              <a:t>LLM API Gateway · </a:t>
+            </a:r>
+            <a:r>
+              <a:rPr lang="zh-CN" sz="975">
+                <a:solidFill>
+                  <a:srgbClr val="94A3B8"/>
+                </a:solidFill>
+                <a:latin typeface="Microsoft YaHei"/>
+                <a:ea typeface="Microsoft YaHei"/>
+              </a:rPr>
+              <a:t>汇报日期：</a:t>
+            </a:r>
+            <a:r>
+              <a:rPr lang="en-US" sz="975">
+                <a:solidFill>
+                  <a:srgbClr val="94A3B8"/>
+                </a:solidFill>
+                <a:latin typeface="Microsoft YaHei"/>
+                <a:ea typeface="Microsoft YaHei"/>
+              </a:rPr>
+              <a:t>2026-09-04</a:t>
+            </a:r>
+            <a:endParaRPr/>
+          </a:p>
+        </p:txBody>
+      </p:sp>
+      <p:sp>
+        <p:nvSpPr>
+          <p:cNvPr id="509" name="TY脚右" descr="{&quot;isTemplate&quot;:true,&quot;type&quot;:&quot;text&quot;}"/>
+          <p:cNvSpPr txBox="1"/>
+          <p:nvPr/>
+        </p:nvSpPr>
+        <p:spPr>
+          <a:xfrm>
+            <a:off x="6096000" y="5143500"/>
+            <a:ext cx="5334000" cy="152400"/>
+          </a:xfrm>
+          <a:prstGeom prst="rect">
+            <a:avLst/>
+          </a:prstGeom>
+        </p:spPr>
+        <p:txBody>
+          <a:bodyPr wrap="none" lIns="0" tIns="0" rIns="0" bIns="0"/>
+          <a:lstStyle/>
+          <a:p>
+            <a:pPr algn="r">
+              <a:lnSpc>
+                <a:spcPct val="100000"/>
+              </a:lnSpc>
+            </a:pPr>
+            <a:r>
+              <a:rPr lang="en-US" sz="975" b="1">
                 <a:solidFill>
                   <a:srgbClr val="0EA5E9"/>
                 </a:solidFill>
                 <a:latin typeface="Microsoft YaHei"/>
                 <a:ea typeface="Microsoft YaHei"/>
               </a:rPr>
-              <a:t>03</a:t>
-            </a:r>
-            <a:endParaRPr/>
-          </a:p>
-        </p:txBody>
-      </p:sp>
-      <p:sp>
-        <p:nvSpPr>
-          <p:cNvPr id="277" name="文本框 276" descr="{&quot;isTemplate&quot;:true,&quot;type&quot;:&quot;text&quot;}"/>
-          <p:cNvSpPr txBox="1"/>
-          <p:nvPr/>
-        </p:nvSpPr>
-        <p:spPr>
-          <a:xfrm>
-            <a:off x="1295400" y="2667000"/>
-            <a:ext cx="10267950" cy="219075"/>
-          </a:xfrm>
-          <a:prstGeom prst="rect">
-            <a:avLst/>
-          </a:prstGeom>
-        </p:spPr>
-        <p:txBody>
-          <a:bodyPr wrap="none" lIns="0" tIns="0" rIns="0" bIns="0"/>
-          <a:lstStyle/>
-          <a:p>
-            <a:pPr>
-              <a:lnSpc>
-                <a:spcPct val="100000"/>
-              </a:lnSpc>
-            </a:pPr>
-            <a:r>
-              <a:rPr lang="zh-CN" sz="1425" b="1" dirty="0">
-                <a:solidFill>
-                  <a:srgbClr val="1F3A8A"/>
-                </a:solidFill>
-                <a:latin typeface="Microsoft YaHei"/>
-                <a:ea typeface="Microsoft YaHei"/>
-              </a:rPr>
-              <a:t>项目与架构：</a:t>
-            </a:r>
-            <a:r>
-              <a:rPr lang="en-US" sz="1425" b="1" dirty="0" err="1">
-                <a:solidFill>
-                  <a:srgbClr val="1F3A8A"/>
-                </a:solidFill>
-                <a:latin typeface="Microsoft YaHei"/>
-                <a:ea typeface="Microsoft YaHei"/>
-              </a:rPr>
-              <a:t>llm</a:t>
-            </a:r>
-            <a:r>
-              <a:rPr lang="en-US" sz="1425" b="1" dirty="0">
-                <a:solidFill>
-                  <a:srgbClr val="1F3A8A"/>
-                </a:solidFill>
-                <a:latin typeface="Microsoft YaHei"/>
-                <a:ea typeface="Microsoft YaHei"/>
-              </a:rPr>
-              <a:t>-</a:t>
-            </a:r>
-            <a:r>
-              <a:rPr lang="en-US" sz="1425" b="1" dirty="0" err="1">
-                <a:solidFill>
-                  <a:srgbClr val="1F3A8A"/>
-                </a:solidFill>
-                <a:latin typeface="Microsoft YaHei"/>
-                <a:ea typeface="Microsoft YaHei"/>
-              </a:rPr>
-              <a:t>api</a:t>
-            </a:r>
-            <a:r>
-              <a:rPr lang="en-US" sz="1425" b="1" dirty="0">
-                <a:solidFill>
-                  <a:srgbClr val="1F3A8A"/>
-                </a:solidFill>
-                <a:latin typeface="Microsoft YaHei"/>
-                <a:ea typeface="Microsoft YaHei"/>
-              </a:rPr>
-              <a:t>-gateway </a:t>
-            </a:r>
-            <a:r>
-              <a:rPr lang="zh-CN" sz="1425" b="1" dirty="0">
-                <a:solidFill>
-                  <a:srgbClr val="1F3A8A"/>
-                </a:solidFill>
-                <a:latin typeface="Microsoft YaHei"/>
-                <a:ea typeface="Microsoft YaHei"/>
-              </a:rPr>
-              <a:t>一览</a:t>
-            </a:r>
-            <a:endParaRPr dirty="0"/>
-          </a:p>
-        </p:txBody>
-      </p:sp>
-      <p:sp>
-        <p:nvSpPr>
-          <p:cNvPr id="278" name="文本框 277" descr="{&quot;isTemplate&quot;:true,&quot;type&quot;:&quot;text&quot;}"/>
-          <p:cNvSpPr txBox="1"/>
-          <p:nvPr/>
-        </p:nvSpPr>
-        <p:spPr>
-          <a:xfrm>
-            <a:off x="1295400" y="2905125"/>
-            <a:ext cx="10267950" cy="152400"/>
-          </a:xfrm>
-          <a:prstGeom prst="rect">
-            <a:avLst/>
-          </a:prstGeom>
-        </p:spPr>
-        <p:txBody>
-          <a:bodyPr wrap="none" lIns="0" tIns="0" rIns="0" bIns="0"/>
-          <a:lstStyle/>
-          <a:p>
-            <a:pPr>
-              <a:lnSpc>
-                <a:spcPct val="100000"/>
-              </a:lnSpc>
-            </a:pPr>
-            <a:r>
-              <a:rPr lang="zh-CN" sz="975">
-                <a:solidFill>
-                  <a:srgbClr val="64748B"/>
-                </a:solidFill>
-                <a:latin typeface="Microsoft YaHei"/>
-                <a:ea typeface="Microsoft YaHei"/>
-              </a:rPr>
-              <a:t>是什么、长什么样、能干什么</a:t>
-            </a:r>
-            <a:endParaRPr/>
-          </a:p>
-        </p:txBody>
-      </p:sp>
-      <p:sp>
-        <p:nvSpPr>
-          <p:cNvPr id="279" name="矩形: 圆角 278"/>
-          <p:cNvSpPr/>
-          <p:nvPr/>
-        </p:nvSpPr>
-        <p:spPr>
-          <a:xfrm>
-            <a:off x="476250" y="3248025"/>
-            <a:ext cx="11239500" cy="542925"/>
-          </a:xfrm>
-          <a:prstGeom prst="roundRect">
-            <a:avLst>
-              <a:gd name="adj" fmla="val 14035"/>
-            </a:avLst>
-          </a:prstGeom>
-          <a:solidFill>
-            <a:srgbClr val="F8FAFC"/>
-          </a:solidFill>
-          <a:ln/>
-        </p:spPr>
-        <p:txBody>
-          <a:bodyPr/>
-          <a:lstStyle/>
-          <a:p>
-            <a:endParaRPr/>
-          </a:p>
-        </p:txBody>
-      </p:sp>
-      <p:sp>
-        <p:nvSpPr>
-          <p:cNvPr id="280" name="文本框 279" descr="{&quot;isTemplate&quot;:true,&quot;type&quot;:&quot;text&quot;}"/>
-          <p:cNvSpPr txBox="1"/>
-          <p:nvPr/>
-        </p:nvSpPr>
-        <p:spPr>
-          <a:xfrm>
-            <a:off x="628650" y="3381375"/>
-            <a:ext cx="666750" cy="276225"/>
-          </a:xfrm>
-          <a:prstGeom prst="rect">
-            <a:avLst/>
-          </a:prstGeom>
-        </p:spPr>
-        <p:txBody>
-          <a:bodyPr wrap="none" lIns="0" tIns="0" rIns="0" bIns="0"/>
-          <a:lstStyle/>
-          <a:p>
-            <a:pPr>
-              <a:lnSpc>
-                <a:spcPct val="100000"/>
-              </a:lnSpc>
-            </a:pPr>
-            <a:r>
-              <a:rPr lang="en-US" sz="1800" b="1">
-                <a:solidFill>
-                  <a:srgbClr val="0EA5E9"/>
-                </a:solidFill>
-                <a:latin typeface="Microsoft YaHei"/>
-                <a:ea typeface="Microsoft YaHei"/>
-              </a:rPr>
-              <a:t>04</a:t>
-            </a:r>
-            <a:endParaRPr/>
-          </a:p>
-        </p:txBody>
-      </p:sp>
-      <p:sp>
-        <p:nvSpPr>
-          <p:cNvPr id="281" name="文本框 280" descr="{&quot;isTemplate&quot;:true,&quot;type&quot;:&quot;text&quot;}"/>
-          <p:cNvSpPr txBox="1"/>
-          <p:nvPr/>
-        </p:nvSpPr>
-        <p:spPr>
-          <a:xfrm>
-            <a:off x="1295400" y="3324225"/>
-            <a:ext cx="10267950" cy="219075"/>
-          </a:xfrm>
-          <a:prstGeom prst="rect">
-            <a:avLst/>
-          </a:prstGeom>
-        </p:spPr>
-        <p:txBody>
-          <a:bodyPr wrap="none" lIns="0" tIns="0" rIns="0" bIns="0"/>
-          <a:lstStyle/>
-          <a:p>
-            <a:pPr>
-              <a:lnSpc>
-                <a:spcPct val="100000"/>
-              </a:lnSpc>
-            </a:pPr>
-            <a:r>
-              <a:rPr lang="zh-CN" sz="1425" b="1">
-                <a:solidFill>
-                  <a:srgbClr val="1F3A8A"/>
-                </a:solidFill>
-                <a:latin typeface="Microsoft YaHei"/>
-                <a:ea typeface="Microsoft YaHei"/>
-              </a:rPr>
-              <a:t>企业</a:t>
-            </a:r>
-            <a:r>
-              <a:rPr lang="en-US" sz="1425" b="1">
-                <a:solidFill>
-                  <a:srgbClr val="1F3A8A"/>
-                </a:solidFill>
-                <a:latin typeface="Microsoft YaHei"/>
-                <a:ea typeface="Microsoft YaHei"/>
-              </a:rPr>
-              <a:t> AI </a:t>
-            </a:r>
-            <a:r>
-              <a:rPr lang="zh-CN" sz="1425" b="1">
-                <a:solidFill>
-                  <a:srgbClr val="1F3A8A"/>
-                </a:solidFill>
-                <a:latin typeface="Microsoft YaHei"/>
-                <a:ea typeface="Microsoft YaHei"/>
-              </a:rPr>
-              <a:t>应用场景</a:t>
-            </a:r>
-            <a:endParaRPr/>
-          </a:p>
-        </p:txBody>
-      </p:sp>
-      <p:sp>
-        <p:nvSpPr>
-          <p:cNvPr id="282" name="文本框 281" descr="{&quot;isTemplate&quot;:true,&quot;type&quot;:&quot;text&quot;}"/>
-          <p:cNvSpPr txBox="1"/>
-          <p:nvPr/>
-        </p:nvSpPr>
-        <p:spPr>
-          <a:xfrm>
-            <a:off x="1295400" y="3562350"/>
-            <a:ext cx="10267950" cy="152400"/>
-          </a:xfrm>
-          <a:prstGeom prst="rect">
-            <a:avLst/>
-          </a:prstGeom>
-        </p:spPr>
-        <p:txBody>
-          <a:bodyPr wrap="none" lIns="0" tIns="0" rIns="0" bIns="0"/>
-          <a:lstStyle/>
-          <a:p>
-            <a:pPr>
-              <a:lnSpc>
-                <a:spcPct val="100000"/>
-              </a:lnSpc>
-            </a:pPr>
-            <a:r>
-              <a:rPr lang="zh-CN" sz="975">
-                <a:solidFill>
-                  <a:srgbClr val="64748B"/>
-                </a:solidFill>
-                <a:latin typeface="Microsoft YaHei"/>
-                <a:ea typeface="Microsoft YaHei"/>
-              </a:rPr>
-              <a:t>内网</a:t>
-            </a:r>
-            <a:r>
-              <a:rPr lang="en-US" sz="975">
-                <a:solidFill>
-                  <a:srgbClr val="64748B"/>
-                </a:solidFill>
-                <a:latin typeface="Microsoft YaHei"/>
-                <a:ea typeface="Microsoft YaHei"/>
-              </a:rPr>
-              <a:t>-</a:t>
-            </a:r>
-            <a:r>
-              <a:rPr lang="zh-CN" sz="975">
-                <a:solidFill>
-                  <a:srgbClr val="64748B"/>
-                </a:solidFill>
-                <a:latin typeface="Microsoft YaHei"/>
-                <a:ea typeface="Microsoft YaHei"/>
-              </a:rPr>
-              <a:t>自有大模型</a:t>
-            </a:r>
-            <a:r>
-              <a:rPr lang="en-US" sz="975">
-                <a:solidFill>
-                  <a:srgbClr val="64748B"/>
-                </a:solidFill>
-                <a:latin typeface="Microsoft YaHei"/>
-                <a:ea typeface="Microsoft YaHei"/>
-              </a:rPr>
-              <a:t> vs </a:t>
-            </a:r>
-            <a:r>
-              <a:rPr lang="zh-CN" sz="975">
-                <a:solidFill>
-                  <a:srgbClr val="64748B"/>
-                </a:solidFill>
-                <a:latin typeface="Microsoft YaHei"/>
-                <a:ea typeface="Microsoft YaHei"/>
-              </a:rPr>
-              <a:t>外网</a:t>
-            </a:r>
-            <a:r>
-              <a:rPr lang="en-US" sz="975">
-                <a:solidFill>
-                  <a:srgbClr val="64748B"/>
-                </a:solidFill>
-                <a:latin typeface="Microsoft YaHei"/>
-                <a:ea typeface="Microsoft YaHei"/>
-              </a:rPr>
-              <a:t>-</a:t>
-            </a:r>
-            <a:r>
-              <a:rPr lang="zh-CN" sz="975">
-                <a:solidFill>
-                  <a:srgbClr val="64748B"/>
-                </a:solidFill>
-                <a:latin typeface="Microsoft YaHei"/>
-                <a:ea typeface="Microsoft YaHei"/>
-              </a:rPr>
-              <a:t>云端大模型</a:t>
-            </a:r>
-            <a:endParaRPr/>
-          </a:p>
-        </p:txBody>
-      </p:sp>
-      <p:sp>
-        <p:nvSpPr>
-          <p:cNvPr id="283" name="矩形: 圆角 282"/>
-          <p:cNvSpPr/>
-          <p:nvPr/>
-        </p:nvSpPr>
-        <p:spPr>
-          <a:xfrm>
-            <a:off x="476250" y="3905250"/>
-            <a:ext cx="11239500" cy="542925"/>
-          </a:xfrm>
-          <a:prstGeom prst="roundRect">
-            <a:avLst>
-              <a:gd name="adj" fmla="val 14035"/>
-            </a:avLst>
-          </a:prstGeom>
-          <a:solidFill>
-            <a:srgbClr val="F8FAFC"/>
-          </a:solidFill>
-          <a:ln/>
-        </p:spPr>
-        <p:txBody>
-          <a:bodyPr/>
-          <a:lstStyle/>
-          <a:p>
-            <a:endParaRPr/>
-          </a:p>
-        </p:txBody>
-      </p:sp>
-      <p:sp>
-        <p:nvSpPr>
-          <p:cNvPr id="284" name="文本框 283" descr="{&quot;isTemplate&quot;:true,&quot;type&quot;:&quot;text&quot;}"/>
-          <p:cNvSpPr txBox="1"/>
-          <p:nvPr/>
-        </p:nvSpPr>
-        <p:spPr>
-          <a:xfrm>
-            <a:off x="628650" y="4038600"/>
-            <a:ext cx="666750" cy="276225"/>
-          </a:xfrm>
-          <a:prstGeom prst="rect">
-            <a:avLst/>
-          </a:prstGeom>
-        </p:spPr>
-        <p:txBody>
-          <a:bodyPr wrap="none" lIns="0" tIns="0" rIns="0" bIns="0"/>
-          <a:lstStyle/>
-          <a:p>
-            <a:pPr>
-              <a:lnSpc>
-                <a:spcPct val="100000"/>
-              </a:lnSpc>
-            </a:pPr>
-            <a:r>
-              <a:rPr lang="en-US" sz="1800" b="1">
-                <a:solidFill>
-                  <a:srgbClr val="0EA5E9"/>
-                </a:solidFill>
-                <a:latin typeface="Microsoft YaHei"/>
-                <a:ea typeface="Microsoft YaHei"/>
-              </a:rPr>
-              <a:t>05</a:t>
-            </a:r>
-            <a:endParaRPr/>
-          </a:p>
-        </p:txBody>
-      </p:sp>
-      <p:sp>
-        <p:nvSpPr>
-          <p:cNvPr id="285" name="文本框 284" descr="{&quot;isTemplate&quot;:true,&quot;type&quot;:&quot;text&quot;}"/>
-          <p:cNvSpPr txBox="1"/>
-          <p:nvPr/>
-        </p:nvSpPr>
-        <p:spPr>
-          <a:xfrm>
-            <a:off x="1295400" y="3981450"/>
-            <a:ext cx="10267950" cy="219075"/>
-          </a:xfrm>
-          <a:prstGeom prst="rect">
-            <a:avLst/>
-          </a:prstGeom>
-        </p:spPr>
-        <p:txBody>
-          <a:bodyPr wrap="none" lIns="0" tIns="0" rIns="0" bIns="0"/>
-          <a:lstStyle/>
-          <a:p>
-            <a:pPr>
-              <a:lnSpc>
-                <a:spcPct val="100000"/>
-              </a:lnSpc>
-            </a:pPr>
-            <a:r>
-              <a:rPr lang="zh-CN" sz="1425" b="1">
-                <a:solidFill>
-                  <a:srgbClr val="1F3A8A"/>
-                </a:solidFill>
-                <a:latin typeface="Microsoft YaHei"/>
-                <a:ea typeface="Microsoft YaHei"/>
-              </a:rPr>
-              <a:t>企业</a:t>
-            </a:r>
-            <a:r>
-              <a:rPr lang="en-US" sz="1425" b="1">
-                <a:solidFill>
-                  <a:srgbClr val="1F3A8A"/>
-                </a:solidFill>
-                <a:latin typeface="Microsoft YaHei"/>
-                <a:ea typeface="Microsoft YaHei"/>
-              </a:rPr>
-              <a:t> AI </a:t>
-            </a:r>
-            <a:r>
-              <a:rPr lang="zh-CN" sz="1425" b="1">
-                <a:solidFill>
-                  <a:srgbClr val="1F3A8A"/>
-                </a:solidFill>
-                <a:latin typeface="Microsoft YaHei"/>
-                <a:ea typeface="Microsoft YaHei"/>
-              </a:rPr>
-              <a:t>应用落地</a:t>
-            </a:r>
-            <a:endParaRPr/>
-          </a:p>
-        </p:txBody>
-      </p:sp>
-      <p:sp>
-        <p:nvSpPr>
-          <p:cNvPr id="286" name="文本框 285" descr="{&quot;isTemplate&quot;:true,&quot;type&quot;:&quot;text&quot;}"/>
-          <p:cNvSpPr txBox="1"/>
-          <p:nvPr/>
-        </p:nvSpPr>
-        <p:spPr>
-          <a:xfrm>
-            <a:off x="1295400" y="4219575"/>
-            <a:ext cx="10267950" cy="152400"/>
-          </a:xfrm>
-          <a:prstGeom prst="rect">
-            <a:avLst/>
-          </a:prstGeom>
-        </p:spPr>
-        <p:txBody>
-          <a:bodyPr wrap="none" lIns="0" tIns="0" rIns="0" bIns="0"/>
-          <a:lstStyle/>
-          <a:p>
-            <a:pPr>
-              <a:lnSpc>
-                <a:spcPct val="100000"/>
-              </a:lnSpc>
-            </a:pPr>
-            <a:r>
-              <a:rPr lang="en-US" sz="975">
-                <a:solidFill>
-                  <a:srgbClr val="64748B"/>
-                </a:solidFill>
-                <a:latin typeface="Microsoft YaHei"/>
-                <a:ea typeface="Microsoft YaHei"/>
-              </a:rPr>
-              <a:t>5 </a:t>
-            </a:r>
-            <a:r>
-              <a:rPr lang="zh-CN" sz="975">
-                <a:solidFill>
-                  <a:srgbClr val="64748B"/>
-                </a:solidFill>
-                <a:latin typeface="Microsoft YaHei"/>
-                <a:ea typeface="Microsoft YaHei"/>
-              </a:rPr>
-              <a:t>个关键抓手，让网关从</a:t>
-            </a:r>
-            <a:r>
-              <a:rPr lang="en-US" sz="975">
-                <a:solidFill>
-                  <a:srgbClr val="64748B"/>
-                </a:solidFill>
-                <a:latin typeface="Microsoft YaHei"/>
-                <a:ea typeface="Microsoft YaHei"/>
-              </a:rPr>
-              <a:t>"</a:t>
-            </a:r>
-            <a:r>
-              <a:rPr lang="zh-CN" sz="975">
-                <a:solidFill>
-                  <a:srgbClr val="64748B"/>
-                </a:solidFill>
-                <a:latin typeface="Microsoft YaHei"/>
-                <a:ea typeface="Microsoft YaHei"/>
-              </a:rPr>
-              <a:t>装上</a:t>
-            </a:r>
-            <a:r>
-              <a:rPr lang="en-US" sz="975">
-                <a:solidFill>
-                  <a:srgbClr val="64748B"/>
-                </a:solidFill>
-                <a:latin typeface="Microsoft YaHei"/>
-                <a:ea typeface="Microsoft YaHei"/>
-              </a:rPr>
-              <a:t>"</a:t>
-            </a:r>
-            <a:r>
-              <a:rPr lang="zh-CN" sz="975">
-                <a:solidFill>
-                  <a:srgbClr val="64748B"/>
-                </a:solidFill>
-                <a:latin typeface="Microsoft YaHei"/>
-                <a:ea typeface="Microsoft YaHei"/>
-              </a:rPr>
-              <a:t>到</a:t>
-            </a:r>
-            <a:r>
-              <a:rPr lang="en-US" sz="975">
-                <a:solidFill>
-                  <a:srgbClr val="64748B"/>
-                </a:solidFill>
-                <a:latin typeface="Microsoft YaHei"/>
-                <a:ea typeface="Microsoft YaHei"/>
-              </a:rPr>
-              <a:t>"</a:t>
-            </a:r>
-            <a:r>
-              <a:rPr lang="zh-CN" sz="975">
-                <a:solidFill>
-                  <a:srgbClr val="64748B"/>
-                </a:solidFill>
-                <a:latin typeface="Microsoft YaHei"/>
-                <a:ea typeface="Microsoft YaHei"/>
-              </a:rPr>
-              <a:t>用顺</a:t>
-            </a:r>
-            <a:r>
-              <a:rPr lang="en-US" sz="975">
-                <a:solidFill>
-                  <a:srgbClr val="64748B"/>
-                </a:solidFill>
-                <a:latin typeface="Microsoft YaHei"/>
-                <a:ea typeface="Microsoft YaHei"/>
-              </a:rPr>
-              <a:t>"</a:t>
-            </a:r>
-            <a:endParaRPr/>
-          </a:p>
-        </p:txBody>
-      </p:sp>
-      <p:sp>
-        <p:nvSpPr>
-          <p:cNvPr id="287" name="矩形: 圆角 286"/>
-          <p:cNvSpPr/>
-          <p:nvPr/>
-        </p:nvSpPr>
-        <p:spPr>
-          <a:xfrm>
-            <a:off x="476250" y="4562475"/>
-            <a:ext cx="11239500" cy="542925"/>
-          </a:xfrm>
-          <a:prstGeom prst="roundRect">
-            <a:avLst>
-              <a:gd name="adj" fmla="val 14035"/>
-            </a:avLst>
-          </a:prstGeom>
-          <a:solidFill>
-            <a:srgbClr val="F8FAFC"/>
-          </a:solidFill>
-          <a:ln/>
-        </p:spPr>
-        <p:txBody>
-          <a:bodyPr/>
-          <a:lstStyle/>
-          <a:p>
-            <a:endParaRPr/>
-          </a:p>
-        </p:txBody>
-      </p:sp>
-      <p:sp>
-        <p:nvSpPr>
-          <p:cNvPr id="288" name="文本框 287" descr="{&quot;isTemplate&quot;:true,&quot;type&quot;:&quot;text&quot;}"/>
-          <p:cNvSpPr txBox="1"/>
-          <p:nvPr/>
-        </p:nvSpPr>
-        <p:spPr>
-          <a:xfrm>
-            <a:off x="628650" y="4695825"/>
-            <a:ext cx="666750" cy="276225"/>
-          </a:xfrm>
-          <a:prstGeom prst="rect">
-            <a:avLst/>
-          </a:prstGeom>
-        </p:spPr>
-        <p:txBody>
-          <a:bodyPr wrap="none" lIns="0" tIns="0" rIns="0" bIns="0"/>
-          <a:lstStyle/>
-          <a:p>
-            <a:pPr>
-              <a:lnSpc>
-                <a:spcPct val="100000"/>
-              </a:lnSpc>
-            </a:pPr>
-            <a:r>
-              <a:rPr lang="en-US" sz="1800" b="1">
-                <a:solidFill>
-                  <a:srgbClr val="0EA5E9"/>
-                </a:solidFill>
-                <a:latin typeface="Microsoft YaHei"/>
-                <a:ea typeface="Microsoft YaHei"/>
-              </a:rPr>
-              <a:t>06</a:t>
-            </a:r>
-            <a:endParaRPr/>
-          </a:p>
-        </p:txBody>
-      </p:sp>
-      <p:sp>
-        <p:nvSpPr>
-          <p:cNvPr id="289" name="文本框 288" descr="{&quot;isTemplate&quot;:true,&quot;type&quot;:&quot;text&quot;}"/>
-          <p:cNvSpPr txBox="1"/>
-          <p:nvPr/>
-        </p:nvSpPr>
-        <p:spPr>
-          <a:xfrm>
-            <a:off x="1295400" y="4638675"/>
-            <a:ext cx="10267950" cy="219075"/>
-          </a:xfrm>
-          <a:prstGeom prst="rect">
-            <a:avLst/>
-          </a:prstGeom>
-        </p:spPr>
-        <p:txBody>
-          <a:bodyPr wrap="none" lIns="0" tIns="0" rIns="0" bIns="0"/>
-          <a:lstStyle/>
-          <a:p>
-            <a:pPr>
-              <a:lnSpc>
-                <a:spcPct val="100000"/>
-              </a:lnSpc>
-            </a:pPr>
-            <a:r>
-              <a:rPr lang="zh-CN" sz="1425" b="1">
-                <a:solidFill>
-                  <a:srgbClr val="1F3A8A"/>
-                </a:solidFill>
-                <a:latin typeface="Microsoft YaHei"/>
-                <a:ea typeface="Microsoft YaHei"/>
-              </a:rPr>
-              <a:t>边界与展望</a:t>
-            </a:r>
-            <a:endParaRPr/>
-          </a:p>
-        </p:txBody>
-      </p:sp>
-      <p:sp>
-        <p:nvSpPr>
-          <p:cNvPr id="290" name="文本框 289" descr="{&quot;isTemplate&quot;:true,&quot;type&quot;:&quot;text&quot;}"/>
-          <p:cNvSpPr txBox="1"/>
-          <p:nvPr/>
-        </p:nvSpPr>
-        <p:spPr>
-          <a:xfrm>
-            <a:off x="1295400" y="4876800"/>
-            <a:ext cx="10267950" cy="152400"/>
-          </a:xfrm>
-          <a:prstGeom prst="rect">
-            <a:avLst/>
-          </a:prstGeom>
-        </p:spPr>
-        <p:txBody>
-          <a:bodyPr wrap="none" lIns="0" tIns="0" rIns="0" bIns="0"/>
-          <a:lstStyle/>
-          <a:p>
-            <a:pPr>
-              <a:lnSpc>
-                <a:spcPct val="100000"/>
-              </a:lnSpc>
-            </a:pPr>
-            <a:r>
-              <a:rPr lang="zh-CN" sz="975">
-                <a:solidFill>
-                  <a:srgbClr val="64748B"/>
-                </a:solidFill>
-                <a:latin typeface="Microsoft YaHei"/>
-                <a:ea typeface="Microsoft YaHei"/>
-              </a:rPr>
-              <a:t>诚实的边界</a:t>
-            </a:r>
-            <a:r>
-              <a:rPr lang="en-US" sz="975">
-                <a:solidFill>
-                  <a:srgbClr val="64748B"/>
-                </a:solidFill>
-                <a:latin typeface="Microsoft YaHei"/>
-                <a:ea typeface="Microsoft YaHei"/>
-              </a:rPr>
-              <a:t> = </a:t>
-            </a:r>
-            <a:r>
-              <a:rPr lang="zh-CN" sz="975">
-                <a:solidFill>
-                  <a:srgbClr val="64748B"/>
-                </a:solidFill>
-                <a:latin typeface="Microsoft YaHei"/>
-                <a:ea typeface="Microsoft YaHei"/>
-              </a:rPr>
-              <a:t>可信的产品</a:t>
+              <a:t>github.com/boonya-hrgk/llm-api-gateway</a:t>
             </a:r>
             <a:endParaRPr/>
           </a:p>
@@ -14451,6 +16391,199 @@
 </file>
 
 <file path=ppt/slides/slide3.xml><?xml version="1.0" encoding="utf-8"?>
+<p:sld xmlns:a="http://schemas.openxmlformats.org/drawingml/2006/main" xmlns:r="http://schemas.openxmlformats.org/officeDocument/2006/relationships" xmlns:p="http://schemas.openxmlformats.org/presentationml/2006/main">
+  <p:cSld>
+    <p:spTree>
+      <p:nvGrpSpPr>
+        <p:cNvPr id="1" name="" descr="&lt;Slide&gt;&#10;  &lt;Box style={{&#10;    width: '100%',&#10;    height: '100%',&#10;    backgroundColor: '#1F3A8A',&#10;    padding: 80,&#10;    display: 'flex',&#10;    flexDirection: 'column',&#10;    justifyContent: 'center',&#10;    alignItems: 'center',&#10;  }}&gt;&#10;    &lt;Text style={{&#10;      fontSize: 14,&#10;      color: '#0EA5E9',&#10;      letterSpacing: 4,&#10;      marginBottom: 24,&#10;    }}&gt;&#10;      PART 01&#10;    &lt;/Text&gt;&#10;    &lt;Text style={{&#10;      fontSize: 72,&#10;      fontWeight: 'bold',&#10;      color: '#FFFFFF',&#10;      textAlign: 'center',&#10;      marginBottom: 24,&#10;    }}&gt;&#10;      背景与定位&#10;    &lt;/Text&gt;&#10;    &lt;Box style={{&#10;      width: 80,&#10;      height: 4,&#10;      backgroundColor: '#0EA5E9',&#10;      marginBottom: 24,&#10;    }} /&gt;&#10;    &lt;Text style={{&#10;      fontSize: 22,&#10;      color: '#CBD5E1',&#10;      textAlign: 'center',&#10;    }}&gt;&#10;      三个&quot;裸奔&quot;现状 · 自用网关，不卖算力&#10;    &lt;/Text&gt;&#10;  &lt;/Box&gt;&#10;&lt;/Slide&gt;&#10;"/>
+        <p:cNvGrpSpPr/>
+        <p:nvPr/>
+      </p:nvGrpSpPr>
+      <p:grpSpPr>
+        <a:xfrm>
+          <a:off x="0" y="0"/>
+          <a:ext cx="0" cy="0"/>
+          <a:chOff x="0" y="0"/>
+          <a:chExt cx="0" cy="0"/>
+        </a:xfrm>
+      </p:grpSpPr>
+      <p:sp>
+        <p:nvSpPr>
+          <p:cNvPr id="9000" name="矩形 8999"/>
+          <p:cNvSpPr/>
+          <p:nvPr/>
+        </p:nvSpPr>
+        <p:spPr>
+          <a:xfrm>
+            <a:off x="0" y="0"/>
+            <a:ext cx="12192000" cy="6858000"/>
+          </a:xfrm>
+          <a:prstGeom prst="rect">
+            <a:avLst/>
+          </a:prstGeom>
+          <a:solidFill>
+            <a:srgbClr val="1F3A8A"/>
+          </a:solidFill>
+          <a:ln/>
+        </p:spPr>
+        <p:txBody>
+          <a:bodyPr/>
+          <a:lstStyle/>
+          <a:p>
+            <a:endParaRPr/>
+          </a:p>
+        </p:txBody>
+      </p:sp>
+      <p:sp>
+        <p:nvSpPr>
+          <p:cNvPr id="9001" name="文本框 9000" descr="{&quot;isTemplate&quot;:true,&quot;type&quot;:&quot;text&quot;}"/>
+          <p:cNvSpPr txBox="1"/>
+          <p:nvPr/>
+        </p:nvSpPr>
+        <p:spPr>
+          <a:xfrm>
+            <a:off x="5695950" y="2447925"/>
+            <a:ext cx="809625" cy="161925"/>
+          </a:xfrm>
+          <a:prstGeom prst="rect">
+            <a:avLst/>
+          </a:prstGeom>
+        </p:spPr>
+        <p:txBody>
+          <a:bodyPr wrap="none" lIns="0" tIns="0" rIns="0" bIns="0"/>
+          <a:lstStyle/>
+          <a:p>
+            <a:pPr>
+              <a:lnSpc>
+                <a:spcPct val="100000"/>
+              </a:lnSpc>
+            </a:pPr>
+            <a:r>
+              <a:rPr lang="en-US" sz="1050" spc="300">
+                <a:solidFill>
+                  <a:srgbClr val="0EA5E9"/>
+                </a:solidFill>
+                <a:latin typeface="Microsoft YaHei"/>
+                <a:ea typeface="Microsoft YaHei"/>
+              </a:rPr>
+              <a:t>PART 01</a:t>
+            </a:r>
+            <a:endParaRPr/>
+          </a:p>
+        </p:txBody>
+      </p:sp>
+      <p:sp>
+        <p:nvSpPr>
+          <p:cNvPr id="9002" name="文本框 9001" descr="{&quot;isTemplate&quot;:true,&quot;type&quot;:&quot;text&quot;}"/>
+          <p:cNvSpPr txBox="1"/>
+          <p:nvPr/>
+        </p:nvSpPr>
+        <p:spPr>
+          <a:xfrm>
+            <a:off x="3457575" y="2838450"/>
+            <a:ext cx="5276850" cy="828675"/>
+          </a:xfrm>
+          <a:prstGeom prst="rect">
+            <a:avLst/>
+          </a:prstGeom>
+        </p:spPr>
+        <p:txBody>
+          <a:bodyPr wrap="none" lIns="0" tIns="0" rIns="0" bIns="0"/>
+          <a:lstStyle/>
+          <a:p>
+            <a:pPr algn="ctr">
+              <a:lnSpc>
+                <a:spcPct val="100000"/>
+              </a:lnSpc>
+            </a:pPr>
+            <a:r>
+              <a:rPr lang="zh-CN" sz="5400" b="1">
+                <a:solidFill>
+                  <a:srgbClr val="FFFFFF"/>
+                </a:solidFill>
+                <a:latin typeface="Microsoft YaHei"/>
+                <a:ea typeface="Microsoft YaHei"/>
+              </a:rPr>
+              <a:t>背景与定位</a:t>
+            </a:r>
+            <a:endParaRPr/>
+          </a:p>
+        </p:txBody>
+      </p:sp>
+      <p:sp>
+        <p:nvSpPr>
+          <p:cNvPr id="9003" name="矩形 9002"/>
+          <p:cNvSpPr/>
+          <p:nvPr/>
+        </p:nvSpPr>
+        <p:spPr>
+          <a:xfrm>
+            <a:off x="5715000" y="3895725"/>
+            <a:ext cx="762000" cy="38100"/>
+          </a:xfrm>
+          <a:prstGeom prst="rect">
+            <a:avLst/>
+          </a:prstGeom>
+          <a:solidFill>
+            <a:srgbClr val="0EA5E9"/>
+          </a:solidFill>
+          <a:ln/>
+        </p:spPr>
+        <p:txBody>
+          <a:bodyPr/>
+          <a:lstStyle/>
+          <a:p>
+            <a:endParaRPr/>
+          </a:p>
+        </p:txBody>
+      </p:sp>
+      <p:sp>
+        <p:nvSpPr>
+          <p:cNvPr id="9004" name="文本框 9003" descr="{&quot;isTemplate&quot;:true,&quot;type&quot;:&quot;text&quot;}"/>
+          <p:cNvSpPr txBox="1"/>
+          <p:nvPr/>
+        </p:nvSpPr>
+        <p:spPr>
+          <a:xfrm>
+            <a:off x="3596000" y="4162425"/>
+            <a:ext cx="5000000" cy="257175"/>
+          </a:xfrm>
+          <a:prstGeom prst="rect">
+            <a:avLst/>
+          </a:prstGeom>
+        </p:spPr>
+        <p:txBody>
+          <a:bodyPr wrap="none" lIns="0" tIns="0" rIns="0" bIns="0"/>
+          <a:lstStyle/>
+          <a:p>
+            <a:pPr algn="ctr">
+              <a:lnSpc>
+                <a:spcPct val="100000"/>
+              </a:lnSpc>
+            </a:pPr>
+            <a:r>
+              <a:rPr lang="zh-CN" sz="1650">
+                <a:solidFill>
+                  <a:srgbClr val="CBD5E1"/>
+                </a:solidFill>
+                <a:latin typeface="Microsoft YaHei"/>
+                <a:ea typeface="Microsoft YaHei"/>
+              </a:rPr>
+              <a:t>三个"裸奔"现状 · 自用网关，不卖算力</a:t>
+            </a:r>
+            <a:endParaRPr/>
+          </a:p>
+        </p:txBody>
+      </p:sp>
+    </p:spTree>
+  </p:cSld>
+  <p:clrMapOvr>
+    <a:masterClrMapping/>
+  </p:clrMapOvr>
+</p:sld>
+</file>
+
+<file path=ppt/slides/slide4.xml><?xml version="1.0" encoding="utf-8"?>
 <p:sld xmlns:a="http://schemas.openxmlformats.org/drawingml/2006/main" xmlns:r="http://schemas.openxmlformats.org/officeDocument/2006/relationships" xmlns:p="http://schemas.openxmlformats.org/presentationml/2006/main">
   <p:cSld>
     <p:spTree>
@@ -15444,7 +17577,7 @@
 </p:sld>
 </file>
 
-<file path=ppt/slides/slide4.xml><?xml version="1.0" encoding="utf-8"?>
+<file path=ppt/slides/slide5.xml><?xml version="1.0" encoding="utf-8"?>
 <p:sld xmlns:a="http://schemas.openxmlformats.org/drawingml/2006/main" xmlns:r="http://schemas.openxmlformats.org/officeDocument/2006/relationships" xmlns:p="http://schemas.openxmlformats.org/presentationml/2006/main">
   <p:cSld>
     <p:spTree>
@@ -16225,7 +18358,7 @@
               </a:lnSpc>
             </a:pPr>
             <a:r>
-              <a:rPr lang="zh-CN" sz="1050" spc="150">
+              <a:rPr lang="zh-CN" sz="1050" spc="150" dirty="0">
                 <a:solidFill>
                   <a:srgbClr val="0EA5E9"/>
                 </a:solidFill>
@@ -16235,17 +18368,17 @@
               <a:t>我们</a:t>
             </a:r>
             <a:r>
-              <a:rPr lang="en-US" sz="1050" spc="150">
+              <a:rPr lang="zh-CN" altLang="en-US" sz="1050" spc="150" dirty="0">
                 <a:solidFill>
                   <a:srgbClr val="0EA5E9"/>
                 </a:solidFill>
                 <a:latin typeface="Microsoft YaHei"/>
                 <a:ea typeface="Microsoft YaHei"/>
               </a:rPr>
-              <a:t> </a:t>
-            </a:r>
-            <a:r>
-              <a:rPr lang="zh-CN" sz="1050" spc="150">
+              <a:t>可以</a:t>
+            </a:r>
+            <a:r>
+              <a:rPr lang="zh-CN" sz="1050" spc="150" dirty="0">
                 <a:solidFill>
                   <a:srgbClr val="0EA5E9"/>
                 </a:solidFill>
@@ -16254,7 +18387,17 @@
               </a:rPr>
               <a:t>做</a:t>
             </a:r>
-            <a:endParaRPr/>
+            <a:r>
+              <a:rPr lang="zh-CN" altLang="en-US" sz="1050" spc="150" dirty="0">
+                <a:solidFill>
+                  <a:srgbClr val="0EA5E9"/>
+                </a:solidFill>
+                <a:latin typeface="Microsoft YaHei"/>
+                <a:ea typeface="Microsoft YaHei"/>
+              </a:rPr>
+              <a:t>到</a:t>
+            </a:r>
+            <a:endParaRPr dirty="0"/>
           </a:p>
         </p:txBody>
       </p:sp>
@@ -16910,7 +19053,200 @@
 </p:sld>
 </file>
 
-<file path=ppt/slides/slide5.xml><?xml version="1.0" encoding="utf-8"?>
+<file path=ppt/slides/slide6.xml><?xml version="1.0" encoding="utf-8"?>
+<p:sld xmlns:a="http://schemas.openxmlformats.org/drawingml/2006/main" xmlns:r="http://schemas.openxmlformats.org/officeDocument/2006/relationships" xmlns:p="http://schemas.openxmlformats.org/presentationml/2006/main">
+  <p:cSld>
+    <p:spTree>
+      <p:nvGrpSpPr>
+        <p:cNvPr id="1" name="" descr="&lt;Slide&gt;&#10;  &lt;Box style={{&#10;    width: '100%',&#10;    height: '100%',&#10;    backgroundColor: '#1F3A8A',&#10;    padding: 80,&#10;    display: 'flex',&#10;    flexDirection: 'column',&#10;    justifyContent: 'center',&#10;    alignItems: 'center',&#10;  }}&gt;&#10;    &lt;Text style={{&#10;      fontSize: 14,&#10;      color: '#0EA5E9',&#10;      letterSpacing: 4,&#10;      marginBottom: 24,&#10;    }}&gt;&#10;      PART 02&#10;    &lt;/Text&gt;&#10;    &lt;Text style={{&#10;      fontSize: 72,&#10;      fontWeight: 'bold',&#10;      color: '#FFFFFF',&#10;      textAlign: 'center',&#10;      marginBottom: 24,&#10;    }}&gt;&#10;      项目与架构&#10;    &lt;/Text&gt;&#10;    &lt;Box style={{&#10;      width: 80,&#10;      height: 4,&#10;      backgroundColor: '#0EA5E9',&#10;      marginBottom: 24,&#10;    }} /&gt;&#10;    &lt;Text style={{&#10;      fontSize: 22,&#10;      color: '#CBD5E1',&#10;      textAlign: 'center',&#10;    }}&gt;&#10;      llm-api-gateway 是什么 · 长什么样 · 能干什么&#10;    &lt;/Text&gt;&#10;  &lt;/Box&gt;&#10;&lt;/Slide&gt;&#10;"/>
+        <p:cNvGrpSpPr/>
+        <p:nvPr/>
+      </p:nvGrpSpPr>
+      <p:grpSpPr>
+        <a:xfrm>
+          <a:off x="0" y="0"/>
+          <a:ext cx="0" cy="0"/>
+          <a:chOff x="0" y="0"/>
+          <a:chExt cx="0" cy="0"/>
+        </a:xfrm>
+      </p:grpSpPr>
+      <p:sp>
+        <p:nvSpPr>
+          <p:cNvPr id="9100" name="矩形 9099"/>
+          <p:cNvSpPr/>
+          <p:nvPr/>
+        </p:nvSpPr>
+        <p:spPr>
+          <a:xfrm>
+            <a:off x="0" y="0"/>
+            <a:ext cx="12192000" cy="6858000"/>
+          </a:xfrm>
+          <a:prstGeom prst="rect">
+            <a:avLst/>
+          </a:prstGeom>
+          <a:solidFill>
+            <a:srgbClr val="1F3A8A"/>
+          </a:solidFill>
+          <a:ln/>
+        </p:spPr>
+        <p:txBody>
+          <a:bodyPr/>
+          <a:lstStyle/>
+          <a:p>
+            <a:endParaRPr/>
+          </a:p>
+        </p:txBody>
+      </p:sp>
+      <p:sp>
+        <p:nvSpPr>
+          <p:cNvPr id="9101" name="文本框 9100" descr="{&quot;isTemplate&quot;:true,&quot;type&quot;:&quot;text&quot;}"/>
+          <p:cNvSpPr txBox="1"/>
+          <p:nvPr/>
+        </p:nvSpPr>
+        <p:spPr>
+          <a:xfrm>
+            <a:off x="5695950" y="2447925"/>
+            <a:ext cx="809625" cy="161925"/>
+          </a:xfrm>
+          <a:prstGeom prst="rect">
+            <a:avLst/>
+          </a:prstGeom>
+        </p:spPr>
+        <p:txBody>
+          <a:bodyPr wrap="none" lIns="0" tIns="0" rIns="0" bIns="0"/>
+          <a:lstStyle/>
+          <a:p>
+            <a:pPr>
+              <a:lnSpc>
+                <a:spcPct val="100000"/>
+              </a:lnSpc>
+            </a:pPr>
+            <a:r>
+              <a:rPr lang="en-US" sz="1050" spc="300">
+                <a:solidFill>
+                  <a:srgbClr val="0EA5E9"/>
+                </a:solidFill>
+                <a:latin typeface="Microsoft YaHei"/>
+                <a:ea typeface="Microsoft YaHei"/>
+              </a:rPr>
+              <a:t>PART 02</a:t>
+            </a:r>
+            <a:endParaRPr/>
+          </a:p>
+        </p:txBody>
+      </p:sp>
+      <p:sp>
+        <p:nvSpPr>
+          <p:cNvPr id="9102" name="文本框 9101" descr="{&quot;isTemplate&quot;:true,&quot;type&quot;:&quot;text&quot;}"/>
+          <p:cNvSpPr txBox="1"/>
+          <p:nvPr/>
+        </p:nvSpPr>
+        <p:spPr>
+          <a:xfrm>
+            <a:off x="3457575" y="2838450"/>
+            <a:ext cx="5276850" cy="828675"/>
+          </a:xfrm>
+          <a:prstGeom prst="rect">
+            <a:avLst/>
+          </a:prstGeom>
+        </p:spPr>
+        <p:txBody>
+          <a:bodyPr wrap="none" lIns="0" tIns="0" rIns="0" bIns="0"/>
+          <a:lstStyle/>
+          <a:p>
+            <a:pPr algn="ctr">
+              <a:lnSpc>
+                <a:spcPct val="100000"/>
+              </a:lnSpc>
+            </a:pPr>
+            <a:r>
+              <a:rPr lang="zh-CN" sz="5400" b="1">
+                <a:solidFill>
+                  <a:srgbClr val="FFFFFF"/>
+                </a:solidFill>
+                <a:latin typeface="Microsoft YaHei"/>
+                <a:ea typeface="Microsoft YaHei"/>
+              </a:rPr>
+              <a:t>项目与架构</a:t>
+            </a:r>
+            <a:endParaRPr/>
+          </a:p>
+        </p:txBody>
+      </p:sp>
+      <p:sp>
+        <p:nvSpPr>
+          <p:cNvPr id="9103" name="矩形 9102"/>
+          <p:cNvSpPr/>
+          <p:nvPr/>
+        </p:nvSpPr>
+        <p:spPr>
+          <a:xfrm>
+            <a:off x="5715000" y="3895725"/>
+            <a:ext cx="762000" cy="38100"/>
+          </a:xfrm>
+          <a:prstGeom prst="rect">
+            <a:avLst/>
+          </a:prstGeom>
+          <a:solidFill>
+            <a:srgbClr val="0EA5E9"/>
+          </a:solidFill>
+          <a:ln/>
+        </p:spPr>
+        <p:txBody>
+          <a:bodyPr/>
+          <a:lstStyle/>
+          <a:p>
+            <a:endParaRPr/>
+          </a:p>
+        </p:txBody>
+      </p:sp>
+      <p:sp>
+        <p:nvSpPr>
+          <p:cNvPr id="9104" name="文本框 9103" descr="{&quot;isTemplate&quot;:true,&quot;type&quot;:&quot;text&quot;}"/>
+          <p:cNvSpPr txBox="1"/>
+          <p:nvPr/>
+        </p:nvSpPr>
+        <p:spPr>
+          <a:xfrm>
+            <a:off x="3596000" y="4162425"/>
+            <a:ext cx="5000000" cy="257175"/>
+          </a:xfrm>
+          <a:prstGeom prst="rect">
+            <a:avLst/>
+          </a:prstGeom>
+        </p:spPr>
+        <p:txBody>
+          <a:bodyPr wrap="none" lIns="0" tIns="0" rIns="0" bIns="0"/>
+          <a:lstStyle/>
+          <a:p>
+            <a:pPr algn="ctr">
+              <a:lnSpc>
+                <a:spcPct val="100000"/>
+              </a:lnSpc>
+            </a:pPr>
+            <a:r>
+              <a:rPr lang="zh-CN" sz="1650">
+                <a:solidFill>
+                  <a:srgbClr val="CBD5E1"/>
+                </a:solidFill>
+                <a:latin typeface="Microsoft YaHei"/>
+                <a:ea typeface="Microsoft YaHei"/>
+              </a:rPr>
+              <a:t>llm-api-gateway 是什么 · 长什么样 · 能干什么</a:t>
+            </a:r>
+            <a:endParaRPr/>
+          </a:p>
+        </p:txBody>
+      </p:sp>
+    </p:spTree>
+  </p:cSld>
+  <p:clrMapOvr>
+    <a:masterClrMapping/>
+  </p:clrMapOvr>
+</p:sld>
+</file>
+
+<file path=ppt/slides/slide7.xml><?xml version="1.0" encoding="utf-8"?>
 <p:sld xmlns:a="http://schemas.openxmlformats.org/drawingml/2006/main" xmlns:r="http://schemas.openxmlformats.org/officeDocument/2006/relationships" xmlns:p="http://schemas.openxmlformats.org/presentationml/2006/main">
   <p:cSld>
     <p:spTree>
@@ -17843,7 +20179,7 @@
 </p:sld>
 </file>
 
-<file path=ppt/slides/slide6.xml><?xml version="1.0" encoding="utf-8"?>
+<file path=ppt/slides/slide8.xml><?xml version="1.0" encoding="utf-8"?>
 <p:sld xmlns:a="http://schemas.openxmlformats.org/drawingml/2006/main" xmlns:r="http://schemas.openxmlformats.org/officeDocument/2006/relationships" xmlns:p="http://schemas.openxmlformats.org/presentationml/2006/main">
   <p:cSld>
     <p:spTree>
@@ -18032,502 +20368,510 @@
           </a:p>
         </p:txBody>
       </p:sp>
+      <p:sp>
+        <p:nvSpPr>
+          <p:cNvPr id="368" name="文本框 367" descr="{&quot;isTemplate&quot;:true,&quot;type&quot;:&quot;text&quot;}"/>
+          <p:cNvSpPr txBox="1"/>
+          <p:nvPr/>
+        </p:nvSpPr>
+        <p:spPr>
+          <a:xfrm>
+            <a:off x="7124700" y="1400175"/>
+            <a:ext cx="4591050" cy="590550"/>
+          </a:xfrm>
+          <a:prstGeom prst="rect">
+            <a:avLst/>
+          </a:prstGeom>
+        </p:spPr>
+        <p:txBody>
+          <a:bodyPr wrap="square" lIns="0" tIns="0" rIns="0" bIns="0">
+            <a:normAutofit/>
+          </a:bodyPr>
+          <a:lstStyle/>
+          <a:p>
+            <a:pPr>
+              <a:lnSpc>
+                <a:spcPct val="160000"/>
+              </a:lnSpc>
+            </a:pPr>
+            <a:r>
+              <a:rPr lang="zh-CN" sz="1200">
+                <a:solidFill>
+                  <a:srgbClr val="475569"/>
+                </a:solidFill>
+                <a:latin typeface="Microsoft YaHei"/>
+                <a:ea typeface="Microsoft YaHei"/>
+              </a:rPr>
+              <a:t>调用方拿到的就是一个</a:t>
+            </a:r>
+            <a:r>
+              <a:rPr lang="zh-CN" sz="1200" b="1">
+                <a:solidFill>
+                  <a:srgbClr val="1F3A8A"/>
+                </a:solidFill>
+                <a:latin typeface="Microsoft YaHei"/>
+                <a:ea typeface="Microsoft YaHei"/>
+              </a:rPr>
+              <a:t>标准</a:t>
+            </a:r>
+            <a:r>
+              <a:rPr lang="en-US" sz="1200" b="1">
+                <a:solidFill>
+                  <a:srgbClr val="1F3A8A"/>
+                </a:solidFill>
+                <a:latin typeface="Microsoft YaHei"/>
+                <a:ea typeface="Microsoft YaHei"/>
+              </a:rPr>
+              <a:t> OpenAI </a:t>
+            </a:r>
+            <a:r>
+              <a:rPr lang="zh-CN" sz="1200" b="1">
+                <a:solidFill>
+                  <a:srgbClr val="1F3A8A"/>
+                </a:solidFill>
+                <a:latin typeface="Microsoft YaHei"/>
+                <a:ea typeface="Microsoft YaHei"/>
+              </a:rPr>
+              <a:t>格式的接口</a:t>
+            </a:r>
+            <a:r>
+              <a:rPr lang="zh-CN" sz="1200">
+                <a:solidFill>
+                  <a:srgbClr val="475569"/>
+                </a:solidFill>
+                <a:latin typeface="Microsoft YaHei"/>
+                <a:ea typeface="Microsoft YaHei"/>
+              </a:rPr>
+              <a:t>，体验和直接调官方</a:t>
+            </a:r>
+            <a:r>
+              <a:rPr lang="en-US" sz="1200">
+                <a:solidFill>
+                  <a:srgbClr val="475569"/>
+                </a:solidFill>
+                <a:latin typeface="Microsoft YaHei"/>
+                <a:ea typeface="Microsoft YaHei"/>
+              </a:rPr>
+              <a:t> API </a:t>
+            </a:r>
+            <a:r>
+              <a:rPr lang="zh-CN" sz="1200">
+                <a:solidFill>
+                  <a:srgbClr val="475569"/>
+                </a:solidFill>
+                <a:latin typeface="Microsoft YaHei"/>
+                <a:ea typeface="Microsoft YaHei"/>
+              </a:rPr>
+              <a:t>没区别。</a:t>
+            </a:r>
+            <a:endParaRPr/>
+          </a:p>
+        </p:txBody>
+      </p:sp>
+      <p:sp>
+        <p:nvSpPr>
+          <p:cNvPr id="369" name="矩形: 圆角 368"/>
+          <p:cNvSpPr/>
+          <p:nvPr/>
+        </p:nvSpPr>
+        <p:spPr>
+          <a:xfrm>
+            <a:off x="7124700" y="2105025"/>
+            <a:ext cx="4591050" cy="1657350"/>
+          </a:xfrm>
+          <a:prstGeom prst="roundRect">
+            <a:avLst>
+              <a:gd name="adj" fmla="val 4598"/>
+            </a:avLst>
+          </a:prstGeom>
+          <a:solidFill>
+            <a:srgbClr val="0F172A"/>
+          </a:solidFill>
+          <a:ln/>
+        </p:spPr>
+        <p:txBody>
+          <a:bodyPr/>
+          <a:lstStyle/>
+          <a:p>
+            <a:endParaRPr/>
+          </a:p>
+        </p:txBody>
+      </p:sp>
+      <p:sp>
+        <p:nvSpPr>
+          <p:cNvPr id="370" name="文本框 369" descr="{&quot;isTemplate&quot;:true,&quot;type&quot;:&quot;text&quot;}"/>
+          <p:cNvSpPr txBox="1"/>
+          <p:nvPr/>
+        </p:nvSpPr>
+        <p:spPr>
+          <a:xfrm>
+            <a:off x="7296150" y="2276475"/>
+            <a:ext cx="4248150" cy="133350"/>
+          </a:xfrm>
+          <a:prstGeom prst="rect">
+            <a:avLst/>
+          </a:prstGeom>
+        </p:spPr>
+        <p:txBody>
+          <a:bodyPr wrap="none" lIns="0" tIns="0" rIns="0" bIns="0"/>
+          <a:lstStyle/>
+          <a:p>
+            <a:pPr>
+              <a:lnSpc>
+                <a:spcPct val="100000"/>
+              </a:lnSpc>
+            </a:pPr>
+            <a:r>
+              <a:rPr lang="en-US" sz="825">
+                <a:solidFill>
+                  <a:srgbClr val="94A3B8"/>
+                </a:solidFill>
+                <a:latin typeface="monospace"/>
+                <a:ea typeface="monospace"/>
+              </a:rPr>
+              <a:t>$ curl</a:t>
+            </a:r>
+            <a:endParaRPr/>
+          </a:p>
+        </p:txBody>
+      </p:sp>
+      <p:sp>
+        <p:nvSpPr>
+          <p:cNvPr id="371" name="文本框 370" descr="{&quot;isTemplate&quot;:true,&quot;type&quot;:&quot;text&quot;}"/>
+          <p:cNvSpPr txBox="1"/>
+          <p:nvPr/>
+        </p:nvSpPr>
+        <p:spPr>
+          <a:xfrm>
+            <a:off x="7296150" y="2486025"/>
+            <a:ext cx="4248150" cy="1104900"/>
+          </a:xfrm>
+          <a:prstGeom prst="rect">
+            <a:avLst/>
+          </a:prstGeom>
+        </p:spPr>
+        <p:txBody>
+          <a:bodyPr wrap="none" lIns="0" tIns="0" rIns="0" bIns="0"/>
+          <a:lstStyle/>
+          <a:p>
+            <a:pPr>
+              <a:lnSpc>
+                <a:spcPct val="160000"/>
+              </a:lnSpc>
+            </a:pPr>
+            <a:r>
+              <a:rPr lang="en-US" sz="900">
+                <a:solidFill>
+                  <a:srgbClr val="0EA5E9"/>
+                </a:solidFill>
+                <a:latin typeface="monospace"/>
+                <a:ea typeface="monospace"/>
+              </a:rPr>
+              <a:t>curl</a:t>
+            </a:r>
+            <a:r>
+              <a:rPr lang="en-US" sz="900">
+                <a:solidFill>
+                  <a:srgbClr val="E2E8F0"/>
+                </a:solidFill>
+                <a:latin typeface="monospace"/>
+                <a:ea typeface="monospace"/>
+              </a:rPr>
+              <a:t> http://gateway.</a:t>
+            </a:r>
+            <a:r>
+              <a:rPr lang="zh-CN" sz="900">
+                <a:solidFill>
+                  <a:srgbClr val="E2E8F0"/>
+                </a:solidFill>
+                <a:latin typeface="monospace"/>
+                <a:ea typeface="monospace"/>
+              </a:rPr>
+              <a:t>内网</a:t>
+            </a:r>
+            <a:r>
+              <a:rPr lang="en-US" sz="900">
+                <a:solidFill>
+                  <a:srgbClr val="E2E8F0"/>
+                </a:solidFill>
+                <a:latin typeface="monospace"/>
+                <a:ea typeface="monospace"/>
+              </a:rPr>
+              <a:t>:9000/v1/chat/completions \</a:t>
+            </a:r>
+            <a:endParaRPr/>
+          </a:p>
+          <a:p>
+            <a:pPr>
+              <a:lnSpc>
+                <a:spcPct val="160000"/>
+              </a:lnSpc>
+            </a:pPr>
+            <a:r>
+              <a:rPr lang="en-US" sz="900">
+                <a:solidFill>
+                  <a:srgbClr val="E2E8F0"/>
+                </a:solidFill>
+                <a:latin typeface="monospace"/>
+                <a:ea typeface="monospace"/>
+              </a:rPr>
+              <a:t>  -H </a:t>
+            </a:r>
+            <a:r>
+              <a:rPr lang="en-US" sz="900">
+                <a:solidFill>
+                  <a:srgbClr val="10B981"/>
+                </a:solidFill>
+                <a:latin typeface="monospace"/>
+                <a:ea typeface="monospace"/>
+              </a:rPr>
+              <a:t>"Authorization: Bearer sk-</a:t>
+            </a:r>
+            <a:r>
+              <a:rPr lang="zh-CN" sz="900">
+                <a:solidFill>
+                  <a:srgbClr val="10B981"/>
+                </a:solidFill>
+                <a:latin typeface="monospace"/>
+                <a:ea typeface="monospace"/>
+              </a:rPr>
+              <a:t>张三</a:t>
+            </a:r>
+            <a:r>
+              <a:rPr lang="en-US" sz="900">
+                <a:solidFill>
+                  <a:srgbClr val="10B981"/>
+                </a:solidFill>
+                <a:latin typeface="monospace"/>
+                <a:ea typeface="monospace"/>
+              </a:rPr>
+              <a:t>"</a:t>
+            </a:r>
+            <a:r>
+              <a:rPr lang="en-US" sz="900">
+                <a:solidFill>
+                  <a:srgbClr val="E2E8F0"/>
+                </a:solidFill>
+                <a:latin typeface="monospace"/>
+                <a:ea typeface="monospace"/>
+              </a:rPr>
+              <a:t> \</a:t>
+            </a:r>
+            <a:endParaRPr/>
+          </a:p>
+          <a:p>
+            <a:pPr>
+              <a:lnSpc>
+                <a:spcPct val="160000"/>
+              </a:lnSpc>
+            </a:pPr>
+            <a:r>
+              <a:rPr lang="en-US" sz="900">
+                <a:solidFill>
+                  <a:srgbClr val="E2E8F0"/>
+                </a:solidFill>
+                <a:latin typeface="monospace"/>
+                <a:ea typeface="monospace"/>
+              </a:rPr>
+              <a:t>  -d </a:t>
+            </a:r>
+            <a:r>
+              <a:rPr lang="en-US" sz="900">
+                <a:solidFill>
+                  <a:srgbClr val="10B981"/>
+                </a:solidFill>
+                <a:latin typeface="monospace"/>
+                <a:ea typeface="monospace"/>
+              </a:rPr>
+              <a:t>'{</a:t>
+            </a:r>
+            <a:r>
+              <a:rPr lang="en-US" sz="900">
+                <a:solidFill>
+                  <a:srgbClr val="E2E8F0"/>
+                </a:solidFill>
+                <a:latin typeface="monospace"/>
+                <a:ea typeface="monospace"/>
+              </a:rPr>
+              <a:t>
+  </a:t>
+            </a:r>
+            <a:r>
+              <a:rPr lang="en-US" sz="900">
+                <a:solidFill>
+                  <a:srgbClr val="10B981"/>
+                </a:solidFill>
+                <a:latin typeface="monospace"/>
+                <a:ea typeface="monospace"/>
+              </a:rPr>
+              <a:t>  "model": "deepseek-chat",</a:t>
+            </a:r>
+            <a:endParaRPr/>
+          </a:p>
+          <a:p>
+            <a:pPr>
+              <a:lnSpc>
+                <a:spcPct val="160000"/>
+              </a:lnSpc>
+            </a:pPr>
+            <a:r>
+              <a:rPr lang="en-US" sz="900">
+                <a:solidFill>
+                  <a:srgbClr val="E2E8F0"/>
+                </a:solidFill>
+                <a:latin typeface="monospace"/>
+                <a:ea typeface="monospace"/>
+              </a:rPr>
+              <a:t>  </a:t>
+            </a:r>
+            <a:r>
+              <a:rPr lang="en-US" sz="900">
+                <a:solidFill>
+                  <a:srgbClr val="10B981"/>
+                </a:solidFill>
+                <a:latin typeface="monospace"/>
+                <a:ea typeface="monospace"/>
+              </a:rPr>
+              <a:t>  "messages": [...]</a:t>
+            </a:r>
+            <a:endParaRPr/>
+          </a:p>
+        </p:txBody>
+      </p:sp>
+      <p:sp>
+        <p:nvSpPr>
+          <p:cNvPr id="372" name="文本框 371" descr="{&quot;isTemplate&quot;:true,&quot;type&quot;:&quot;text&quot;}"/>
+          <p:cNvSpPr txBox="1"/>
+          <p:nvPr/>
+        </p:nvSpPr>
+        <p:spPr>
+          <a:xfrm>
+            <a:off x="7124700" y="3876675"/>
+            <a:ext cx="4591050" cy="228600"/>
+          </a:xfrm>
+          <a:prstGeom prst="rect">
+            <a:avLst/>
+          </a:prstGeom>
+        </p:spPr>
+        <p:txBody>
+          <a:bodyPr wrap="none" lIns="0" tIns="0" rIns="0" bIns="0"/>
+          <a:lstStyle/>
+          <a:p>
+            <a:pPr>
+              <a:lnSpc>
+                <a:spcPct val="150000"/>
+              </a:lnSpc>
+            </a:pPr>
+            <a:r>
+              <a:rPr lang="zh-CN" sz="975">
+                <a:solidFill>
+                  <a:srgbClr val="64748B"/>
+                </a:solidFill>
+                <a:latin typeface="Microsoft YaHei"/>
+                <a:ea typeface="Microsoft YaHei"/>
+              </a:rPr>
+              <a:t>改个</a:t>
+            </a:r>
+            <a:r>
+              <a:rPr lang="en-US" sz="975">
+                <a:solidFill>
+                  <a:srgbClr val="64748B"/>
+                </a:solidFill>
+                <a:latin typeface="Microsoft YaHei"/>
+                <a:ea typeface="Microsoft YaHei"/>
+              </a:rPr>
+              <a:t> base_url </a:t>
+            </a:r>
+            <a:r>
+              <a:rPr lang="zh-CN" sz="975">
+                <a:solidFill>
+                  <a:srgbClr val="64748B"/>
+                </a:solidFill>
+                <a:latin typeface="Microsoft YaHei"/>
+                <a:ea typeface="Microsoft YaHei"/>
+              </a:rPr>
+              <a:t>就接上。所有</a:t>
+            </a:r>
+            <a:r>
+              <a:rPr lang="en-US" sz="975">
+                <a:solidFill>
+                  <a:srgbClr val="64748B"/>
+                </a:solidFill>
+                <a:latin typeface="Microsoft YaHei"/>
+                <a:ea typeface="Microsoft YaHei"/>
+              </a:rPr>
+              <a:t>"</a:t>
+            </a:r>
+            <a:r>
+              <a:rPr lang="zh-CN" sz="975">
+                <a:solidFill>
+                  <a:srgbClr val="64748B"/>
+                </a:solidFill>
+                <a:latin typeface="Microsoft YaHei"/>
+                <a:ea typeface="Microsoft YaHei"/>
+              </a:rPr>
+              <a:t>秩序</a:t>
+            </a:r>
+            <a:r>
+              <a:rPr lang="en-US" sz="975">
+                <a:solidFill>
+                  <a:srgbClr val="64748B"/>
+                </a:solidFill>
+                <a:latin typeface="Microsoft YaHei"/>
+                <a:ea typeface="Microsoft YaHei"/>
+              </a:rPr>
+              <a:t>"</a:t>
+            </a:r>
+            <a:r>
+              <a:rPr lang="zh-CN" sz="975">
+                <a:solidFill>
+                  <a:srgbClr val="64748B"/>
+                </a:solidFill>
+                <a:latin typeface="Microsoft YaHei"/>
+                <a:ea typeface="Microsoft YaHei"/>
+              </a:rPr>
+              <a:t>都发生在网关这一层。</a:t>
+            </a:r>
+            <a:endParaRPr/>
+          </a:p>
+        </p:txBody>
+      </p:sp>
       <p:pic>
         <p:nvPicPr>
-          <p:cNvPr id="367" name="图片 366"/>
+          <p:cNvPr id="3" name="图片 2">
+            <a:extLst>
+              <a:ext uri="{FF2B5EF4-FFF2-40B4-BE49-F238E27FC236}">
+                <a16:creationId xmlns:a16="http://schemas.microsoft.com/office/drawing/2014/main" id="{0BA51F5E-5D57-2D03-AF1E-AA52FFFF7899}"/>
+              </a:ext>
+            </a:extLst>
+          </p:cNvPr>
           <p:cNvPicPr>
             <a:picLocks noChangeAspect="1"/>
           </p:cNvPicPr>
           <p:nvPr/>
         </p:nvPicPr>
         <p:blipFill>
-          <a:blip r:embed="rId2"/>
-          <a:srcRect l="9009" r="9009"/>
+          <a:blip r:embed="rId2" cstate="print">
+            <a:extLst>
+              <a:ext uri="{28A0092B-C50C-407E-A947-70E740481C1C}">
+                <a14:useLocalDpi xmlns:a14="http://schemas.microsoft.com/office/drawing/2010/main" val="0"/>
+              </a:ext>
+            </a:extLst>
+          </a:blip>
           <a:stretch>
             <a:fillRect/>
           </a:stretch>
         </p:blipFill>
         <p:spPr>
           <a:xfrm>
-            <a:off x="533400" y="1440392"/>
-            <a:ext cx="6115050" cy="4676775"/>
-          </a:xfrm>
-          <a:prstGeom prst="roundRect">
-            <a:avLst>
-              <a:gd name="adj" fmla="val 1629"/>
-            </a:avLst>
-          </a:prstGeom>
-          <a:ln/>
+            <a:off x="511174" y="1620662"/>
+            <a:ext cx="6137276" cy="4229806"/>
+          </a:xfrm>
+          <a:prstGeom prst="rect">
+            <a:avLst/>
+          </a:prstGeom>
         </p:spPr>
       </p:pic>
-      <p:sp>
-        <p:nvSpPr>
-          <p:cNvPr id="368" name="文本框 367" descr="{&quot;isTemplate&quot;:true,&quot;type&quot;:&quot;text&quot;}"/>
-          <p:cNvSpPr txBox="1"/>
-          <p:nvPr/>
-        </p:nvSpPr>
-        <p:spPr>
-          <a:xfrm>
-            <a:off x="7124700" y="1400175"/>
-            <a:ext cx="4591050" cy="590550"/>
-          </a:xfrm>
-          <a:prstGeom prst="rect">
-            <a:avLst/>
-          </a:prstGeom>
-        </p:spPr>
-        <p:txBody>
-          <a:bodyPr wrap="square" lIns="0" tIns="0" rIns="0" bIns="0">
-            <a:normAutofit/>
-          </a:bodyPr>
-          <a:lstStyle/>
-          <a:p>
-            <a:pPr>
-              <a:lnSpc>
-                <a:spcPct val="160000"/>
-              </a:lnSpc>
-            </a:pPr>
-            <a:r>
-              <a:rPr lang="zh-CN" sz="1200">
-                <a:solidFill>
-                  <a:srgbClr val="475569"/>
-                </a:solidFill>
-                <a:latin typeface="Microsoft YaHei"/>
-                <a:ea typeface="Microsoft YaHei"/>
-              </a:rPr>
-              <a:t>调用方拿到的就是一个</a:t>
-            </a:r>
-            <a:r>
-              <a:rPr lang="zh-CN" sz="1200" b="1">
-                <a:solidFill>
-                  <a:srgbClr val="1F3A8A"/>
-                </a:solidFill>
-                <a:latin typeface="Microsoft YaHei"/>
-                <a:ea typeface="Microsoft YaHei"/>
-              </a:rPr>
-              <a:t>标准</a:t>
-            </a:r>
-            <a:r>
-              <a:rPr lang="en-US" sz="1200" b="1">
-                <a:solidFill>
-                  <a:srgbClr val="1F3A8A"/>
-                </a:solidFill>
-                <a:latin typeface="Microsoft YaHei"/>
-                <a:ea typeface="Microsoft YaHei"/>
-              </a:rPr>
-              <a:t> OpenAI </a:t>
-            </a:r>
-            <a:r>
-              <a:rPr lang="zh-CN" sz="1200" b="1">
-                <a:solidFill>
-                  <a:srgbClr val="1F3A8A"/>
-                </a:solidFill>
-                <a:latin typeface="Microsoft YaHei"/>
-                <a:ea typeface="Microsoft YaHei"/>
-              </a:rPr>
-              <a:t>格式的接口</a:t>
-            </a:r>
-            <a:r>
-              <a:rPr lang="zh-CN" sz="1200">
-                <a:solidFill>
-                  <a:srgbClr val="475569"/>
-                </a:solidFill>
-                <a:latin typeface="Microsoft YaHei"/>
-                <a:ea typeface="Microsoft YaHei"/>
-              </a:rPr>
-              <a:t>，体验和直接调官方</a:t>
-            </a:r>
-            <a:r>
-              <a:rPr lang="en-US" sz="1200">
-                <a:solidFill>
-                  <a:srgbClr val="475569"/>
-                </a:solidFill>
-                <a:latin typeface="Microsoft YaHei"/>
-                <a:ea typeface="Microsoft YaHei"/>
-              </a:rPr>
-              <a:t> API </a:t>
-            </a:r>
-            <a:r>
-              <a:rPr lang="zh-CN" sz="1200">
-                <a:solidFill>
-                  <a:srgbClr val="475569"/>
-                </a:solidFill>
-                <a:latin typeface="Microsoft YaHei"/>
-                <a:ea typeface="Microsoft YaHei"/>
-              </a:rPr>
-              <a:t>没区别。</a:t>
-            </a:r>
-            <a:endParaRPr/>
-          </a:p>
-        </p:txBody>
-      </p:sp>
-      <p:sp>
-        <p:nvSpPr>
-          <p:cNvPr id="369" name="矩形: 圆角 368"/>
-          <p:cNvSpPr/>
-          <p:nvPr/>
-        </p:nvSpPr>
-        <p:spPr>
-          <a:xfrm>
-            <a:off x="7124700" y="2105025"/>
-            <a:ext cx="4591050" cy="1657350"/>
-          </a:xfrm>
-          <a:prstGeom prst="roundRect">
-            <a:avLst>
-              <a:gd name="adj" fmla="val 4598"/>
-            </a:avLst>
-          </a:prstGeom>
-          <a:solidFill>
-            <a:srgbClr val="0F172A"/>
-          </a:solidFill>
-          <a:ln/>
-        </p:spPr>
-        <p:txBody>
-          <a:bodyPr/>
-          <a:lstStyle/>
-          <a:p>
-            <a:endParaRPr/>
-          </a:p>
-        </p:txBody>
-      </p:sp>
-      <p:sp>
-        <p:nvSpPr>
-          <p:cNvPr id="370" name="文本框 369" descr="{&quot;isTemplate&quot;:true,&quot;type&quot;:&quot;text&quot;}"/>
-          <p:cNvSpPr txBox="1"/>
-          <p:nvPr/>
-        </p:nvSpPr>
-        <p:spPr>
-          <a:xfrm>
-            <a:off x="7296150" y="2276475"/>
-            <a:ext cx="4248150" cy="133350"/>
-          </a:xfrm>
-          <a:prstGeom prst="rect">
-            <a:avLst/>
-          </a:prstGeom>
-        </p:spPr>
-        <p:txBody>
-          <a:bodyPr wrap="none" lIns="0" tIns="0" rIns="0" bIns="0"/>
-          <a:lstStyle/>
-          <a:p>
-            <a:pPr>
-              <a:lnSpc>
-                <a:spcPct val="100000"/>
-              </a:lnSpc>
-            </a:pPr>
-            <a:r>
-              <a:rPr lang="en-US" sz="825">
-                <a:solidFill>
-                  <a:srgbClr val="94A3B8"/>
-                </a:solidFill>
-                <a:latin typeface="monospace"/>
-                <a:ea typeface="monospace"/>
-              </a:rPr>
-              <a:t>$ curl</a:t>
-            </a:r>
-            <a:endParaRPr/>
-          </a:p>
-        </p:txBody>
-      </p:sp>
-      <p:sp>
-        <p:nvSpPr>
-          <p:cNvPr id="371" name="文本框 370" descr="{&quot;isTemplate&quot;:true,&quot;type&quot;:&quot;text&quot;}"/>
-          <p:cNvSpPr txBox="1"/>
-          <p:nvPr/>
-        </p:nvSpPr>
-        <p:spPr>
-          <a:xfrm>
-            <a:off x="7296150" y="2486025"/>
-            <a:ext cx="4248150" cy="1104900"/>
-          </a:xfrm>
-          <a:prstGeom prst="rect">
-            <a:avLst/>
-          </a:prstGeom>
-        </p:spPr>
-        <p:txBody>
-          <a:bodyPr wrap="none" lIns="0" tIns="0" rIns="0" bIns="0"/>
-          <a:lstStyle/>
-          <a:p>
-            <a:pPr>
-              <a:lnSpc>
-                <a:spcPct val="160000"/>
-              </a:lnSpc>
-            </a:pPr>
-            <a:r>
-              <a:rPr lang="en-US" sz="900">
-                <a:solidFill>
-                  <a:srgbClr val="0EA5E9"/>
-                </a:solidFill>
-                <a:latin typeface="monospace"/>
-                <a:ea typeface="monospace"/>
-              </a:rPr>
-              <a:t>curl</a:t>
-            </a:r>
-            <a:r>
-              <a:rPr lang="en-US" sz="900">
-                <a:solidFill>
-                  <a:srgbClr val="E2E8F0"/>
-                </a:solidFill>
-                <a:latin typeface="monospace"/>
-                <a:ea typeface="monospace"/>
-              </a:rPr>
-              <a:t> http://gateway.</a:t>
-            </a:r>
-            <a:r>
-              <a:rPr lang="zh-CN" sz="900">
-                <a:solidFill>
-                  <a:srgbClr val="E2E8F0"/>
-                </a:solidFill>
-                <a:latin typeface="monospace"/>
-                <a:ea typeface="monospace"/>
-              </a:rPr>
-              <a:t>内网</a:t>
-            </a:r>
-            <a:r>
-              <a:rPr lang="en-US" sz="900">
-                <a:solidFill>
-                  <a:srgbClr val="E2E8F0"/>
-                </a:solidFill>
-                <a:latin typeface="monospace"/>
-                <a:ea typeface="monospace"/>
-              </a:rPr>
-              <a:t>:9000/v1/chat/completions \</a:t>
-            </a:r>
-            <a:endParaRPr/>
-          </a:p>
-          <a:p>
-            <a:pPr>
-              <a:lnSpc>
-                <a:spcPct val="160000"/>
-              </a:lnSpc>
-            </a:pPr>
-            <a:r>
-              <a:rPr lang="en-US" sz="900">
-                <a:solidFill>
-                  <a:srgbClr val="E2E8F0"/>
-                </a:solidFill>
-                <a:latin typeface="monospace"/>
-                <a:ea typeface="monospace"/>
-              </a:rPr>
-              <a:t>  -H </a:t>
-            </a:r>
-            <a:r>
-              <a:rPr lang="en-US" sz="900">
-                <a:solidFill>
-                  <a:srgbClr val="10B981"/>
-                </a:solidFill>
-                <a:latin typeface="monospace"/>
-                <a:ea typeface="monospace"/>
-              </a:rPr>
-              <a:t>"Authorization: Bearer sk-</a:t>
-            </a:r>
-            <a:r>
-              <a:rPr lang="zh-CN" sz="900">
-                <a:solidFill>
-                  <a:srgbClr val="10B981"/>
-                </a:solidFill>
-                <a:latin typeface="monospace"/>
-                <a:ea typeface="monospace"/>
-              </a:rPr>
-              <a:t>张三</a:t>
-            </a:r>
-            <a:r>
-              <a:rPr lang="en-US" sz="900">
-                <a:solidFill>
-                  <a:srgbClr val="10B981"/>
-                </a:solidFill>
-                <a:latin typeface="monospace"/>
-                <a:ea typeface="monospace"/>
-              </a:rPr>
-              <a:t>"</a:t>
-            </a:r>
-            <a:r>
-              <a:rPr lang="en-US" sz="900">
-                <a:solidFill>
-                  <a:srgbClr val="E2E8F0"/>
-                </a:solidFill>
-                <a:latin typeface="monospace"/>
-                <a:ea typeface="monospace"/>
-              </a:rPr>
-              <a:t> \</a:t>
-            </a:r>
-            <a:endParaRPr/>
-          </a:p>
-          <a:p>
-            <a:pPr>
-              <a:lnSpc>
-                <a:spcPct val="160000"/>
-              </a:lnSpc>
-            </a:pPr>
-            <a:r>
-              <a:rPr lang="en-US" sz="900">
-                <a:solidFill>
-                  <a:srgbClr val="E2E8F0"/>
-                </a:solidFill>
-                <a:latin typeface="monospace"/>
-                <a:ea typeface="monospace"/>
-              </a:rPr>
-              <a:t>  -d </a:t>
-            </a:r>
-            <a:r>
-              <a:rPr lang="en-US" sz="900">
-                <a:solidFill>
-                  <a:srgbClr val="10B981"/>
-                </a:solidFill>
-                <a:latin typeface="monospace"/>
-                <a:ea typeface="monospace"/>
-              </a:rPr>
-              <a:t>'{</a:t>
-            </a:r>
-            <a:r>
-              <a:rPr lang="en-US" sz="900">
-                <a:solidFill>
-                  <a:srgbClr val="E2E8F0"/>
-                </a:solidFill>
-                <a:latin typeface="monospace"/>
-                <a:ea typeface="monospace"/>
-              </a:rPr>
-              <a:t>
-  </a:t>
-            </a:r>
-            <a:r>
-              <a:rPr lang="en-US" sz="900">
-                <a:solidFill>
-                  <a:srgbClr val="10B981"/>
-                </a:solidFill>
-                <a:latin typeface="monospace"/>
-                <a:ea typeface="monospace"/>
-              </a:rPr>
-              <a:t>  "model": "deepseek-chat",</a:t>
-            </a:r>
-            <a:endParaRPr/>
-          </a:p>
-          <a:p>
-            <a:pPr>
-              <a:lnSpc>
-                <a:spcPct val="160000"/>
-              </a:lnSpc>
-            </a:pPr>
-            <a:r>
-              <a:rPr lang="en-US" sz="900">
-                <a:solidFill>
-                  <a:srgbClr val="E2E8F0"/>
-                </a:solidFill>
-                <a:latin typeface="monospace"/>
-                <a:ea typeface="monospace"/>
-              </a:rPr>
-              <a:t>  </a:t>
-            </a:r>
-            <a:r>
-              <a:rPr lang="en-US" sz="900">
-                <a:solidFill>
-                  <a:srgbClr val="10B981"/>
-                </a:solidFill>
-                <a:latin typeface="monospace"/>
-                <a:ea typeface="monospace"/>
-              </a:rPr>
-              <a:t>  "messages": [...]</a:t>
-            </a:r>
-            <a:endParaRPr/>
-          </a:p>
-        </p:txBody>
-      </p:sp>
-      <p:sp>
-        <p:nvSpPr>
-          <p:cNvPr id="372" name="文本框 371" descr="{&quot;isTemplate&quot;:true,&quot;type&quot;:&quot;text&quot;}"/>
-          <p:cNvSpPr txBox="1"/>
-          <p:nvPr/>
-        </p:nvSpPr>
-        <p:spPr>
-          <a:xfrm>
-            <a:off x="7124700" y="3876675"/>
-            <a:ext cx="4591050" cy="228600"/>
-          </a:xfrm>
-          <a:prstGeom prst="rect">
-            <a:avLst/>
-          </a:prstGeom>
-        </p:spPr>
-        <p:txBody>
-          <a:bodyPr wrap="none" lIns="0" tIns="0" rIns="0" bIns="0"/>
-          <a:lstStyle/>
-          <a:p>
-            <a:pPr>
-              <a:lnSpc>
-                <a:spcPct val="150000"/>
-              </a:lnSpc>
-            </a:pPr>
-            <a:r>
-              <a:rPr lang="zh-CN" sz="975">
-                <a:solidFill>
-                  <a:srgbClr val="64748B"/>
-                </a:solidFill>
-                <a:latin typeface="Microsoft YaHei"/>
-                <a:ea typeface="Microsoft YaHei"/>
-              </a:rPr>
-              <a:t>改个</a:t>
-            </a:r>
-            <a:r>
-              <a:rPr lang="en-US" sz="975">
-                <a:solidFill>
-                  <a:srgbClr val="64748B"/>
-                </a:solidFill>
-                <a:latin typeface="Microsoft YaHei"/>
-                <a:ea typeface="Microsoft YaHei"/>
-              </a:rPr>
-              <a:t> base_url </a:t>
-            </a:r>
-            <a:r>
-              <a:rPr lang="zh-CN" sz="975">
-                <a:solidFill>
-                  <a:srgbClr val="64748B"/>
-                </a:solidFill>
-                <a:latin typeface="Microsoft YaHei"/>
-                <a:ea typeface="Microsoft YaHei"/>
-              </a:rPr>
-              <a:t>就接上。所有</a:t>
-            </a:r>
-            <a:r>
-              <a:rPr lang="en-US" sz="975">
-                <a:solidFill>
-                  <a:srgbClr val="64748B"/>
-                </a:solidFill>
-                <a:latin typeface="Microsoft YaHei"/>
-                <a:ea typeface="Microsoft YaHei"/>
-              </a:rPr>
-              <a:t>"</a:t>
-            </a:r>
-            <a:r>
-              <a:rPr lang="zh-CN" sz="975">
-                <a:solidFill>
-                  <a:srgbClr val="64748B"/>
-                </a:solidFill>
-                <a:latin typeface="Microsoft YaHei"/>
-                <a:ea typeface="Microsoft YaHei"/>
-              </a:rPr>
-              <a:t>秩序</a:t>
-            </a:r>
-            <a:r>
-              <a:rPr lang="en-US" sz="975">
-                <a:solidFill>
-                  <a:srgbClr val="64748B"/>
-                </a:solidFill>
-                <a:latin typeface="Microsoft YaHei"/>
-                <a:ea typeface="Microsoft YaHei"/>
-              </a:rPr>
-              <a:t>"</a:t>
-            </a:r>
-            <a:r>
-              <a:rPr lang="zh-CN" sz="975">
-                <a:solidFill>
-                  <a:srgbClr val="64748B"/>
-                </a:solidFill>
-                <a:latin typeface="Microsoft YaHei"/>
-                <a:ea typeface="Microsoft YaHei"/>
-              </a:rPr>
-              <a:t>都发生在网关这一层。</a:t>
-            </a:r>
-            <a:endParaRPr/>
-          </a:p>
-        </p:txBody>
-      </p:sp>
     </p:spTree>
   </p:cSld>
   <p:clrMapOvr>
@@ -18536,7 +20880,7 @@
 </p:sld>
 </file>
 
-<file path=ppt/slides/slide7.xml><?xml version="1.0" encoding="utf-8"?>
+<file path=ppt/slides/slide9.xml><?xml version="1.0" encoding="utf-8"?>
 <p:sld xmlns:a="http://schemas.openxmlformats.org/drawingml/2006/main" xmlns:r="http://schemas.openxmlformats.org/officeDocument/2006/relationships" xmlns:p="http://schemas.openxmlformats.org/presentationml/2006/main">
   <p:cSld>
     <p:spTree>
@@ -18653,7 +20997,7 @@
               </a:lnSpc>
             </a:pPr>
             <a:r>
-              <a:rPr lang="en-US" sz="2250" b="1">
+              <a:rPr lang="en-US" sz="2250" b="1" dirty="0">
                 <a:solidFill>
                   <a:srgbClr val="1F3A8A"/>
                 </a:solidFill>
@@ -18663,27 +21007,47 @@
               <a:t>4 </a:t>
             </a:r>
             <a:r>
-              <a:rPr lang="zh-CN" sz="2250" b="1">
+              <a:rPr lang="zh-CN" sz="2250" b="1" dirty="0">
                 <a:solidFill>
                   <a:srgbClr val="1F3A8A"/>
                 </a:solidFill>
                 <a:latin typeface="Microsoft YaHei"/>
                 <a:ea typeface="Microsoft YaHei"/>
               </a:rPr>
-              <a:t>大能力把</a:t>
-            </a:r>
-            <a:r>
-              <a:rPr lang="en-US" sz="2250" b="1">
+              <a:t>大</a:t>
+            </a:r>
+            <a:r>
+              <a:rPr lang="zh-CN" altLang="en-US" sz="2250" b="1" dirty="0">
                 <a:solidFill>
                   <a:srgbClr val="1F3A8A"/>
                 </a:solidFill>
                 <a:latin typeface="Microsoft YaHei"/>
                 <a:ea typeface="Microsoft YaHei"/>
               </a:rPr>
+              <a:t>模型网关</a:t>
+            </a:r>
+            <a:r>
+              <a:rPr lang="zh-CN" sz="2250" b="1" dirty="0">
+                <a:solidFill>
+                  <a:srgbClr val="1F3A8A"/>
+                </a:solidFill>
+                <a:latin typeface="Microsoft YaHei"/>
+                <a:ea typeface="Microsoft YaHei"/>
+              </a:rPr>
+              <a:t>把</a:t>
+            </a:r>
+            <a:r>
+              <a:rPr lang="en-US" sz="2250" b="1" dirty="0">
+                <a:solidFill>
+                  <a:srgbClr val="1F3A8A"/>
+                </a:solidFill>
+                <a:latin typeface="Microsoft YaHei"/>
+                <a:ea typeface="Microsoft YaHei"/>
+              </a:rPr>
               <a:t>"</a:t>
             </a:r>
             <a:r>
-              <a:rPr lang="zh-CN" sz="2250" b="1">
+              <a:rPr lang="zh-CN" sz="2250" b="1" dirty="0">
                 <a:solidFill>
                   <a:srgbClr val="1F3A8A"/>
                 </a:solidFill>
@@ -18693,7 +21057,7 @@
               <a:t>秩序</a:t>
             </a:r>
             <a:r>
-              <a:rPr lang="en-US" sz="2250" b="1">
+              <a:rPr lang="en-US" sz="2250" b="1" dirty="0">
                 <a:solidFill>
                   <a:srgbClr val="1F3A8A"/>
                 </a:solidFill>
@@ -18703,7 +21067,7 @@
               <a:t>"</a:t>
             </a:r>
             <a:r>
-              <a:rPr lang="zh-CN" sz="2250" b="1">
+              <a:rPr lang="zh-CN" sz="2250" b="1" dirty="0">
                 <a:solidFill>
                   <a:srgbClr val="1F3A8A"/>
                 </a:solidFill>
@@ -18712,7 +21076,7 @@
               </a:rPr>
               <a:t>建起来</a:t>
             </a:r>
-            <a:endParaRPr/>
+            <a:endParaRPr dirty="0"/>
           </a:p>
         </p:txBody>
       </p:sp>
@@ -19405,1819 +21769,6 @@
           <a:ln/>
         </p:spPr>
       </p:pic>
-    </p:spTree>
-  </p:cSld>
-  <p:clrMapOvr>
-    <a:masterClrMapping/>
-  </p:clrMapOvr>
-</p:sld>
-</file>
-
-<file path=ppt/slides/slide8.xml><?xml version="1.0" encoding="utf-8"?>
-<p:sld xmlns:a="http://schemas.openxmlformats.org/drawingml/2006/main" xmlns:r="http://schemas.openxmlformats.org/officeDocument/2006/relationships" xmlns:p="http://schemas.openxmlformats.org/presentationml/2006/main">
-  <p:cSld>
-    <p:spTree>
-      <p:nvGrpSpPr>
-        <p:cNvPr id="1" name="" descr="&lt;Slide&gt;&#10;  &lt;Box style={{&#10;    width: '100%',&#10;    height: '100%',&#10;    backgroundColor: '#1F3A8A',&#10;    padding: 80,&#10;    display: 'flex',&#10;    flexDirection: 'column',&#10;    justifyContent: 'center',&#10;    alignItems: 'center',&#10;  }}&gt;&#10;    &lt;Text style={{&#10;      fontSize: 14,&#10;      color: '#0EA5E9',&#10;      letterSpacing: 4,&#10;      marginBottom: 24,&#10;    }}&gt;&#10;      PART 04&#10;    &lt;/Text&gt;&#10;    &lt;Text style={{&#10;      fontSize: 72,&#10;      fontWeight: 'bold',&#10;      color: '#FFFFFF',&#10;      textAlign: 'center',&#10;      marginBottom: 24,&#10;    }}&gt;&#10;      企业 AI 应用场景&#10;    &lt;/Text&gt;&#10;    &lt;Box style={{&#10;      width: 80,&#10;      height: 4,&#10;      backgroundColor: '#0EA5E9',&#10;      marginBottom: 24,&#10;    }} /&gt;&#10;    &lt;Text style={{&#10;      fontSize: 22,&#10;      color: '#CBD5E1',&#10;      textAlign: 'center',&#10;    }}&gt;&#10;      内网-自有大模型 vs 外网-云端大模型&#10;    &lt;/Text&gt;&#10;  &lt;/Box&gt;&#10;&lt;/Slide&gt;"/>
-        <p:cNvGrpSpPr/>
-        <p:nvPr/>
-      </p:nvGrpSpPr>
-      <p:grpSpPr>
-        <a:xfrm>
-          <a:off x="0" y="0"/>
-          <a:ext cx="0" cy="0"/>
-          <a:chOff x="0" y="0"/>
-          <a:chExt cx="0" cy="0"/>
-        </a:xfrm>
-      </p:grpSpPr>
-      <p:sp>
-        <p:nvSpPr>
-          <p:cNvPr id="396" name="矩形 395"/>
-          <p:cNvSpPr/>
-          <p:nvPr/>
-        </p:nvSpPr>
-        <p:spPr>
-          <a:xfrm>
-            <a:off x="0" y="0"/>
-            <a:ext cx="12192000" cy="6858000"/>
-          </a:xfrm>
-          <a:prstGeom prst="rect">
-            <a:avLst/>
-          </a:prstGeom>
-          <a:solidFill>
-            <a:srgbClr val="1F3A8A"/>
-          </a:solidFill>
-          <a:ln/>
-        </p:spPr>
-        <p:txBody>
-          <a:bodyPr/>
-          <a:lstStyle/>
-          <a:p>
-            <a:endParaRPr/>
-          </a:p>
-        </p:txBody>
-      </p:sp>
-      <p:sp>
-        <p:nvSpPr>
-          <p:cNvPr id="397" name="文本框 396" descr="{&quot;isTemplate&quot;:true,&quot;type&quot;:&quot;text&quot;}"/>
-          <p:cNvSpPr txBox="1"/>
-          <p:nvPr/>
-        </p:nvSpPr>
-        <p:spPr>
-          <a:xfrm>
-            <a:off x="5695950" y="2447925"/>
-            <a:ext cx="809625" cy="161925"/>
-          </a:xfrm>
-          <a:prstGeom prst="rect">
-            <a:avLst/>
-          </a:prstGeom>
-        </p:spPr>
-        <p:txBody>
-          <a:bodyPr wrap="none" lIns="0" tIns="0" rIns="0" bIns="0"/>
-          <a:lstStyle/>
-          <a:p>
-            <a:pPr>
-              <a:lnSpc>
-                <a:spcPct val="100000"/>
-              </a:lnSpc>
-            </a:pPr>
-            <a:r>
-              <a:rPr lang="en-US" sz="1050" spc="300">
-                <a:solidFill>
-                  <a:srgbClr val="0EA5E9"/>
-                </a:solidFill>
-                <a:latin typeface="Microsoft YaHei"/>
-                <a:ea typeface="Microsoft YaHei"/>
-              </a:rPr>
-              <a:t>PART 04</a:t>
-            </a:r>
-            <a:endParaRPr/>
-          </a:p>
-        </p:txBody>
-      </p:sp>
-      <p:sp>
-        <p:nvSpPr>
-          <p:cNvPr id="398" name="文本框 397" descr="{&quot;isTemplate&quot;:true,&quot;type&quot;:&quot;text&quot;}"/>
-          <p:cNvSpPr txBox="1"/>
-          <p:nvPr/>
-        </p:nvSpPr>
-        <p:spPr>
-          <a:xfrm>
-            <a:off x="3457575" y="2838450"/>
-            <a:ext cx="5276850" cy="828675"/>
-          </a:xfrm>
-          <a:prstGeom prst="rect">
-            <a:avLst/>
-          </a:prstGeom>
-        </p:spPr>
-        <p:txBody>
-          <a:bodyPr wrap="none" lIns="0" tIns="0" rIns="0" bIns="0"/>
-          <a:lstStyle/>
-          <a:p>
-            <a:pPr algn="ctr">
-              <a:lnSpc>
-                <a:spcPct val="100000"/>
-              </a:lnSpc>
-            </a:pPr>
-            <a:r>
-              <a:rPr lang="zh-CN" sz="5400" b="1">
-                <a:solidFill>
-                  <a:srgbClr val="FFFFFF"/>
-                </a:solidFill>
-                <a:latin typeface="Microsoft YaHei"/>
-                <a:ea typeface="Microsoft YaHei"/>
-              </a:rPr>
-              <a:t>企业</a:t>
-            </a:r>
-            <a:r>
-              <a:rPr lang="en-US" sz="5400" b="1">
-                <a:solidFill>
-                  <a:srgbClr val="FFFFFF"/>
-                </a:solidFill>
-                <a:latin typeface="Microsoft YaHei"/>
-                <a:ea typeface="Microsoft YaHei"/>
-              </a:rPr>
-              <a:t> AI </a:t>
-            </a:r>
-            <a:r>
-              <a:rPr lang="zh-CN" sz="5400" b="1">
-                <a:solidFill>
-                  <a:srgbClr val="FFFFFF"/>
-                </a:solidFill>
-                <a:latin typeface="Microsoft YaHei"/>
-                <a:ea typeface="Microsoft YaHei"/>
-              </a:rPr>
-              <a:t>应用场景</a:t>
-            </a:r>
-            <a:endParaRPr/>
-          </a:p>
-        </p:txBody>
-      </p:sp>
-      <p:sp>
-        <p:nvSpPr>
-          <p:cNvPr id="399" name="矩形 398"/>
-          <p:cNvSpPr/>
-          <p:nvPr/>
-        </p:nvSpPr>
-        <p:spPr>
-          <a:xfrm>
-            <a:off x="5715000" y="3895725"/>
-            <a:ext cx="762000" cy="38100"/>
-          </a:xfrm>
-          <a:prstGeom prst="rect">
-            <a:avLst/>
-          </a:prstGeom>
-          <a:solidFill>
-            <a:srgbClr val="0EA5E9"/>
-          </a:solidFill>
-          <a:ln/>
-        </p:spPr>
-        <p:txBody>
-          <a:bodyPr/>
-          <a:lstStyle/>
-          <a:p>
-            <a:endParaRPr/>
-          </a:p>
-        </p:txBody>
-      </p:sp>
-      <p:sp>
-        <p:nvSpPr>
-          <p:cNvPr id="400" name="文本框 399" descr="{&quot;isTemplate&quot;:true,&quot;type&quot;:&quot;text&quot;}"/>
-          <p:cNvSpPr txBox="1"/>
-          <p:nvPr/>
-        </p:nvSpPr>
-        <p:spPr>
-          <a:xfrm>
-            <a:off x="4371975" y="4162425"/>
-            <a:ext cx="3448050" cy="257175"/>
-          </a:xfrm>
-          <a:prstGeom prst="rect">
-            <a:avLst/>
-          </a:prstGeom>
-        </p:spPr>
-        <p:txBody>
-          <a:bodyPr wrap="none" lIns="0" tIns="0" rIns="0" bIns="0"/>
-          <a:lstStyle/>
-          <a:p>
-            <a:pPr algn="ctr">
-              <a:lnSpc>
-                <a:spcPct val="100000"/>
-              </a:lnSpc>
-            </a:pPr>
-            <a:r>
-              <a:rPr lang="zh-CN" sz="1650">
-                <a:solidFill>
-                  <a:srgbClr val="CBD5E1"/>
-                </a:solidFill>
-                <a:latin typeface="Microsoft YaHei"/>
-                <a:ea typeface="Microsoft YaHei"/>
-              </a:rPr>
-              <a:t>内网</a:t>
-            </a:r>
-            <a:r>
-              <a:rPr lang="en-US" sz="1650">
-                <a:solidFill>
-                  <a:srgbClr val="CBD5E1"/>
-                </a:solidFill>
-                <a:latin typeface="Microsoft YaHei"/>
-                <a:ea typeface="Microsoft YaHei"/>
-              </a:rPr>
-              <a:t>-</a:t>
-            </a:r>
-            <a:r>
-              <a:rPr lang="zh-CN" sz="1650">
-                <a:solidFill>
-                  <a:srgbClr val="CBD5E1"/>
-                </a:solidFill>
-                <a:latin typeface="Microsoft YaHei"/>
-                <a:ea typeface="Microsoft YaHei"/>
-              </a:rPr>
-              <a:t>自有大模型</a:t>
-            </a:r>
-            <a:r>
-              <a:rPr lang="en-US" sz="1650">
-                <a:solidFill>
-                  <a:srgbClr val="CBD5E1"/>
-                </a:solidFill>
-                <a:latin typeface="Microsoft YaHei"/>
-                <a:ea typeface="Microsoft YaHei"/>
-              </a:rPr>
-              <a:t> vs </a:t>
-            </a:r>
-            <a:r>
-              <a:rPr lang="zh-CN" sz="1650">
-                <a:solidFill>
-                  <a:srgbClr val="CBD5E1"/>
-                </a:solidFill>
-                <a:latin typeface="Microsoft YaHei"/>
-                <a:ea typeface="Microsoft YaHei"/>
-              </a:rPr>
-              <a:t>外网</a:t>
-            </a:r>
-            <a:r>
-              <a:rPr lang="en-US" sz="1650">
-                <a:solidFill>
-                  <a:srgbClr val="CBD5E1"/>
-                </a:solidFill>
-                <a:latin typeface="Microsoft YaHei"/>
-                <a:ea typeface="Microsoft YaHei"/>
-              </a:rPr>
-              <a:t>-</a:t>
-            </a:r>
-            <a:r>
-              <a:rPr lang="zh-CN" sz="1650">
-                <a:solidFill>
-                  <a:srgbClr val="CBD5E1"/>
-                </a:solidFill>
-                <a:latin typeface="Microsoft YaHei"/>
-                <a:ea typeface="Microsoft YaHei"/>
-              </a:rPr>
-              <a:t>云端大模型</a:t>
-            </a:r>
-            <a:endParaRPr/>
-          </a:p>
-        </p:txBody>
-      </p:sp>
-    </p:spTree>
-  </p:cSld>
-  <p:clrMapOvr>
-    <a:masterClrMapping/>
-  </p:clrMapOvr>
-</p:sld>
-</file>
-
-<file path=ppt/slides/slide9.xml><?xml version="1.0" encoding="utf-8"?>
-<p:sld xmlns:a="http://schemas.openxmlformats.org/drawingml/2006/main" xmlns:r="http://schemas.openxmlformats.org/officeDocument/2006/relationships" xmlns:p="http://schemas.openxmlformats.org/presentationml/2006/main">
-  <p:cSld>
-    <p:spTree>
-      <p:nvGrpSpPr>
-        <p:cNvPr id="1" name="" descr="&lt;Slide&gt;&#10;  &lt;Box style={{&#10;    width: '100%',&#10;    height: '100%',&#10;    backgroundColor: '#FFFFFF',&#10;    padding: 50,&#10;    display: 'flex',&#10;    flexDirection: 'column',&#10;  }}&gt;&#10;    &lt;Text style={{&#10;      fontSize: 14,&#10;      color: '#0EA5E9',&#10;      letterSpacing: 2,&#10;      marginBottom: 8,&#10;    }}&gt;&#10;      04 场景&#10;    &lt;/Text&gt;&#10;    &lt;Text style={{&#10;      fontSize: 36,&#10;      fontWeight: 'bold',&#10;      color: '#1F3A8A',&#10;      marginBottom: 8,&#10;    }}&gt;&#10;      什么数据放哪里？一张表说清&#10;    &lt;/Text&gt;&#10;    &lt;Text style={{&#10;      fontSize: 14,&#10;      color: '#64748B',&#10;      marginBottom: 24,&#10;    }}&gt;&#10;      决策原则：敏感度决定部署位置，不是能力决定&#10;    &lt;/Text&gt;&#10;&#10;    &lt;Box style={{&#10;      border: '1px solid #E2E8F0',&#10;      borderRadius: 12,&#10;      overflow: 'hidden',&#10;      flex: 1,&#10;    }}&gt;&#10;      &lt;Box style={{&#10;        display: 'flex',&#10;        backgroundColor: '#1F3A8A',&#10;        padding: '14px 20px',&#10;      }}&gt;&#10;        &lt;Text style={{ flex: 1.5, fontSize: 15, fontWeight: 'bold', color: '#FFFFFF' }}&gt;数据类型&lt;/Text&gt;&#10;        &lt;Text style={{ flex: 1, fontSize: 15, fontWeight: 'bold', color: '#FFFFFF' }}&gt;推荐部署&lt;/Text&gt;&#10;        &lt;Text style={{ flex: 2.5, fontSize: 15, fontWeight: 'bold', color: '#FFFFFF' }}&gt;理由&lt;/Text&gt;&#10;      &lt;/Box&gt;&#10;&#10;      {[&#10;        { data: '合同 / 法务 / 财务', place: '内网', color: '#1F3A8A', reason: '强合规、出域即风险' },&#10;        { data: '客户隐私数据', place: '内网', color: '#1F3A8A', reason: '个人信息保护法' },&#10;        { data: '内部代码 / 文档', place: '内网', color: '#1F3A8A', reason: '商业机密' },&#10;        { data: '创意文案 / 翻译', place: '外网', color: '#0EA5E9', reason: '通用能力优先' },&#10;        { data: '公开信息查询', place: '外网', color: '#0EA5E9', reason: '无敏感性' },&#10;        { data: '复杂推理 / 编码', place: '视情况', color: '#F59E0B', reason: '取决于成本与隐私' },&#10;      ].map((row, idx) =&gt; (&#10;        &lt;Box key={idx} style={{&#10;          display: 'flex',&#10;          padding: '12px 20px',&#10;          backgroundColor: idx % 2 === 0 ? '#F8FAFC' : '#FFFFFF',&#10;          alignItems: 'center',&#10;        }}&gt;&#10;          &lt;Text style={{ flex: 1.5, fontSize: 15, color: '#1F3A8A', fontWeight: 'bold' }}&gt;{row.data}&lt;/Text&gt;&#10;          &lt;Box style={{ flex: 1 }}&gt;&#10;            &lt;Box style={{&#10;              display: 'inline-block',&#10;              backgroundColor: row.color,&#10;              padding: '4px 14px',&#10;              borderRadius: 16,&#10;            }}&gt;&#10;              &lt;Text style={{ fontSize: 13, color: '#FFFFFF', fontWeight: 'bold' }}&gt;{row.place}&lt;/Text&gt;&#10;            &lt;/Box&gt;&#10;          &lt;/Box&gt;&#10;          &lt;Text style={{ flex: 2.5, fontSize: 14, color: '#475569' }}&gt;{row.reason}&lt;/Text&gt;&#10;        &lt;/Box&gt;&#10;      ))}&#10;    &lt;/Box&gt;&#10;&#10;    &lt;Text style={{&#10;      fontSize: 20,&#10;      fontWeight: 'bold',&#10;      color: '#0EA5E9',&#10;      textAlign: 'center',&#10;      marginTop: 24,&#10;    }}&gt;&#10;      敏感度决定部署位置，不是能力决定&#10;    &lt;/Text&gt;&#10;  &lt;/Box&gt;&#10;&lt;/Slide&gt;"/>
-        <p:cNvGrpSpPr/>
-        <p:nvPr/>
-      </p:nvGrpSpPr>
-      <p:grpSpPr>
-        <a:xfrm>
-          <a:off x="0" y="0"/>
-          <a:ext cx="0" cy="0"/>
-          <a:chOff x="0" y="0"/>
-          <a:chExt cx="0" cy="0"/>
-        </a:xfrm>
-      </p:grpSpPr>
-      <p:sp>
-        <p:nvSpPr>
-          <p:cNvPr id="402" name="矩形 401"/>
-          <p:cNvSpPr/>
-          <p:nvPr/>
-        </p:nvSpPr>
-        <p:spPr>
-          <a:xfrm>
-            <a:off x="0" y="0"/>
-            <a:ext cx="12192000" cy="6858000"/>
-          </a:xfrm>
-          <a:prstGeom prst="rect">
-            <a:avLst/>
-          </a:prstGeom>
-          <a:solidFill>
-            <a:srgbClr val="FFFFFF"/>
-          </a:solidFill>
-          <a:ln/>
-        </p:spPr>
-        <p:txBody>
-          <a:bodyPr/>
-          <a:lstStyle/>
-          <a:p>
-            <a:endParaRPr/>
-          </a:p>
-        </p:txBody>
-      </p:sp>
-      <p:sp>
-        <p:nvSpPr>
-          <p:cNvPr id="403" name="文本框 402" descr="{&quot;isTemplate&quot;:true,&quot;type&quot;:&quot;text&quot;}"/>
-          <p:cNvSpPr txBox="1"/>
-          <p:nvPr/>
-        </p:nvSpPr>
-        <p:spPr>
-          <a:xfrm>
-            <a:off x="476250" y="476250"/>
-            <a:ext cx="11239500" cy="161925"/>
-          </a:xfrm>
-          <a:prstGeom prst="rect">
-            <a:avLst/>
-          </a:prstGeom>
-        </p:spPr>
-        <p:txBody>
-          <a:bodyPr wrap="none" lIns="0" tIns="0" rIns="0" bIns="0"/>
-          <a:lstStyle/>
-          <a:p>
-            <a:pPr>
-              <a:lnSpc>
-                <a:spcPct val="100000"/>
-              </a:lnSpc>
-            </a:pPr>
-            <a:r>
-              <a:rPr lang="en-US" sz="1050" spc="150">
-                <a:solidFill>
-                  <a:srgbClr val="0EA5E9"/>
-                </a:solidFill>
-                <a:latin typeface="Microsoft YaHei"/>
-                <a:ea typeface="Microsoft YaHei"/>
-              </a:rPr>
-              <a:t>04 </a:t>
-            </a:r>
-            <a:r>
-              <a:rPr lang="zh-CN" sz="1050" spc="150">
-                <a:solidFill>
-                  <a:srgbClr val="0EA5E9"/>
-                </a:solidFill>
-                <a:latin typeface="Microsoft YaHei"/>
-                <a:ea typeface="Microsoft YaHei"/>
-              </a:rPr>
-              <a:t>场景</a:t>
-            </a:r>
-            <a:endParaRPr/>
-          </a:p>
-        </p:txBody>
-      </p:sp>
-      <p:sp>
-        <p:nvSpPr>
-          <p:cNvPr id="404" name="文本框 403" descr="{&quot;isTemplate&quot;:true,&quot;type&quot;:&quot;text&quot;}"/>
-          <p:cNvSpPr txBox="1"/>
-          <p:nvPr/>
-        </p:nvSpPr>
-        <p:spPr>
-          <a:xfrm>
-            <a:off x="476250" y="714375"/>
-            <a:ext cx="11239500" cy="419100"/>
-          </a:xfrm>
-          <a:prstGeom prst="rect">
-            <a:avLst/>
-          </a:prstGeom>
-        </p:spPr>
-        <p:txBody>
-          <a:bodyPr wrap="none" lIns="0" tIns="0" rIns="0" bIns="0"/>
-          <a:lstStyle/>
-          <a:p>
-            <a:pPr>
-              <a:lnSpc>
-                <a:spcPct val="100000"/>
-              </a:lnSpc>
-            </a:pPr>
-            <a:r>
-              <a:rPr lang="zh-CN" sz="2700" b="1">
-                <a:solidFill>
-                  <a:srgbClr val="1F3A8A"/>
-                </a:solidFill>
-                <a:latin typeface="Microsoft YaHei"/>
-                <a:ea typeface="Microsoft YaHei"/>
-              </a:rPr>
-              <a:t>什么数据放哪里？一张表说清</a:t>
-            </a:r>
-            <a:endParaRPr/>
-          </a:p>
-        </p:txBody>
-      </p:sp>
-      <p:sp>
-        <p:nvSpPr>
-          <p:cNvPr id="405" name="文本框 404" descr="{&quot;isTemplate&quot;:true,&quot;type&quot;:&quot;text&quot;}"/>
-          <p:cNvSpPr txBox="1"/>
-          <p:nvPr/>
-        </p:nvSpPr>
-        <p:spPr>
-          <a:xfrm>
-            <a:off x="476250" y="1209675"/>
-            <a:ext cx="11239500" cy="161925"/>
-          </a:xfrm>
-          <a:prstGeom prst="rect">
-            <a:avLst/>
-          </a:prstGeom>
-        </p:spPr>
-        <p:txBody>
-          <a:bodyPr wrap="none" lIns="0" tIns="0" rIns="0" bIns="0"/>
-          <a:lstStyle/>
-          <a:p>
-            <a:pPr>
-              <a:lnSpc>
-                <a:spcPct val="100000"/>
-              </a:lnSpc>
-            </a:pPr>
-            <a:r>
-              <a:rPr lang="zh-CN" sz="1050">
-                <a:solidFill>
-                  <a:srgbClr val="64748B"/>
-                </a:solidFill>
-                <a:latin typeface="Microsoft YaHei"/>
-                <a:ea typeface="Microsoft YaHei"/>
-              </a:rPr>
-              <a:t>决策原则：敏感度决定部署位置，不是能力决定</a:t>
-            </a:r>
-            <a:endParaRPr/>
-          </a:p>
-        </p:txBody>
-      </p:sp>
-      <p:sp>
-        <p:nvSpPr>
-          <p:cNvPr id="406" name="矩形: 圆角 405"/>
-          <p:cNvSpPr/>
-          <p:nvPr/>
-        </p:nvSpPr>
-        <p:spPr>
-          <a:xfrm>
-            <a:off x="476250" y="1600200"/>
-            <a:ext cx="11239500" cy="4324350"/>
-          </a:xfrm>
-          <a:prstGeom prst="roundRect">
-            <a:avLst>
-              <a:gd name="adj" fmla="val 2643"/>
-            </a:avLst>
-          </a:prstGeom>
-          <a:ln w="12700">
-            <a:solidFill>
-              <a:srgbClr val="E2E8F0"/>
-            </a:solidFill>
-            <a:prstDash val="solid"/>
-          </a:ln>
-        </p:spPr>
-        <p:txBody>
-          <a:bodyPr/>
-          <a:lstStyle/>
-          <a:p>
-            <a:endParaRPr/>
-          </a:p>
-        </p:txBody>
-      </p:sp>
-      <p:sp>
-        <p:nvSpPr>
-          <p:cNvPr id="407" name="任意多边形: 形状 406"/>
-          <p:cNvSpPr/>
-          <p:nvPr/>
-        </p:nvSpPr>
-        <p:spPr>
-          <a:xfrm>
-            <a:off x="476250" y="1600200"/>
-            <a:ext cx="11239500" cy="438150"/>
-          </a:xfrm>
-          <a:custGeom>
-            <a:avLst/>
-            <a:gdLst/>
-            <a:ahLst/>
-            <a:cxnLst/>
-            <a:rect l="0" t="0" r="0" b="0"/>
-            <a:pathLst>
-              <a:path w="1180" h="46">
-                <a:moveTo>
-                  <a:pt x="1168" y="0"/>
-                </a:moveTo>
-                <a:cubicBezTo>
-                  <a:pt x="1175" y="0"/>
-                  <a:pt x="1180" y="5"/>
-                  <a:pt x="1180" y="12"/>
-                </a:cubicBezTo>
-                <a:lnTo>
-                  <a:pt x="1180" y="46"/>
-                </a:lnTo>
-                <a:lnTo>
-                  <a:pt x="0" y="46"/>
-                </a:lnTo>
-                <a:lnTo>
-                  <a:pt x="0" y="12"/>
-                </a:lnTo>
-                <a:cubicBezTo>
-                  <a:pt x="0" y="5"/>
-                  <a:pt x="5" y="0"/>
-                  <a:pt x="12" y="0"/>
-                </a:cubicBezTo>
-                <a:lnTo>
-                  <a:pt x="1168" y="0"/>
-                </a:lnTo>
-                <a:close/>
-              </a:path>
-            </a:pathLst>
-          </a:custGeom>
-          <a:solidFill>
-            <a:srgbClr val="1F3A8A"/>
-          </a:solidFill>
-          <a:ln/>
-        </p:spPr>
-        <p:txBody>
-          <a:bodyPr/>
-          <a:lstStyle/>
-          <a:p>
-            <a:endParaRPr/>
-          </a:p>
-        </p:txBody>
-      </p:sp>
-      <p:sp>
-        <p:nvSpPr>
-          <p:cNvPr id="408" name="文本框 407" descr="{&quot;isTemplate&quot;:true,&quot;type&quot;:&quot;text&quot;}"/>
-          <p:cNvSpPr txBox="1"/>
-          <p:nvPr/>
-        </p:nvSpPr>
-        <p:spPr>
-          <a:xfrm>
-            <a:off x="666750" y="1733550"/>
-            <a:ext cx="3257550" cy="171450"/>
-          </a:xfrm>
-          <a:prstGeom prst="rect">
-            <a:avLst/>
-          </a:prstGeom>
-        </p:spPr>
-        <p:txBody>
-          <a:bodyPr wrap="none" lIns="0" tIns="0" rIns="0" bIns="0"/>
-          <a:lstStyle/>
-          <a:p>
-            <a:pPr>
-              <a:lnSpc>
-                <a:spcPct val="100000"/>
-              </a:lnSpc>
-            </a:pPr>
-            <a:r>
-              <a:rPr lang="zh-CN" sz="1125" b="1">
-                <a:solidFill>
-                  <a:srgbClr val="FFFFFF"/>
-                </a:solidFill>
-                <a:latin typeface="Microsoft YaHei"/>
-                <a:ea typeface="Microsoft YaHei"/>
-              </a:rPr>
-              <a:t>数据类型</a:t>
-            </a:r>
-            <a:endParaRPr/>
-          </a:p>
-        </p:txBody>
-      </p:sp>
-      <p:sp>
-        <p:nvSpPr>
-          <p:cNvPr id="409" name="文本框 408" descr="{&quot;isTemplate&quot;:true,&quot;type&quot;:&quot;text&quot;}"/>
-          <p:cNvSpPr txBox="1"/>
-          <p:nvPr/>
-        </p:nvSpPr>
-        <p:spPr>
-          <a:xfrm>
-            <a:off x="3924300" y="1733550"/>
-            <a:ext cx="2171700" cy="171450"/>
-          </a:xfrm>
-          <a:prstGeom prst="rect">
-            <a:avLst/>
-          </a:prstGeom>
-        </p:spPr>
-        <p:txBody>
-          <a:bodyPr wrap="none" lIns="0" tIns="0" rIns="0" bIns="0"/>
-          <a:lstStyle/>
-          <a:p>
-            <a:pPr>
-              <a:lnSpc>
-                <a:spcPct val="100000"/>
-              </a:lnSpc>
-            </a:pPr>
-            <a:r>
-              <a:rPr lang="zh-CN" sz="1125" b="1">
-                <a:solidFill>
-                  <a:srgbClr val="FFFFFF"/>
-                </a:solidFill>
-                <a:latin typeface="Microsoft YaHei"/>
-                <a:ea typeface="Microsoft YaHei"/>
-              </a:rPr>
-              <a:t>推荐部署</a:t>
-            </a:r>
-            <a:endParaRPr/>
-          </a:p>
-        </p:txBody>
-      </p:sp>
-      <p:sp>
-        <p:nvSpPr>
-          <p:cNvPr id="410" name="文本框 409" descr="{&quot;isTemplate&quot;:true,&quot;type&quot;:&quot;text&quot;}"/>
-          <p:cNvSpPr txBox="1"/>
-          <p:nvPr/>
-        </p:nvSpPr>
-        <p:spPr>
-          <a:xfrm>
-            <a:off x="6096000" y="1733550"/>
-            <a:ext cx="5429250" cy="171450"/>
-          </a:xfrm>
-          <a:prstGeom prst="rect">
-            <a:avLst/>
-          </a:prstGeom>
-        </p:spPr>
-        <p:txBody>
-          <a:bodyPr wrap="none" lIns="0" tIns="0" rIns="0" bIns="0"/>
-          <a:lstStyle/>
-          <a:p>
-            <a:pPr>
-              <a:lnSpc>
-                <a:spcPct val="100000"/>
-              </a:lnSpc>
-            </a:pPr>
-            <a:r>
-              <a:rPr lang="zh-CN" sz="1125" b="1">
-                <a:solidFill>
-                  <a:srgbClr val="FFFFFF"/>
-                </a:solidFill>
-                <a:latin typeface="Microsoft YaHei"/>
-                <a:ea typeface="Microsoft YaHei"/>
-              </a:rPr>
-              <a:t>理由</a:t>
-            </a:r>
-            <a:endParaRPr/>
-          </a:p>
-        </p:txBody>
-      </p:sp>
-      <p:sp>
-        <p:nvSpPr>
-          <p:cNvPr id="411" name="矩形 410"/>
-          <p:cNvSpPr/>
-          <p:nvPr/>
-        </p:nvSpPr>
-        <p:spPr>
-          <a:xfrm>
-            <a:off x="476250" y="2038350"/>
-            <a:ext cx="11239500" cy="457200"/>
-          </a:xfrm>
-          <a:prstGeom prst="rect">
-            <a:avLst/>
-          </a:prstGeom>
-          <a:solidFill>
-            <a:srgbClr val="F8FAFC"/>
-          </a:solidFill>
-          <a:ln/>
-        </p:spPr>
-        <p:txBody>
-          <a:bodyPr/>
-          <a:lstStyle/>
-          <a:p>
-            <a:endParaRPr/>
-          </a:p>
-        </p:txBody>
-      </p:sp>
-      <p:sp>
-        <p:nvSpPr>
-          <p:cNvPr id="412" name="文本框 411" descr="{&quot;isTemplate&quot;:true,&quot;type&quot;:&quot;text&quot;}"/>
-          <p:cNvSpPr txBox="1"/>
-          <p:nvPr/>
-        </p:nvSpPr>
-        <p:spPr>
-          <a:xfrm>
-            <a:off x="666750" y="2181225"/>
-            <a:ext cx="3257550" cy="171450"/>
-          </a:xfrm>
-          <a:prstGeom prst="rect">
-            <a:avLst/>
-          </a:prstGeom>
-        </p:spPr>
-        <p:txBody>
-          <a:bodyPr wrap="none" lIns="0" tIns="0" rIns="0" bIns="0"/>
-          <a:lstStyle/>
-          <a:p>
-            <a:pPr>
-              <a:lnSpc>
-                <a:spcPct val="100000"/>
-              </a:lnSpc>
-            </a:pPr>
-            <a:r>
-              <a:rPr lang="zh-CN" sz="1125" b="1">
-                <a:solidFill>
-                  <a:srgbClr val="1F3A8A"/>
-                </a:solidFill>
-                <a:latin typeface="Microsoft YaHei"/>
-                <a:ea typeface="Microsoft YaHei"/>
-              </a:rPr>
-              <a:t>合同</a:t>
-            </a:r>
-            <a:r>
-              <a:rPr lang="en-US" sz="1125" b="1">
-                <a:solidFill>
-                  <a:srgbClr val="1F3A8A"/>
-                </a:solidFill>
-                <a:latin typeface="Microsoft YaHei"/>
-                <a:ea typeface="Microsoft YaHei"/>
-              </a:rPr>
-              <a:t> / </a:t>
-            </a:r>
-            <a:r>
-              <a:rPr lang="zh-CN" sz="1125" b="1">
-                <a:solidFill>
-                  <a:srgbClr val="1F3A8A"/>
-                </a:solidFill>
-                <a:latin typeface="Microsoft YaHei"/>
-                <a:ea typeface="Microsoft YaHei"/>
-              </a:rPr>
-              <a:t>法务</a:t>
-            </a:r>
-            <a:r>
-              <a:rPr lang="en-US" sz="1125" b="1">
-                <a:solidFill>
-                  <a:srgbClr val="1F3A8A"/>
-                </a:solidFill>
-                <a:latin typeface="Microsoft YaHei"/>
-                <a:ea typeface="Microsoft YaHei"/>
-              </a:rPr>
-              <a:t> / </a:t>
-            </a:r>
-            <a:r>
-              <a:rPr lang="zh-CN" sz="1125" b="1">
-                <a:solidFill>
-                  <a:srgbClr val="1F3A8A"/>
-                </a:solidFill>
-                <a:latin typeface="Microsoft YaHei"/>
-                <a:ea typeface="Microsoft YaHei"/>
-              </a:rPr>
-              <a:t>财务</a:t>
-            </a:r>
-            <a:endParaRPr/>
-          </a:p>
-        </p:txBody>
-      </p:sp>
-      <p:sp>
-        <p:nvSpPr>
-          <p:cNvPr id="413" name="矩形: 圆角 412"/>
-          <p:cNvSpPr/>
-          <p:nvPr/>
-        </p:nvSpPr>
-        <p:spPr>
-          <a:xfrm>
-            <a:off x="3924300" y="2152650"/>
-            <a:ext cx="2171700" cy="228600"/>
-          </a:xfrm>
-          <a:prstGeom prst="roundRect">
-            <a:avLst>
-              <a:gd name="adj" fmla="val 66667"/>
-            </a:avLst>
-          </a:prstGeom>
-          <a:solidFill>
-            <a:srgbClr val="1F3A8A"/>
-          </a:solidFill>
-          <a:ln/>
-        </p:spPr>
-        <p:txBody>
-          <a:bodyPr/>
-          <a:lstStyle/>
-          <a:p>
-            <a:endParaRPr/>
-          </a:p>
-        </p:txBody>
-      </p:sp>
-      <p:sp>
-        <p:nvSpPr>
-          <p:cNvPr id="414" name="文本框 413" descr="{&quot;isTemplate&quot;:true,&quot;type&quot;:&quot;text&quot;}"/>
-          <p:cNvSpPr txBox="1"/>
-          <p:nvPr/>
-        </p:nvSpPr>
-        <p:spPr>
-          <a:xfrm>
-            <a:off x="4057650" y="2190750"/>
-            <a:ext cx="1905000" cy="152400"/>
-          </a:xfrm>
-          <a:prstGeom prst="rect">
-            <a:avLst/>
-          </a:prstGeom>
-        </p:spPr>
-        <p:txBody>
-          <a:bodyPr wrap="none" lIns="0" tIns="0" rIns="0" bIns="0"/>
-          <a:lstStyle/>
-          <a:p>
-            <a:pPr>
-              <a:lnSpc>
-                <a:spcPct val="100000"/>
-              </a:lnSpc>
-            </a:pPr>
-            <a:r>
-              <a:rPr lang="zh-CN" sz="975" b="1">
-                <a:solidFill>
-                  <a:srgbClr val="FFFFFF"/>
-                </a:solidFill>
-                <a:latin typeface="Microsoft YaHei"/>
-                <a:ea typeface="Microsoft YaHei"/>
-              </a:rPr>
-              <a:t>内网</a:t>
-            </a:r>
-            <a:endParaRPr/>
-          </a:p>
-        </p:txBody>
-      </p:sp>
-      <p:sp>
-        <p:nvSpPr>
-          <p:cNvPr id="415" name="文本框 414" descr="{&quot;isTemplate&quot;:true,&quot;type&quot;:&quot;text&quot;}"/>
-          <p:cNvSpPr txBox="1"/>
-          <p:nvPr/>
-        </p:nvSpPr>
-        <p:spPr>
-          <a:xfrm>
-            <a:off x="6096000" y="2190750"/>
-            <a:ext cx="5429250" cy="161925"/>
-          </a:xfrm>
-          <a:prstGeom prst="rect">
-            <a:avLst/>
-          </a:prstGeom>
-        </p:spPr>
-        <p:txBody>
-          <a:bodyPr wrap="none" lIns="0" tIns="0" rIns="0" bIns="0"/>
-          <a:lstStyle/>
-          <a:p>
-            <a:pPr>
-              <a:lnSpc>
-                <a:spcPct val="100000"/>
-              </a:lnSpc>
-            </a:pPr>
-            <a:r>
-              <a:rPr lang="zh-CN" sz="1050">
-                <a:solidFill>
-                  <a:srgbClr val="475569"/>
-                </a:solidFill>
-                <a:latin typeface="Microsoft YaHei"/>
-                <a:ea typeface="Microsoft YaHei"/>
-              </a:rPr>
-              <a:t>强合规、出域即风险</a:t>
-            </a:r>
-            <a:endParaRPr/>
-          </a:p>
-        </p:txBody>
-      </p:sp>
-      <p:sp>
-        <p:nvSpPr>
-          <p:cNvPr id="416" name="矩形 415"/>
-          <p:cNvSpPr/>
-          <p:nvPr/>
-        </p:nvSpPr>
-        <p:spPr>
-          <a:xfrm>
-            <a:off x="476250" y="2495550"/>
-            <a:ext cx="11239500" cy="457200"/>
-          </a:xfrm>
-          <a:prstGeom prst="rect">
-            <a:avLst/>
-          </a:prstGeom>
-          <a:solidFill>
-            <a:srgbClr val="FFFFFF"/>
-          </a:solidFill>
-          <a:ln/>
-        </p:spPr>
-        <p:txBody>
-          <a:bodyPr/>
-          <a:lstStyle/>
-          <a:p>
-            <a:endParaRPr/>
-          </a:p>
-        </p:txBody>
-      </p:sp>
-      <p:sp>
-        <p:nvSpPr>
-          <p:cNvPr id="417" name="文本框 416" descr="{&quot;isTemplate&quot;:true,&quot;type&quot;:&quot;text&quot;}"/>
-          <p:cNvSpPr txBox="1"/>
-          <p:nvPr/>
-        </p:nvSpPr>
-        <p:spPr>
-          <a:xfrm>
-            <a:off x="666750" y="2638425"/>
-            <a:ext cx="3257550" cy="171450"/>
-          </a:xfrm>
-          <a:prstGeom prst="rect">
-            <a:avLst/>
-          </a:prstGeom>
-        </p:spPr>
-        <p:txBody>
-          <a:bodyPr wrap="none" lIns="0" tIns="0" rIns="0" bIns="0"/>
-          <a:lstStyle/>
-          <a:p>
-            <a:pPr>
-              <a:lnSpc>
-                <a:spcPct val="100000"/>
-              </a:lnSpc>
-            </a:pPr>
-            <a:r>
-              <a:rPr lang="zh-CN" sz="1125" b="1">
-                <a:solidFill>
-                  <a:srgbClr val="1F3A8A"/>
-                </a:solidFill>
-                <a:latin typeface="Microsoft YaHei"/>
-                <a:ea typeface="Microsoft YaHei"/>
-              </a:rPr>
-              <a:t>客户隐私数据</a:t>
-            </a:r>
-            <a:endParaRPr/>
-          </a:p>
-        </p:txBody>
-      </p:sp>
-      <p:sp>
-        <p:nvSpPr>
-          <p:cNvPr id="418" name="矩形: 圆角 417"/>
-          <p:cNvSpPr/>
-          <p:nvPr/>
-        </p:nvSpPr>
-        <p:spPr>
-          <a:xfrm>
-            <a:off x="3924300" y="2609850"/>
-            <a:ext cx="2171700" cy="228600"/>
-          </a:xfrm>
-          <a:prstGeom prst="roundRect">
-            <a:avLst>
-              <a:gd name="adj" fmla="val 66667"/>
-            </a:avLst>
-          </a:prstGeom>
-          <a:solidFill>
-            <a:srgbClr val="1F3A8A"/>
-          </a:solidFill>
-          <a:ln/>
-        </p:spPr>
-        <p:txBody>
-          <a:bodyPr/>
-          <a:lstStyle/>
-          <a:p>
-            <a:endParaRPr/>
-          </a:p>
-        </p:txBody>
-      </p:sp>
-      <p:sp>
-        <p:nvSpPr>
-          <p:cNvPr id="419" name="文本框 418" descr="{&quot;isTemplate&quot;:true,&quot;type&quot;:&quot;text&quot;}"/>
-          <p:cNvSpPr txBox="1"/>
-          <p:nvPr/>
-        </p:nvSpPr>
-        <p:spPr>
-          <a:xfrm>
-            <a:off x="4057650" y="2647950"/>
-            <a:ext cx="1905000" cy="152400"/>
-          </a:xfrm>
-          <a:prstGeom prst="rect">
-            <a:avLst/>
-          </a:prstGeom>
-        </p:spPr>
-        <p:txBody>
-          <a:bodyPr wrap="none" lIns="0" tIns="0" rIns="0" bIns="0"/>
-          <a:lstStyle/>
-          <a:p>
-            <a:pPr>
-              <a:lnSpc>
-                <a:spcPct val="100000"/>
-              </a:lnSpc>
-            </a:pPr>
-            <a:r>
-              <a:rPr lang="zh-CN" sz="975" b="1">
-                <a:solidFill>
-                  <a:srgbClr val="FFFFFF"/>
-                </a:solidFill>
-                <a:latin typeface="Microsoft YaHei"/>
-                <a:ea typeface="Microsoft YaHei"/>
-              </a:rPr>
-              <a:t>内网</a:t>
-            </a:r>
-            <a:endParaRPr/>
-          </a:p>
-        </p:txBody>
-      </p:sp>
-      <p:sp>
-        <p:nvSpPr>
-          <p:cNvPr id="420" name="文本框 419" descr="{&quot;isTemplate&quot;:true,&quot;type&quot;:&quot;text&quot;}"/>
-          <p:cNvSpPr txBox="1"/>
-          <p:nvPr/>
-        </p:nvSpPr>
-        <p:spPr>
-          <a:xfrm>
-            <a:off x="6096000" y="2647950"/>
-            <a:ext cx="5429250" cy="161925"/>
-          </a:xfrm>
-          <a:prstGeom prst="rect">
-            <a:avLst/>
-          </a:prstGeom>
-        </p:spPr>
-        <p:txBody>
-          <a:bodyPr wrap="none" lIns="0" tIns="0" rIns="0" bIns="0"/>
-          <a:lstStyle/>
-          <a:p>
-            <a:pPr>
-              <a:lnSpc>
-                <a:spcPct val="100000"/>
-              </a:lnSpc>
-            </a:pPr>
-            <a:r>
-              <a:rPr lang="zh-CN" sz="1050">
-                <a:solidFill>
-                  <a:srgbClr val="475569"/>
-                </a:solidFill>
-                <a:latin typeface="Microsoft YaHei"/>
-                <a:ea typeface="Microsoft YaHei"/>
-              </a:rPr>
-              <a:t>个人信息保护法</a:t>
-            </a:r>
-            <a:endParaRPr/>
-          </a:p>
-        </p:txBody>
-      </p:sp>
-      <p:sp>
-        <p:nvSpPr>
-          <p:cNvPr id="421" name="矩形 420"/>
-          <p:cNvSpPr/>
-          <p:nvPr/>
-        </p:nvSpPr>
-        <p:spPr>
-          <a:xfrm>
-            <a:off x="476250" y="2952750"/>
-            <a:ext cx="11239500" cy="457200"/>
-          </a:xfrm>
-          <a:prstGeom prst="rect">
-            <a:avLst/>
-          </a:prstGeom>
-          <a:solidFill>
-            <a:srgbClr val="F8FAFC"/>
-          </a:solidFill>
-          <a:ln/>
-        </p:spPr>
-        <p:txBody>
-          <a:bodyPr/>
-          <a:lstStyle/>
-          <a:p>
-            <a:endParaRPr/>
-          </a:p>
-        </p:txBody>
-      </p:sp>
-      <p:sp>
-        <p:nvSpPr>
-          <p:cNvPr id="422" name="文本框 421" descr="{&quot;isTemplate&quot;:true,&quot;type&quot;:&quot;text&quot;}"/>
-          <p:cNvSpPr txBox="1"/>
-          <p:nvPr/>
-        </p:nvSpPr>
-        <p:spPr>
-          <a:xfrm>
-            <a:off x="666750" y="3095625"/>
-            <a:ext cx="3257550" cy="171450"/>
-          </a:xfrm>
-          <a:prstGeom prst="rect">
-            <a:avLst/>
-          </a:prstGeom>
-        </p:spPr>
-        <p:txBody>
-          <a:bodyPr wrap="none" lIns="0" tIns="0" rIns="0" bIns="0"/>
-          <a:lstStyle/>
-          <a:p>
-            <a:pPr>
-              <a:lnSpc>
-                <a:spcPct val="100000"/>
-              </a:lnSpc>
-            </a:pPr>
-            <a:r>
-              <a:rPr lang="zh-CN" sz="1125" b="1">
-                <a:solidFill>
-                  <a:srgbClr val="1F3A8A"/>
-                </a:solidFill>
-                <a:latin typeface="Microsoft YaHei"/>
-                <a:ea typeface="Microsoft YaHei"/>
-              </a:rPr>
-              <a:t>内部代码</a:t>
-            </a:r>
-            <a:r>
-              <a:rPr lang="en-US" sz="1125" b="1">
-                <a:solidFill>
-                  <a:srgbClr val="1F3A8A"/>
-                </a:solidFill>
-                <a:latin typeface="Microsoft YaHei"/>
-                <a:ea typeface="Microsoft YaHei"/>
-              </a:rPr>
-              <a:t> / </a:t>
-            </a:r>
-            <a:r>
-              <a:rPr lang="zh-CN" sz="1125" b="1">
-                <a:solidFill>
-                  <a:srgbClr val="1F3A8A"/>
-                </a:solidFill>
-                <a:latin typeface="Microsoft YaHei"/>
-                <a:ea typeface="Microsoft YaHei"/>
-              </a:rPr>
-              <a:t>文档</a:t>
-            </a:r>
-            <a:endParaRPr/>
-          </a:p>
-        </p:txBody>
-      </p:sp>
-      <p:sp>
-        <p:nvSpPr>
-          <p:cNvPr id="423" name="矩形: 圆角 422"/>
-          <p:cNvSpPr/>
-          <p:nvPr/>
-        </p:nvSpPr>
-        <p:spPr>
-          <a:xfrm>
-            <a:off x="3924300" y="3067050"/>
-            <a:ext cx="2171700" cy="228600"/>
-          </a:xfrm>
-          <a:prstGeom prst="roundRect">
-            <a:avLst>
-              <a:gd name="adj" fmla="val 66667"/>
-            </a:avLst>
-          </a:prstGeom>
-          <a:solidFill>
-            <a:srgbClr val="1F3A8A"/>
-          </a:solidFill>
-          <a:ln/>
-        </p:spPr>
-        <p:txBody>
-          <a:bodyPr/>
-          <a:lstStyle/>
-          <a:p>
-            <a:endParaRPr/>
-          </a:p>
-        </p:txBody>
-      </p:sp>
-      <p:sp>
-        <p:nvSpPr>
-          <p:cNvPr id="424" name="文本框 423" descr="{&quot;isTemplate&quot;:true,&quot;type&quot;:&quot;text&quot;}"/>
-          <p:cNvSpPr txBox="1"/>
-          <p:nvPr/>
-        </p:nvSpPr>
-        <p:spPr>
-          <a:xfrm>
-            <a:off x="4057650" y="3105150"/>
-            <a:ext cx="1905000" cy="152400"/>
-          </a:xfrm>
-          <a:prstGeom prst="rect">
-            <a:avLst/>
-          </a:prstGeom>
-        </p:spPr>
-        <p:txBody>
-          <a:bodyPr wrap="none" lIns="0" tIns="0" rIns="0" bIns="0"/>
-          <a:lstStyle/>
-          <a:p>
-            <a:pPr>
-              <a:lnSpc>
-                <a:spcPct val="100000"/>
-              </a:lnSpc>
-            </a:pPr>
-            <a:r>
-              <a:rPr lang="zh-CN" sz="975" b="1">
-                <a:solidFill>
-                  <a:srgbClr val="FFFFFF"/>
-                </a:solidFill>
-                <a:latin typeface="Microsoft YaHei"/>
-                <a:ea typeface="Microsoft YaHei"/>
-              </a:rPr>
-              <a:t>内网</a:t>
-            </a:r>
-            <a:endParaRPr/>
-          </a:p>
-        </p:txBody>
-      </p:sp>
-      <p:sp>
-        <p:nvSpPr>
-          <p:cNvPr id="425" name="文本框 424" descr="{&quot;isTemplate&quot;:true,&quot;type&quot;:&quot;text&quot;}"/>
-          <p:cNvSpPr txBox="1"/>
-          <p:nvPr/>
-        </p:nvSpPr>
-        <p:spPr>
-          <a:xfrm>
-            <a:off x="6096000" y="3105150"/>
-            <a:ext cx="5429250" cy="161925"/>
-          </a:xfrm>
-          <a:prstGeom prst="rect">
-            <a:avLst/>
-          </a:prstGeom>
-        </p:spPr>
-        <p:txBody>
-          <a:bodyPr wrap="none" lIns="0" tIns="0" rIns="0" bIns="0"/>
-          <a:lstStyle/>
-          <a:p>
-            <a:pPr>
-              <a:lnSpc>
-                <a:spcPct val="100000"/>
-              </a:lnSpc>
-            </a:pPr>
-            <a:r>
-              <a:rPr lang="zh-CN" sz="1050">
-                <a:solidFill>
-                  <a:srgbClr val="475569"/>
-                </a:solidFill>
-                <a:latin typeface="Microsoft YaHei"/>
-                <a:ea typeface="Microsoft YaHei"/>
-              </a:rPr>
-              <a:t>商业机密</a:t>
-            </a:r>
-            <a:endParaRPr/>
-          </a:p>
-        </p:txBody>
-      </p:sp>
-      <p:sp>
-        <p:nvSpPr>
-          <p:cNvPr id="426" name="矩形 425"/>
-          <p:cNvSpPr/>
-          <p:nvPr/>
-        </p:nvSpPr>
-        <p:spPr>
-          <a:xfrm>
-            <a:off x="476250" y="3409950"/>
-            <a:ext cx="11239500" cy="457200"/>
-          </a:xfrm>
-          <a:prstGeom prst="rect">
-            <a:avLst/>
-          </a:prstGeom>
-          <a:solidFill>
-            <a:srgbClr val="FFFFFF"/>
-          </a:solidFill>
-          <a:ln/>
-        </p:spPr>
-        <p:txBody>
-          <a:bodyPr/>
-          <a:lstStyle/>
-          <a:p>
-            <a:endParaRPr/>
-          </a:p>
-        </p:txBody>
-      </p:sp>
-      <p:sp>
-        <p:nvSpPr>
-          <p:cNvPr id="427" name="文本框 426" descr="{&quot;isTemplate&quot;:true,&quot;type&quot;:&quot;text&quot;}"/>
-          <p:cNvSpPr txBox="1"/>
-          <p:nvPr/>
-        </p:nvSpPr>
-        <p:spPr>
-          <a:xfrm>
-            <a:off x="666750" y="3552825"/>
-            <a:ext cx="3257550" cy="171450"/>
-          </a:xfrm>
-          <a:prstGeom prst="rect">
-            <a:avLst/>
-          </a:prstGeom>
-        </p:spPr>
-        <p:txBody>
-          <a:bodyPr wrap="none" lIns="0" tIns="0" rIns="0" bIns="0"/>
-          <a:lstStyle/>
-          <a:p>
-            <a:pPr>
-              <a:lnSpc>
-                <a:spcPct val="100000"/>
-              </a:lnSpc>
-            </a:pPr>
-            <a:r>
-              <a:rPr lang="zh-CN" sz="1125" b="1">
-                <a:solidFill>
-                  <a:srgbClr val="1F3A8A"/>
-                </a:solidFill>
-                <a:latin typeface="Microsoft YaHei"/>
-                <a:ea typeface="Microsoft YaHei"/>
-              </a:rPr>
-              <a:t>创意文案</a:t>
-            </a:r>
-            <a:r>
-              <a:rPr lang="en-US" sz="1125" b="1">
-                <a:solidFill>
-                  <a:srgbClr val="1F3A8A"/>
-                </a:solidFill>
-                <a:latin typeface="Microsoft YaHei"/>
-                <a:ea typeface="Microsoft YaHei"/>
-              </a:rPr>
-              <a:t> / </a:t>
-            </a:r>
-            <a:r>
-              <a:rPr lang="zh-CN" sz="1125" b="1">
-                <a:solidFill>
-                  <a:srgbClr val="1F3A8A"/>
-                </a:solidFill>
-                <a:latin typeface="Microsoft YaHei"/>
-                <a:ea typeface="Microsoft YaHei"/>
-              </a:rPr>
-              <a:t>翻译</a:t>
-            </a:r>
-            <a:endParaRPr/>
-          </a:p>
-        </p:txBody>
-      </p:sp>
-      <p:sp>
-        <p:nvSpPr>
-          <p:cNvPr id="428" name="矩形: 圆角 427"/>
-          <p:cNvSpPr/>
-          <p:nvPr/>
-        </p:nvSpPr>
-        <p:spPr>
-          <a:xfrm>
-            <a:off x="3924300" y="3524250"/>
-            <a:ext cx="2171700" cy="228600"/>
-          </a:xfrm>
-          <a:prstGeom prst="roundRect">
-            <a:avLst>
-              <a:gd name="adj" fmla="val 66667"/>
-            </a:avLst>
-          </a:prstGeom>
-          <a:solidFill>
-            <a:srgbClr val="0EA5E9"/>
-          </a:solidFill>
-          <a:ln/>
-        </p:spPr>
-        <p:txBody>
-          <a:bodyPr/>
-          <a:lstStyle/>
-          <a:p>
-            <a:endParaRPr/>
-          </a:p>
-        </p:txBody>
-      </p:sp>
-      <p:sp>
-        <p:nvSpPr>
-          <p:cNvPr id="429" name="文本框 428" descr="{&quot;isTemplate&quot;:true,&quot;type&quot;:&quot;text&quot;}"/>
-          <p:cNvSpPr txBox="1"/>
-          <p:nvPr/>
-        </p:nvSpPr>
-        <p:spPr>
-          <a:xfrm>
-            <a:off x="4057650" y="3562350"/>
-            <a:ext cx="1905000" cy="152400"/>
-          </a:xfrm>
-          <a:prstGeom prst="rect">
-            <a:avLst/>
-          </a:prstGeom>
-        </p:spPr>
-        <p:txBody>
-          <a:bodyPr wrap="none" lIns="0" tIns="0" rIns="0" bIns="0"/>
-          <a:lstStyle/>
-          <a:p>
-            <a:pPr>
-              <a:lnSpc>
-                <a:spcPct val="100000"/>
-              </a:lnSpc>
-            </a:pPr>
-            <a:r>
-              <a:rPr lang="zh-CN" sz="975" b="1">
-                <a:solidFill>
-                  <a:srgbClr val="FFFFFF"/>
-                </a:solidFill>
-                <a:latin typeface="Microsoft YaHei"/>
-                <a:ea typeface="Microsoft YaHei"/>
-              </a:rPr>
-              <a:t>外网</a:t>
-            </a:r>
-            <a:endParaRPr/>
-          </a:p>
-        </p:txBody>
-      </p:sp>
-      <p:sp>
-        <p:nvSpPr>
-          <p:cNvPr id="430" name="文本框 429" descr="{&quot;isTemplate&quot;:true,&quot;type&quot;:&quot;text&quot;}"/>
-          <p:cNvSpPr txBox="1"/>
-          <p:nvPr/>
-        </p:nvSpPr>
-        <p:spPr>
-          <a:xfrm>
-            <a:off x="6096000" y="3562350"/>
-            <a:ext cx="5429250" cy="161925"/>
-          </a:xfrm>
-          <a:prstGeom prst="rect">
-            <a:avLst/>
-          </a:prstGeom>
-        </p:spPr>
-        <p:txBody>
-          <a:bodyPr wrap="none" lIns="0" tIns="0" rIns="0" bIns="0"/>
-          <a:lstStyle/>
-          <a:p>
-            <a:pPr>
-              <a:lnSpc>
-                <a:spcPct val="100000"/>
-              </a:lnSpc>
-            </a:pPr>
-            <a:r>
-              <a:rPr lang="zh-CN" sz="1050">
-                <a:solidFill>
-                  <a:srgbClr val="475569"/>
-                </a:solidFill>
-                <a:latin typeface="Microsoft YaHei"/>
-                <a:ea typeface="Microsoft YaHei"/>
-              </a:rPr>
-              <a:t>通用能力优先</a:t>
-            </a:r>
-            <a:endParaRPr/>
-          </a:p>
-        </p:txBody>
-      </p:sp>
-      <p:sp>
-        <p:nvSpPr>
-          <p:cNvPr id="431" name="矩形 430"/>
-          <p:cNvSpPr/>
-          <p:nvPr/>
-        </p:nvSpPr>
-        <p:spPr>
-          <a:xfrm>
-            <a:off x="476250" y="3867150"/>
-            <a:ext cx="11239500" cy="457200"/>
-          </a:xfrm>
-          <a:prstGeom prst="rect">
-            <a:avLst/>
-          </a:prstGeom>
-          <a:solidFill>
-            <a:srgbClr val="F8FAFC"/>
-          </a:solidFill>
-          <a:ln/>
-        </p:spPr>
-        <p:txBody>
-          <a:bodyPr/>
-          <a:lstStyle/>
-          <a:p>
-            <a:endParaRPr/>
-          </a:p>
-        </p:txBody>
-      </p:sp>
-      <p:sp>
-        <p:nvSpPr>
-          <p:cNvPr id="432" name="文本框 431" descr="{&quot;isTemplate&quot;:true,&quot;type&quot;:&quot;text&quot;}"/>
-          <p:cNvSpPr txBox="1"/>
-          <p:nvPr/>
-        </p:nvSpPr>
-        <p:spPr>
-          <a:xfrm>
-            <a:off x="666750" y="4010025"/>
-            <a:ext cx="3257550" cy="171450"/>
-          </a:xfrm>
-          <a:prstGeom prst="rect">
-            <a:avLst/>
-          </a:prstGeom>
-        </p:spPr>
-        <p:txBody>
-          <a:bodyPr wrap="none" lIns="0" tIns="0" rIns="0" bIns="0"/>
-          <a:lstStyle/>
-          <a:p>
-            <a:pPr>
-              <a:lnSpc>
-                <a:spcPct val="100000"/>
-              </a:lnSpc>
-            </a:pPr>
-            <a:r>
-              <a:rPr lang="zh-CN" sz="1125" b="1">
-                <a:solidFill>
-                  <a:srgbClr val="1F3A8A"/>
-                </a:solidFill>
-                <a:latin typeface="Microsoft YaHei"/>
-                <a:ea typeface="Microsoft YaHei"/>
-              </a:rPr>
-              <a:t>公开信息查询</a:t>
-            </a:r>
-            <a:endParaRPr/>
-          </a:p>
-        </p:txBody>
-      </p:sp>
-      <p:sp>
-        <p:nvSpPr>
-          <p:cNvPr id="433" name="矩形: 圆角 432"/>
-          <p:cNvSpPr/>
-          <p:nvPr/>
-        </p:nvSpPr>
-        <p:spPr>
-          <a:xfrm>
-            <a:off x="3924300" y="3981450"/>
-            <a:ext cx="2171700" cy="228600"/>
-          </a:xfrm>
-          <a:prstGeom prst="roundRect">
-            <a:avLst>
-              <a:gd name="adj" fmla="val 66667"/>
-            </a:avLst>
-          </a:prstGeom>
-          <a:solidFill>
-            <a:srgbClr val="0EA5E9"/>
-          </a:solidFill>
-          <a:ln/>
-        </p:spPr>
-        <p:txBody>
-          <a:bodyPr/>
-          <a:lstStyle/>
-          <a:p>
-            <a:endParaRPr/>
-          </a:p>
-        </p:txBody>
-      </p:sp>
-      <p:sp>
-        <p:nvSpPr>
-          <p:cNvPr id="434" name="文本框 433" descr="{&quot;isTemplate&quot;:true,&quot;type&quot;:&quot;text&quot;}"/>
-          <p:cNvSpPr txBox="1"/>
-          <p:nvPr/>
-        </p:nvSpPr>
-        <p:spPr>
-          <a:xfrm>
-            <a:off x="4057650" y="4019550"/>
-            <a:ext cx="1905000" cy="152400"/>
-          </a:xfrm>
-          <a:prstGeom prst="rect">
-            <a:avLst/>
-          </a:prstGeom>
-        </p:spPr>
-        <p:txBody>
-          <a:bodyPr wrap="none" lIns="0" tIns="0" rIns="0" bIns="0"/>
-          <a:lstStyle/>
-          <a:p>
-            <a:pPr>
-              <a:lnSpc>
-                <a:spcPct val="100000"/>
-              </a:lnSpc>
-            </a:pPr>
-            <a:r>
-              <a:rPr lang="zh-CN" sz="975" b="1">
-                <a:solidFill>
-                  <a:srgbClr val="FFFFFF"/>
-                </a:solidFill>
-                <a:latin typeface="Microsoft YaHei"/>
-                <a:ea typeface="Microsoft YaHei"/>
-              </a:rPr>
-              <a:t>外网</a:t>
-            </a:r>
-            <a:endParaRPr/>
-          </a:p>
-        </p:txBody>
-      </p:sp>
-      <p:sp>
-        <p:nvSpPr>
-          <p:cNvPr id="435" name="文本框 434" descr="{&quot;isTemplate&quot;:true,&quot;type&quot;:&quot;text&quot;}"/>
-          <p:cNvSpPr txBox="1"/>
-          <p:nvPr/>
-        </p:nvSpPr>
-        <p:spPr>
-          <a:xfrm>
-            <a:off x="6096000" y="4019550"/>
-            <a:ext cx="5429250" cy="161925"/>
-          </a:xfrm>
-          <a:prstGeom prst="rect">
-            <a:avLst/>
-          </a:prstGeom>
-        </p:spPr>
-        <p:txBody>
-          <a:bodyPr wrap="none" lIns="0" tIns="0" rIns="0" bIns="0"/>
-          <a:lstStyle/>
-          <a:p>
-            <a:pPr>
-              <a:lnSpc>
-                <a:spcPct val="100000"/>
-              </a:lnSpc>
-            </a:pPr>
-            <a:r>
-              <a:rPr lang="zh-CN" sz="1050">
-                <a:solidFill>
-                  <a:srgbClr val="475569"/>
-                </a:solidFill>
-                <a:latin typeface="Microsoft YaHei"/>
-                <a:ea typeface="Microsoft YaHei"/>
-              </a:rPr>
-              <a:t>无敏感性</a:t>
-            </a:r>
-            <a:endParaRPr/>
-          </a:p>
-        </p:txBody>
-      </p:sp>
-      <p:sp>
-        <p:nvSpPr>
-          <p:cNvPr id="436" name="矩形 435"/>
-          <p:cNvSpPr/>
-          <p:nvPr/>
-        </p:nvSpPr>
-        <p:spPr>
-          <a:xfrm>
-            <a:off x="476250" y="4324350"/>
-            <a:ext cx="11239500" cy="457200"/>
-          </a:xfrm>
-          <a:prstGeom prst="rect">
-            <a:avLst/>
-          </a:prstGeom>
-          <a:solidFill>
-            <a:srgbClr val="FFFFFF"/>
-          </a:solidFill>
-          <a:ln/>
-        </p:spPr>
-        <p:txBody>
-          <a:bodyPr/>
-          <a:lstStyle/>
-          <a:p>
-            <a:endParaRPr/>
-          </a:p>
-        </p:txBody>
-      </p:sp>
-      <p:sp>
-        <p:nvSpPr>
-          <p:cNvPr id="437" name="文本框 436" descr="{&quot;isTemplate&quot;:true,&quot;type&quot;:&quot;text&quot;}"/>
-          <p:cNvSpPr txBox="1"/>
-          <p:nvPr/>
-        </p:nvSpPr>
-        <p:spPr>
-          <a:xfrm>
-            <a:off x="666750" y="4467225"/>
-            <a:ext cx="3257550" cy="171450"/>
-          </a:xfrm>
-          <a:prstGeom prst="rect">
-            <a:avLst/>
-          </a:prstGeom>
-        </p:spPr>
-        <p:txBody>
-          <a:bodyPr wrap="none" lIns="0" tIns="0" rIns="0" bIns="0"/>
-          <a:lstStyle/>
-          <a:p>
-            <a:pPr>
-              <a:lnSpc>
-                <a:spcPct val="100000"/>
-              </a:lnSpc>
-            </a:pPr>
-            <a:r>
-              <a:rPr lang="zh-CN" sz="1125" b="1">
-                <a:solidFill>
-                  <a:srgbClr val="1F3A8A"/>
-                </a:solidFill>
-                <a:latin typeface="Microsoft YaHei"/>
-                <a:ea typeface="Microsoft YaHei"/>
-              </a:rPr>
-              <a:t>复杂推理</a:t>
-            </a:r>
-            <a:r>
-              <a:rPr lang="en-US" sz="1125" b="1">
-                <a:solidFill>
-                  <a:srgbClr val="1F3A8A"/>
-                </a:solidFill>
-                <a:latin typeface="Microsoft YaHei"/>
-                <a:ea typeface="Microsoft YaHei"/>
-              </a:rPr>
-              <a:t> / </a:t>
-            </a:r>
-            <a:r>
-              <a:rPr lang="zh-CN" sz="1125" b="1">
-                <a:solidFill>
-                  <a:srgbClr val="1F3A8A"/>
-                </a:solidFill>
-                <a:latin typeface="Microsoft YaHei"/>
-                <a:ea typeface="Microsoft YaHei"/>
-              </a:rPr>
-              <a:t>编码</a:t>
-            </a:r>
-            <a:endParaRPr/>
-          </a:p>
-        </p:txBody>
-      </p:sp>
-      <p:sp>
-        <p:nvSpPr>
-          <p:cNvPr id="438" name="矩形: 圆角 437"/>
-          <p:cNvSpPr/>
-          <p:nvPr/>
-        </p:nvSpPr>
-        <p:spPr>
-          <a:xfrm>
-            <a:off x="3924300" y="4438650"/>
-            <a:ext cx="2171700" cy="228600"/>
-          </a:xfrm>
-          <a:prstGeom prst="roundRect">
-            <a:avLst>
-              <a:gd name="adj" fmla="val 66667"/>
-            </a:avLst>
-          </a:prstGeom>
-          <a:solidFill>
-            <a:srgbClr val="F59E0B"/>
-          </a:solidFill>
-          <a:ln/>
-        </p:spPr>
-        <p:txBody>
-          <a:bodyPr/>
-          <a:lstStyle/>
-          <a:p>
-            <a:endParaRPr/>
-          </a:p>
-        </p:txBody>
-      </p:sp>
-      <p:sp>
-        <p:nvSpPr>
-          <p:cNvPr id="439" name="文本框 438" descr="{&quot;isTemplate&quot;:true,&quot;type&quot;:&quot;text&quot;}"/>
-          <p:cNvSpPr txBox="1"/>
-          <p:nvPr/>
-        </p:nvSpPr>
-        <p:spPr>
-          <a:xfrm>
-            <a:off x="4057650" y="4476750"/>
-            <a:ext cx="1905000" cy="152400"/>
-          </a:xfrm>
-          <a:prstGeom prst="rect">
-            <a:avLst/>
-          </a:prstGeom>
-        </p:spPr>
-        <p:txBody>
-          <a:bodyPr wrap="none" lIns="0" tIns="0" rIns="0" bIns="0"/>
-          <a:lstStyle/>
-          <a:p>
-            <a:pPr>
-              <a:lnSpc>
-                <a:spcPct val="100000"/>
-              </a:lnSpc>
-            </a:pPr>
-            <a:r>
-              <a:rPr lang="zh-CN" sz="975" b="1">
-                <a:solidFill>
-                  <a:srgbClr val="FFFFFF"/>
-                </a:solidFill>
-                <a:latin typeface="Microsoft YaHei"/>
-                <a:ea typeface="Microsoft YaHei"/>
-              </a:rPr>
-              <a:t>视情况</a:t>
-            </a:r>
-            <a:endParaRPr/>
-          </a:p>
-        </p:txBody>
-      </p:sp>
-      <p:sp>
-        <p:nvSpPr>
-          <p:cNvPr id="440" name="文本框 439" descr="{&quot;isTemplate&quot;:true,&quot;type&quot;:&quot;text&quot;}"/>
-          <p:cNvSpPr txBox="1"/>
-          <p:nvPr/>
-        </p:nvSpPr>
-        <p:spPr>
-          <a:xfrm>
-            <a:off x="6096000" y="4476750"/>
-            <a:ext cx="5429250" cy="161925"/>
-          </a:xfrm>
-          <a:prstGeom prst="rect">
-            <a:avLst/>
-          </a:prstGeom>
-        </p:spPr>
-        <p:txBody>
-          <a:bodyPr wrap="none" lIns="0" tIns="0" rIns="0" bIns="0"/>
-          <a:lstStyle/>
-          <a:p>
-            <a:pPr>
-              <a:lnSpc>
-                <a:spcPct val="100000"/>
-              </a:lnSpc>
-            </a:pPr>
-            <a:r>
-              <a:rPr lang="zh-CN" sz="1050">
-                <a:solidFill>
-                  <a:srgbClr val="475569"/>
-                </a:solidFill>
-                <a:latin typeface="Microsoft YaHei"/>
-                <a:ea typeface="Microsoft YaHei"/>
-              </a:rPr>
-              <a:t>取决于成本与隐私</a:t>
-            </a:r>
-            <a:endParaRPr/>
-          </a:p>
-        </p:txBody>
-      </p:sp>
-      <p:sp>
-        <p:nvSpPr>
-          <p:cNvPr id="441" name="文本框 440" descr="{&quot;isTemplate&quot;:true,&quot;type&quot;:&quot;text&quot;}"/>
-          <p:cNvSpPr txBox="1"/>
-          <p:nvPr/>
-        </p:nvSpPr>
-        <p:spPr>
-          <a:xfrm>
-            <a:off x="476250" y="6153150"/>
-            <a:ext cx="11239500" cy="228600"/>
-          </a:xfrm>
-          <a:prstGeom prst="rect">
-            <a:avLst/>
-          </a:prstGeom>
-        </p:spPr>
-        <p:txBody>
-          <a:bodyPr wrap="none" lIns="0" tIns="0" rIns="0" bIns="0"/>
-          <a:lstStyle/>
-          <a:p>
-            <a:pPr algn="ctr">
-              <a:lnSpc>
-                <a:spcPct val="100000"/>
-              </a:lnSpc>
-            </a:pPr>
-            <a:r>
-              <a:rPr lang="zh-CN" sz="1500" b="1">
-                <a:solidFill>
-                  <a:srgbClr val="0EA5E9"/>
-                </a:solidFill>
-                <a:latin typeface="Microsoft YaHei"/>
-                <a:ea typeface="Microsoft YaHei"/>
-              </a:rPr>
-              <a:t>敏感度决定部署位置，不是能力决定</a:t>
-            </a:r>
-            <a:endParaRPr/>
-          </a:p>
-        </p:txBody>
-      </p:sp>
     </p:spTree>
   </p:cSld>
   <p:clrMapOvr>
